--- a/aulas/aula-02-requisitos-e-lgpd.pptx
+++ b/aulas/aula-02-requisitos-e-lgpd.pptx
@@ -6,16 +6,17 @@
   </p:sldMasterIdLst>
   <p:sldIdLst>
     <p:sldId id="256" r:id="rId7"/>
-    <p:sldId id="257" r:id="rId8"/>
-    <p:sldId id="258" r:id="rId9"/>
-    <p:sldId id="259" r:id="rId10"/>
-    <p:sldId id="260" r:id="rId11"/>
-    <p:sldId id="261" r:id="rId12"/>
-    <p:sldId id="262" r:id="rId13"/>
-    <p:sldId id="263" r:id="rId14"/>
-    <p:sldId id="264" r:id="rId15"/>
-    <p:sldId id="265" r:id="rId16"/>
-    <p:sldId id="266" r:id="rId17"/>
+    <p:sldId id="257" r:id="rId9"/>
+    <p:sldId id="258" r:id="rId10"/>
+    <p:sldId id="259" r:id="rId11"/>
+    <p:sldId id="260" r:id="rId12"/>
+    <p:sldId id="261" r:id="rId13"/>
+    <p:sldId id="262" r:id="rId14"/>
+    <p:sldId id="263" r:id="rId15"/>
+    <p:sldId id="264" r:id="rId16"/>
+    <p:sldId id="265" r:id="rId17"/>
+    <p:sldId id="266" r:id="rId18"/>
+    <p:sldId id="267" r:id="rId19"/>
   </p:sldIdLst>
   <p:sldSz cx="12191695" cy="6858000" type="screen4x3"/>
   <p:notesSz cx="6858000" cy="9144000"/>
@@ -115,6 +116,916 @@
     </a:lvl9pPr>
   </p:defaultTextStyle>
 </p:presentation>
+</file>
+
+<file path=ppt/notesMasters/notesMaster1.xml><?xml version="1.0" encoding="utf-8"?>
+<p:notesMaster xmlns:a="http://schemas.openxmlformats.org/drawingml/2006/main" xmlns:p="http://schemas.openxmlformats.org/presentationml/2006/main" xmlns:r="http://schemas.openxmlformats.org/officeDocument/2006/relationships">
+  <p:cSld>
+    <p:bg>
+      <p:bgRef idx="1001">
+        <a:schemeClr val="bg1"/>
+      </p:bgRef>
+    </p:bg>
+    <p:spTree>
+      <p:nvGrpSpPr>
+        <p:cNvPr id="1" name=""/>
+        <p:cNvGrpSpPr/>
+        <p:nvPr/>
+      </p:nvGrpSpPr>
+      <p:grpSpPr>
+        <a:xfrm>
+          <a:off x="0" y="0"/>
+          <a:ext cx="0" cy="0"/>
+          <a:chOff x="0" y="0"/>
+          <a:chExt cx="0" cy="0"/>
+        </a:xfrm>
+      </p:grpSpPr>
+      <p:sp>
+        <p:nvSpPr>
+          <p:cNvPr id="2" name="Header Placeholder 1"/>
+          <p:cNvSpPr>
+            <a:spLocks noGrp="1"/>
+          </p:cNvSpPr>
+          <p:nvPr>
+            <p:ph type="hdr" sz="quarter"/>
+          </p:nvPr>
+        </p:nvSpPr>
+        <p:spPr>
+          <a:xfrm>
+            <a:off x="0" y="0"/>
+            <a:ext cx="2971800" cy="457200"/>
+          </a:xfrm>
+          <a:prstGeom prst="rect">
+            <a:avLst/>
+          </a:prstGeom>
+        </p:spPr>
+        <p:txBody>
+          <a:bodyPr vert="horz" lIns="91440" tIns="45720" rIns="91440" bIns="45720" rtlCol="0"/>
+          <a:lstStyle>
+            <a:lvl1pPr algn="l">
+              <a:defRPr sz="1200"/>
+            </a:lvl1pPr>
+          </a:lstStyle>
+          <a:p>
+            <a:endParaRPr lang="en-US"/>
+          </a:p>
+        </p:txBody>
+      </p:sp>
+      <p:sp>
+        <p:nvSpPr>
+          <p:cNvPr id="3" name="Date Placeholder 2"/>
+          <p:cNvSpPr>
+            <a:spLocks noGrp="1"/>
+          </p:cNvSpPr>
+          <p:nvPr>
+            <p:ph type="dt" idx="1"/>
+          </p:nvPr>
+        </p:nvSpPr>
+        <p:spPr>
+          <a:xfrm>
+            <a:off x="3884613" y="0"/>
+            <a:ext cx="2971800" cy="457200"/>
+          </a:xfrm>
+          <a:prstGeom prst="rect">
+            <a:avLst/>
+          </a:prstGeom>
+        </p:spPr>
+        <p:txBody>
+          <a:bodyPr vert="horz" lIns="91440" tIns="45720" rIns="91440" bIns="45720" rtlCol="0"/>
+          <a:lstStyle>
+            <a:lvl1pPr algn="r">
+              <a:defRPr sz="1200"/>
+            </a:lvl1pPr>
+          </a:lstStyle>
+          <a:p>
+            <a:fld id="{0F89C1C7-3DCD-1040-A9CF-14679D8B5DDD}" type="datetimeFigureOut">
+              <a:rPr lang="en-US" smtClean="0"/>
+              <a:t>10/17/16</a:t>
+            </a:fld>
+            <a:endParaRPr lang="en-US"/>
+          </a:p>
+        </p:txBody>
+      </p:sp>
+      <p:sp>
+        <p:nvSpPr>
+          <p:cNvPr id="4" name="Slide Image Placeholder 3"/>
+          <p:cNvSpPr>
+            <a:spLocks noGrp="1" noRot="1" noChangeAspect="1"/>
+          </p:cNvSpPr>
+          <p:nvPr>
+            <p:ph type="sldImg" idx="2"/>
+          </p:nvPr>
+        </p:nvSpPr>
+        <p:spPr>
+          <a:xfrm>
+            <a:off x="1143000" y="685800"/>
+            <a:ext cx="4572000" cy="3429000"/>
+          </a:xfrm>
+          <a:prstGeom prst="rect">
+            <a:avLst/>
+          </a:prstGeom>
+          <a:noFill/>
+          <a:ln w="12700">
+            <a:solidFill>
+              <a:prstClr val="black"/>
+            </a:solidFill>
+          </a:ln>
+        </p:spPr>
+        <p:txBody>
+          <a:bodyPr vert="horz" lIns="91440" tIns="45720" rIns="91440" bIns="45720" rtlCol="0" anchor="ctr"/>
+          <a:lstStyle/>
+          <a:p>
+            <a:endParaRPr lang="en-US"/>
+          </a:p>
+        </p:txBody>
+      </p:sp>
+      <p:sp>
+        <p:nvSpPr>
+          <p:cNvPr id="5" name="Notes Placeholder 4"/>
+          <p:cNvSpPr>
+            <a:spLocks noGrp="1"/>
+          </p:cNvSpPr>
+          <p:nvPr>
+            <p:ph type="body" sz="quarter" idx="3"/>
+          </p:nvPr>
+        </p:nvSpPr>
+        <p:spPr>
+          <a:xfrm>
+            <a:off x="685800" y="4343400"/>
+            <a:ext cx="5486400" cy="4114800"/>
+          </a:xfrm>
+          <a:prstGeom prst="rect">
+            <a:avLst/>
+          </a:prstGeom>
+        </p:spPr>
+        <p:txBody>
+          <a:bodyPr vert="horz" lIns="91440" tIns="45720" rIns="91440" bIns="45720" rtlCol="0"/>
+          <a:lstStyle/>
+          <a:p>
+            <a:pPr lvl="0"/>
+            <a:r>
+              <a:rPr lang="en-US" smtClean="0"/>
+              <a:t>Click to edit Master text styles</a:t>
+            </a:r>
+          </a:p>
+          <a:p>
+            <a:pPr lvl="1"/>
+            <a:r>
+              <a:rPr lang="en-US" smtClean="0"/>
+              <a:t>Second level</a:t>
+            </a:r>
+          </a:p>
+          <a:p>
+            <a:pPr lvl="2"/>
+            <a:r>
+              <a:rPr lang="en-US" smtClean="0"/>
+              <a:t>Third level</a:t>
+            </a:r>
+          </a:p>
+          <a:p>
+            <a:pPr lvl="3"/>
+            <a:r>
+              <a:rPr lang="en-US" smtClean="0"/>
+              <a:t>Fourth level</a:t>
+            </a:r>
+          </a:p>
+          <a:p>
+            <a:pPr lvl="4"/>
+            <a:r>
+              <a:rPr lang="en-US" smtClean="0"/>
+              <a:t>Fifth level</a:t>
+            </a:r>
+            <a:endParaRPr lang="en-US"/>
+          </a:p>
+        </p:txBody>
+      </p:sp>
+      <p:sp>
+        <p:nvSpPr>
+          <p:cNvPr id="6" name="Footer Placeholder 5"/>
+          <p:cNvSpPr>
+            <a:spLocks noGrp="1"/>
+          </p:cNvSpPr>
+          <p:nvPr>
+            <p:ph type="ftr" sz="quarter" idx="4"/>
+          </p:nvPr>
+        </p:nvSpPr>
+        <p:spPr>
+          <a:xfrm>
+            <a:off x="0" y="8685213"/>
+            <a:ext cx="2971800" cy="457200"/>
+          </a:xfrm>
+          <a:prstGeom prst="rect">
+            <a:avLst/>
+          </a:prstGeom>
+        </p:spPr>
+        <p:txBody>
+          <a:bodyPr vert="horz" lIns="91440" tIns="45720" rIns="91440" bIns="45720" rtlCol="0" anchor="b"/>
+          <a:lstStyle>
+            <a:lvl1pPr algn="l">
+              <a:defRPr sz="1200"/>
+            </a:lvl1pPr>
+          </a:lstStyle>
+          <a:p>
+            <a:endParaRPr lang="en-US"/>
+          </a:p>
+        </p:txBody>
+      </p:sp>
+      <p:sp>
+        <p:nvSpPr>
+          <p:cNvPr id="7" name="Slide Number Placeholder 6"/>
+          <p:cNvSpPr>
+            <a:spLocks noGrp="1"/>
+          </p:cNvSpPr>
+          <p:nvPr>
+            <p:ph type="sldNum" sz="quarter" idx="5"/>
+          </p:nvPr>
+        </p:nvSpPr>
+        <p:spPr>
+          <a:xfrm>
+            <a:off x="3884613" y="8685213"/>
+            <a:ext cx="2971800" cy="457200"/>
+          </a:xfrm>
+          <a:prstGeom prst="rect">
+            <a:avLst/>
+          </a:prstGeom>
+        </p:spPr>
+        <p:txBody>
+          <a:bodyPr vert="horz" lIns="91440" tIns="45720" rIns="91440" bIns="45720" rtlCol="0" anchor="b"/>
+          <a:lstStyle>
+            <a:lvl1pPr algn="r">
+              <a:defRPr sz="1200"/>
+            </a:lvl1pPr>
+          </a:lstStyle>
+          <a:p>
+            <a:fld id="{BB5E49A5-4136-284D-997B-48E1D791AD67}" type="slidenum">
+              <a:rPr lang="en-US" smtClean="0"/>
+              <a:t>‹#›</a:t>
+            </a:fld>
+            <a:endParaRPr lang="en-US"/>
+          </a:p>
+        </p:txBody>
+      </p:sp>
+    </p:spTree>
+    <p:extLst>
+      <p:ext uri="{BB962C8B-B14F-4D97-AF65-F5344CB8AC3E}">
+        <p14:creationId xmlns:p14="http://schemas.microsoft.com/office/powerpoint/2010/main" val="2623252185"/>
+      </p:ext>
+    </p:extLst>
+  </p:cSld>
+  <p:clrMap bg1="lt1" tx1="dk1" bg2="lt2" tx2="dk2" accent1="accent1" accent2="accent2" accent3="accent3" accent4="accent4" accent5="accent5" accent6="accent6" hlink="hlink" folHlink="folHlink"/>
+  <p:notesStyle>
+    <a:lvl1pPr marL="0" algn="l" defTabSz="457200" rtl="0" eaLnBrk="1" latinLnBrk="0" hangingPunct="1">
+      <a:defRPr sz="1200" kern="1200">
+        <a:solidFill>
+          <a:schemeClr val="tx1"/>
+        </a:solidFill>
+        <a:latin typeface="+mn-lt"/>
+        <a:ea typeface="+mn-ea"/>
+        <a:cs typeface="+mn-cs"/>
+      </a:defRPr>
+    </a:lvl1pPr>
+    <a:lvl2pPr marL="457200" algn="l" defTabSz="457200" rtl="0" eaLnBrk="1" latinLnBrk="0" hangingPunct="1">
+      <a:defRPr sz="1200" kern="1200">
+        <a:solidFill>
+          <a:schemeClr val="tx1"/>
+        </a:solidFill>
+        <a:latin typeface="+mn-lt"/>
+        <a:ea typeface="+mn-ea"/>
+        <a:cs typeface="+mn-cs"/>
+      </a:defRPr>
+    </a:lvl2pPr>
+    <a:lvl3pPr marL="914400" algn="l" defTabSz="457200" rtl="0" eaLnBrk="1" latinLnBrk="0" hangingPunct="1">
+      <a:defRPr sz="1200" kern="1200">
+        <a:solidFill>
+          <a:schemeClr val="tx1"/>
+        </a:solidFill>
+        <a:latin typeface="+mn-lt"/>
+        <a:ea typeface="+mn-ea"/>
+        <a:cs typeface="+mn-cs"/>
+      </a:defRPr>
+    </a:lvl3pPr>
+    <a:lvl4pPr marL="1371600" algn="l" defTabSz="457200" rtl="0" eaLnBrk="1" latinLnBrk="0" hangingPunct="1">
+      <a:defRPr sz="1200" kern="1200">
+        <a:solidFill>
+          <a:schemeClr val="tx1"/>
+        </a:solidFill>
+        <a:latin typeface="+mn-lt"/>
+        <a:ea typeface="+mn-ea"/>
+        <a:cs typeface="+mn-cs"/>
+      </a:defRPr>
+    </a:lvl4pPr>
+    <a:lvl5pPr marL="1828800" algn="l" defTabSz="457200" rtl="0" eaLnBrk="1" latinLnBrk="0" hangingPunct="1">
+      <a:defRPr sz="1200" kern="1200">
+        <a:solidFill>
+          <a:schemeClr val="tx1"/>
+        </a:solidFill>
+        <a:latin typeface="+mn-lt"/>
+        <a:ea typeface="+mn-ea"/>
+        <a:cs typeface="+mn-cs"/>
+      </a:defRPr>
+    </a:lvl5pPr>
+    <a:lvl6pPr marL="2286000" algn="l" defTabSz="457200" rtl="0" eaLnBrk="1" latinLnBrk="0" hangingPunct="1">
+      <a:defRPr sz="1200" kern="1200">
+        <a:solidFill>
+          <a:schemeClr val="tx1"/>
+        </a:solidFill>
+        <a:latin typeface="+mn-lt"/>
+        <a:ea typeface="+mn-ea"/>
+        <a:cs typeface="+mn-cs"/>
+      </a:defRPr>
+    </a:lvl6pPr>
+    <a:lvl7pPr marL="2743200" algn="l" defTabSz="457200" rtl="0" eaLnBrk="1" latinLnBrk="0" hangingPunct="1">
+      <a:defRPr sz="1200" kern="1200">
+        <a:solidFill>
+          <a:schemeClr val="tx1"/>
+        </a:solidFill>
+        <a:latin typeface="+mn-lt"/>
+        <a:ea typeface="+mn-ea"/>
+        <a:cs typeface="+mn-cs"/>
+      </a:defRPr>
+    </a:lvl7pPr>
+    <a:lvl8pPr marL="3200400" algn="l" defTabSz="457200" rtl="0" eaLnBrk="1" latinLnBrk="0" hangingPunct="1">
+      <a:defRPr sz="1200" kern="1200">
+        <a:solidFill>
+          <a:schemeClr val="tx1"/>
+        </a:solidFill>
+        <a:latin typeface="+mn-lt"/>
+        <a:ea typeface="+mn-ea"/>
+        <a:cs typeface="+mn-cs"/>
+      </a:defRPr>
+    </a:lvl8pPr>
+    <a:lvl9pPr marL="3657600" algn="l" defTabSz="457200" rtl="0" eaLnBrk="1" latinLnBrk="0" hangingPunct="1">
+      <a:defRPr sz="1200" kern="1200">
+        <a:solidFill>
+          <a:schemeClr val="tx1"/>
+        </a:solidFill>
+        <a:latin typeface="+mn-lt"/>
+        <a:ea typeface="+mn-ea"/>
+        <a:cs typeface="+mn-cs"/>
+      </a:defRPr>
+    </a:lvl9pPr>
+  </p:notesStyle>
+</p:notesMaster>
+</file>
+
+<file path=ppt/notesSlides/notesSlide1.xml><?xml version="1.0" encoding="utf-8"?>
+<p:notes xmlns:a="http://schemas.openxmlformats.org/drawingml/2006/main" xmlns:p="http://schemas.openxmlformats.org/presentationml/2006/main" xmlns:r="http://schemas.openxmlformats.org/officeDocument/2006/relationships">
+  <p:cSld>
+    <p:spTree>
+      <p:nvGrpSpPr>
+        <p:cNvPr id="1" name=""/>
+        <p:cNvGrpSpPr/>
+        <p:nvPr/>
+      </p:nvGrpSpPr>
+      <p:grpSpPr>
+        <a:xfrm>
+          <a:off x="0" y="0"/>
+          <a:ext cx="0" cy="0"/>
+          <a:chOff x="0" y="0"/>
+          <a:chExt cx="0" cy="0"/>
+        </a:xfrm>
+      </p:grpSpPr>
+      <p:sp>
+        <p:nvSpPr>
+          <p:cNvPr id="2" name="Slide Image Placeholder 1"/>
+          <p:cNvSpPr>
+            <a:spLocks noGrp="1"/>
+          </p:cNvSpPr>
+          <p:nvPr>
+            <p:ph type="sldImg" idx="2"/>
+          </p:nvPr>
+        </p:nvSpPr>
+        <p:spPr/>
+      </p:sp>
+      <p:sp>
+        <p:nvSpPr>
+          <p:cNvPr id="3" name="Notes Placeholder 2"/>
+          <p:cNvSpPr>
+            <a:spLocks noGrp="1"/>
+          </p:cNvSpPr>
+          <p:nvPr>
+            <p:ph type="body" idx="3" sz="quarter"/>
+          </p:nvPr>
+        </p:nvSpPr>
+        <p:spPr/>
+        <p:txBody>
+          <a:bodyPr/>
+          <a:lstStyle/>
+          <a:p>
+            <a:r>
+              <a:t>Aula 2. Aprendemos a transformar 'quero segurança' em requisitos específicos e testáveis, e vemos a LGPD como fonte formal de requisitos. Entregável: catálogo inicial de requisitos do VidaPlus com base legal (Fase 1).</a:t>
+            </a:r>
+          </a:p>
+        </p:txBody>
+      </p:sp>
+      <p:sp>
+        <p:nvSpPr>
+          <p:cNvPr id="4" name="Slide Number Placeholder 3"/>
+          <p:cNvSpPr>
+            <a:spLocks noGrp="1"/>
+          </p:cNvSpPr>
+          <p:nvPr>
+            <p:ph type="sldNum" idx="5" sz="quarter"/>
+          </p:nvPr>
+        </p:nvSpPr>
+        <p:spPr/>
+      </p:sp>
+    </p:spTree>
+  </p:cSld>
+  <p:clrMapOvr>
+    <a:masterClrMapping/>
+  </p:clrMapOvr>
+</p:notes>
+</file>
+
+<file path=ppt/notesSlides/notesSlide2.xml><?xml version="1.0" encoding="utf-8"?>
+<p:notes xmlns:a="http://schemas.openxmlformats.org/drawingml/2006/main" xmlns:p="http://schemas.openxmlformats.org/presentationml/2006/main" xmlns:r="http://schemas.openxmlformats.org/officeDocument/2006/relationships">
+  <p:cSld>
+    <p:spTree>
+      <p:nvGrpSpPr>
+        <p:cNvPr id="1" name=""/>
+        <p:cNvGrpSpPr/>
+        <p:nvPr/>
+      </p:nvGrpSpPr>
+      <p:grpSpPr>
+        <a:xfrm>
+          <a:off x="0" y="0"/>
+          <a:ext cx="0" cy="0"/>
+          <a:chOff x="0" y="0"/>
+          <a:chExt cx="0" cy="0"/>
+        </a:xfrm>
+      </p:grpSpPr>
+      <p:sp>
+        <p:nvSpPr>
+          <p:cNvPr id="2" name="Slide Image Placeholder 1"/>
+          <p:cNvSpPr>
+            <a:spLocks noGrp="1"/>
+          </p:cNvSpPr>
+          <p:nvPr>
+            <p:ph type="sldImg" idx="2"/>
+          </p:nvPr>
+        </p:nvSpPr>
+        <p:spPr/>
+      </p:sp>
+      <p:sp>
+        <p:nvSpPr>
+          <p:cNvPr id="3" name="Notes Placeholder 2"/>
+          <p:cNvSpPr>
+            <a:spLocks noGrp="1"/>
+          </p:cNvSpPr>
+          <p:nvPr>
+            <p:ph type="body" idx="3" sz="quarter"/>
+          </p:nvPr>
+        </p:nvSpPr>
+        <p:spPr/>
+        <p:txBody>
+          <a:bodyPr/>
+          <a:lstStyle/>
+          <a:p>
+            <a:r>
+              <a:t>A engenharia de software separa requisitos funcionais (comportamento) de não-funcionais (qualidade). Segurança é frequentemente rotulada como 'RNF', o que leva a tratá-la como opcional. Na verdade ela é as duas coisas: há funções de segurança (autenticar, autorizar) e há segurança como propriedade que atravessa todas as funções. Um bom requisito de segurança nomeia o ativo, a ameaça e o critério de aceite.</a:t>
+            </a:r>
+          </a:p>
+        </p:txBody>
+      </p:sp>
+      <p:sp>
+        <p:nvSpPr>
+          <p:cNvPr id="4" name="Slide Number Placeholder 3"/>
+          <p:cNvSpPr>
+            <a:spLocks noGrp="1"/>
+          </p:cNvSpPr>
+          <p:nvPr>
+            <p:ph type="sldNum" idx="5" sz="quarter"/>
+          </p:nvPr>
+        </p:nvSpPr>
+        <p:spPr/>
+      </p:sp>
+    </p:spTree>
+  </p:cSld>
+  <p:clrMapOvr>
+    <a:masterClrMapping/>
+  </p:clrMapOvr>
+</p:notes>
+</file>
+
+<file path=ppt/notesSlides/notesSlide3.xml><?xml version="1.0" encoding="utf-8"?>
+<p:notes xmlns:a="http://schemas.openxmlformats.org/drawingml/2006/main" xmlns:p="http://schemas.openxmlformats.org/presentationml/2006/main" xmlns:r="http://schemas.openxmlformats.org/officeDocument/2006/relationships">
+  <p:cSld>
+    <p:spTree>
+      <p:nvGrpSpPr>
+        <p:cNvPr id="1" name=""/>
+        <p:cNvGrpSpPr/>
+        <p:nvPr/>
+      </p:nvGrpSpPr>
+      <p:grpSpPr>
+        <a:xfrm>
+          <a:off x="0" y="0"/>
+          <a:ext cx="0" cy="0"/>
+          <a:chOff x="0" y="0"/>
+          <a:chExt cx="0" cy="0"/>
+        </a:xfrm>
+      </p:grpSpPr>
+      <p:sp>
+        <p:nvSpPr>
+          <p:cNvPr id="2" name="Slide Image Placeholder 1"/>
+          <p:cNvSpPr>
+            <a:spLocks noGrp="1"/>
+          </p:cNvSpPr>
+          <p:nvPr>
+            <p:ph type="sldImg" idx="2"/>
+          </p:nvPr>
+        </p:nvSpPr>
+        <p:spPr/>
+      </p:sp>
+      <p:sp>
+        <p:nvSpPr>
+          <p:cNvPr id="3" name="Notes Placeholder 2"/>
+          <p:cNvSpPr>
+            <a:spLocks noGrp="1"/>
+          </p:cNvSpPr>
+          <p:nvPr>
+            <p:ph type="body" idx="3" sz="quarter"/>
+          </p:nvPr>
+        </p:nvSpPr>
+        <p:spPr/>
+        <p:txBody>
+          <a:bodyPr/>
+          <a:lstStyle/>
+          <a:p>
+            <a:r>
+              <a:t>Tratar segurança como 'RNF que dá para adiar' é a raiz da maioria dos incidentes. Reposicione: 'o sistema deve fazer X e SOMENTE X, mesmo sob ataque' é um requisito de negócio. Consequência prática: requisitos de segurança entram no backlog e na Definition of Done com o mesmo peso de qualquer requisito funcional (Shift Left).</a:t>
+            </a:r>
+          </a:p>
+        </p:txBody>
+      </p:sp>
+      <p:sp>
+        <p:nvSpPr>
+          <p:cNvPr id="4" name="Slide Number Placeholder 3"/>
+          <p:cNvSpPr>
+            <a:spLocks noGrp="1"/>
+          </p:cNvSpPr>
+          <p:nvPr>
+            <p:ph type="sldNum" idx="5" sz="quarter"/>
+          </p:nvPr>
+        </p:nvSpPr>
+        <p:spPr/>
+      </p:sp>
+    </p:spTree>
+  </p:cSld>
+  <p:clrMapOvr>
+    <a:masterClrMapping/>
+  </p:clrMapOvr>
+</p:notes>
+</file>
+
+<file path=ppt/notesSlides/notesSlide4.xml><?xml version="1.0" encoding="utf-8"?>
+<p:notes xmlns:a="http://schemas.openxmlformats.org/drawingml/2006/main" xmlns:p="http://schemas.openxmlformats.org/presentationml/2006/main" xmlns:r="http://schemas.openxmlformats.org/officeDocument/2006/relationships">
+  <p:cSld>
+    <p:spTree>
+      <p:nvGrpSpPr>
+        <p:cNvPr id="1" name=""/>
+        <p:cNvGrpSpPr/>
+        <p:nvPr/>
+      </p:nvGrpSpPr>
+      <p:grpSpPr>
+        <a:xfrm>
+          <a:off x="0" y="0"/>
+          <a:ext cx="0" cy="0"/>
+          <a:chOff x="0" y="0"/>
+          <a:chExt cx="0" cy="0"/>
+        </a:xfrm>
+      </p:grpSpPr>
+      <p:sp>
+        <p:nvSpPr>
+          <p:cNvPr id="2" name="Slide Image Placeholder 1"/>
+          <p:cNvSpPr>
+            <a:spLocks noGrp="1"/>
+          </p:cNvSpPr>
+          <p:nvPr>
+            <p:ph type="sldImg" idx="2"/>
+          </p:nvPr>
+        </p:nvSpPr>
+        <p:spPr/>
+      </p:sp>
+      <p:sp>
+        <p:nvSpPr>
+          <p:cNvPr id="3" name="Notes Placeholder 2"/>
+          <p:cNvSpPr>
+            <a:spLocks noGrp="1"/>
+          </p:cNvSpPr>
+          <p:nvPr>
+            <p:ph type="body" idx="3" sz="quarter"/>
+          </p:nvPr>
+        </p:nvSpPr>
+        <p:spPr/>
+        <p:txBody>
+          <a:bodyPr/>
+          <a:lstStyle/>
+          <a:p>
+            <a:r>
+              <a:t>Distinção central da disciplina: RFS (Requisito Funcional de Segurança) é o mecanismo que protege — responde 'o que o sistema faz para se proteger?'. RGS (Requisito de Garantia / assurance) é a prova de que o mecanismo funciona — responde 'quanta confiança temos?'. Equivalem ao par SFR × SAR do Common Criteria. Todo controle P0 deve ter um RGS associado (um teste no CI, cobertura DAST, nível ASVS verificado).</a:t>
+            </a:r>
+          </a:p>
+        </p:txBody>
+      </p:sp>
+      <p:sp>
+        <p:nvSpPr>
+          <p:cNvPr id="4" name="Slide Number Placeholder 3"/>
+          <p:cNvSpPr>
+            <a:spLocks noGrp="1"/>
+          </p:cNvSpPr>
+          <p:nvPr>
+            <p:ph type="sldNum" idx="5" sz="quarter"/>
+          </p:nvPr>
+        </p:nvSpPr>
+        <p:spPr/>
+      </p:sp>
+    </p:spTree>
+  </p:cSld>
+  <p:clrMapOvr>
+    <a:masterClrMapping/>
+  </p:clrMapOvr>
+</p:notes>
+</file>
+
+<file path=ppt/notesSlides/notesSlide5.xml><?xml version="1.0" encoding="utf-8"?>
+<p:notes xmlns:a="http://schemas.openxmlformats.org/drawingml/2006/main" xmlns:p="http://schemas.openxmlformats.org/presentationml/2006/main" xmlns:r="http://schemas.openxmlformats.org/officeDocument/2006/relationships">
+  <p:cSld>
+    <p:spTree>
+      <p:nvGrpSpPr>
+        <p:cNvPr id="1" name=""/>
+        <p:cNvGrpSpPr/>
+        <p:nvPr/>
+      </p:nvGrpSpPr>
+      <p:grpSpPr>
+        <a:xfrm>
+          <a:off x="0" y="0"/>
+          <a:ext cx="0" cy="0"/>
+          <a:chOff x="0" y="0"/>
+          <a:chExt cx="0" cy="0"/>
+        </a:xfrm>
+      </p:grpSpPr>
+      <p:sp>
+        <p:nvSpPr>
+          <p:cNvPr id="2" name="Slide Image Placeholder 1"/>
+          <p:cNvSpPr>
+            <a:spLocks noGrp="1"/>
+          </p:cNvSpPr>
+          <p:nvPr>
+            <p:ph type="sldImg" idx="2"/>
+          </p:nvPr>
+        </p:nvSpPr>
+        <p:spPr/>
+      </p:sp>
+      <p:sp>
+        <p:nvSpPr>
+          <p:cNvPr id="3" name="Notes Placeholder 2"/>
+          <p:cNvSpPr>
+            <a:spLocks noGrp="1"/>
+          </p:cNvSpPr>
+          <p:nvPr>
+            <p:ph type="body" idx="3" sz="quarter"/>
+          </p:nvPr>
+        </p:nvSpPr>
+        <p:spPr/>
+        <p:txBody>
+          <a:bodyPr/>
+          <a:lstStyle/>
+          <a:p>
+            <a:r>
+              <a:t>Requisitos não se 'inventam': garimpa-se em quatro fontes complementares. Negócio diz o que importa; a lei diz o que é obrigatório; os padrões dizem o que é esperado; as ameaças dizem contra o que defender. Fontes 1-2 geram requisitos de alto nível (políticas); fontes 3-4 ajudam a derivar requisitos técnicos testáveis.</a:t>
+            </a:r>
+          </a:p>
+        </p:txBody>
+      </p:sp>
+      <p:sp>
+        <p:nvSpPr>
+          <p:cNvPr id="4" name="Slide Number Placeholder 3"/>
+          <p:cNvSpPr>
+            <a:spLocks noGrp="1"/>
+          </p:cNvSpPr>
+          <p:nvPr>
+            <p:ph type="sldNum" idx="5" sz="quarter"/>
+          </p:nvPr>
+        </p:nvSpPr>
+        <p:spPr/>
+      </p:sp>
+    </p:spTree>
+  </p:cSld>
+  <p:clrMapOvr>
+    <a:masterClrMapping/>
+  </p:clrMapOvr>
+</p:notes>
+</file>
+
+<file path=ppt/notesSlides/notesSlide6.xml><?xml version="1.0" encoding="utf-8"?>
+<p:notes xmlns:a="http://schemas.openxmlformats.org/drawingml/2006/main" xmlns:p="http://schemas.openxmlformats.org/presentationml/2006/main" xmlns:r="http://schemas.openxmlformats.org/officeDocument/2006/relationships">
+  <p:cSld>
+    <p:spTree>
+      <p:nvGrpSpPr>
+        <p:cNvPr id="1" name=""/>
+        <p:cNvGrpSpPr/>
+        <p:nvPr/>
+      </p:nvGrpSpPr>
+      <p:grpSpPr>
+        <a:xfrm>
+          <a:off x="0" y="0"/>
+          <a:ext cx="0" cy="0"/>
+          <a:chOff x="0" y="0"/>
+          <a:chExt cx="0" cy="0"/>
+        </a:xfrm>
+      </p:grpSpPr>
+      <p:sp>
+        <p:nvSpPr>
+          <p:cNvPr id="2" name="Slide Image Placeholder 1"/>
+          <p:cNvSpPr>
+            <a:spLocks noGrp="1"/>
+          </p:cNvSpPr>
+          <p:nvPr>
+            <p:ph type="sldImg" idx="2"/>
+          </p:nvPr>
+        </p:nvSpPr>
+        <p:spPr/>
+      </p:sp>
+      <p:sp>
+        <p:nvSpPr>
+          <p:cNvPr id="3" name="Notes Placeholder 2"/>
+          <p:cNvSpPr>
+            <a:spLocks noGrp="1"/>
+          </p:cNvSpPr>
+          <p:nvPr>
+            <p:ph type="body" idx="3" sz="quarter"/>
+          </p:nvPr>
+        </p:nvSpPr>
+        <p:spPr/>
+        <p:txBody>
+          <a:bodyPr/>
+          <a:lstStyle/>
+          <a:p>
+            <a:r>
+              <a:t>A LGPD (Lei 13.709/2018) é fonte formal de requisitos. Cada cláusula aplicável vira um requisito rastreável: 'art. 46 -&gt; cifrar dados em repouso com AES-256'. O VidaPlus trata dados de saúde (art. 11), que exigem regime reforçado. O art. 18 (direitos do titular) vira funcionalidades a construir: exportação, eliminação, consentimento.</a:t>
+            </a:r>
+          </a:p>
+        </p:txBody>
+      </p:sp>
+      <p:sp>
+        <p:nvSpPr>
+          <p:cNvPr id="4" name="Slide Number Placeholder 3"/>
+          <p:cNvSpPr>
+            <a:spLocks noGrp="1"/>
+          </p:cNvSpPr>
+          <p:nvPr>
+            <p:ph type="sldNum" idx="5" sz="quarter"/>
+          </p:nvPr>
+        </p:nvSpPr>
+        <p:spPr/>
+      </p:sp>
+    </p:spTree>
+  </p:cSld>
+  <p:clrMapOvr>
+    <a:masterClrMapping/>
+  </p:clrMapOvr>
+</p:notes>
+</file>
+
+<file path=ppt/notesSlides/notesSlide7.xml><?xml version="1.0" encoding="utf-8"?>
+<p:notes xmlns:a="http://schemas.openxmlformats.org/drawingml/2006/main" xmlns:p="http://schemas.openxmlformats.org/presentationml/2006/main" xmlns:r="http://schemas.openxmlformats.org/officeDocument/2006/relationships">
+  <p:cSld>
+    <p:spTree>
+      <p:nvGrpSpPr>
+        <p:cNvPr id="1" name=""/>
+        <p:cNvGrpSpPr/>
+        <p:nvPr/>
+      </p:nvGrpSpPr>
+      <p:grpSpPr>
+        <a:xfrm>
+          <a:off x="0" y="0"/>
+          <a:ext cx="0" cy="0"/>
+          <a:chOff x="0" y="0"/>
+          <a:chExt cx="0" cy="0"/>
+        </a:xfrm>
+      </p:grpSpPr>
+      <p:sp>
+        <p:nvSpPr>
+          <p:cNvPr id="2" name="Slide Image Placeholder 1"/>
+          <p:cNvSpPr>
+            <a:spLocks noGrp="1"/>
+          </p:cNvSpPr>
+          <p:nvPr>
+            <p:ph type="sldImg" idx="2"/>
+          </p:nvPr>
+        </p:nvSpPr>
+        <p:spPr/>
+      </p:sp>
+      <p:sp>
+        <p:nvSpPr>
+          <p:cNvPr id="3" name="Notes Placeholder 2"/>
+          <p:cNvSpPr>
+            <a:spLocks noGrp="1"/>
+          </p:cNvSpPr>
+          <p:nvPr>
+            <p:ph type="body" idx="3" sz="quarter"/>
+          </p:nvPr>
+        </p:nvSpPr>
+        <p:spPr/>
+        <p:txBody>
+          <a:bodyPr/>
+          <a:lstStyle/>
+          <a:p>
+            <a:r>
+              <a:t>O critério de qualidade é SMART. Compare: 'proteger senhas' não é verificável — como testar? Já 'Argon2id com m=19MiB e salt de 16 bytes, MD5 proibido' é verificável por teste (consulto o banco e confiro o formato do hash). Um requisito sem critério de aceite é apenas uma intenção; com critério, ele vira um portão de qualidade.</a:t>
+            </a:r>
+          </a:p>
+        </p:txBody>
+      </p:sp>
+      <p:sp>
+        <p:nvSpPr>
+          <p:cNvPr id="4" name="Slide Number Placeholder 3"/>
+          <p:cNvSpPr>
+            <a:spLocks noGrp="1"/>
+          </p:cNvSpPr>
+          <p:nvPr>
+            <p:ph type="sldNum" idx="5" sz="quarter"/>
+          </p:nvPr>
+        </p:nvSpPr>
+        <p:spPr/>
+      </p:sp>
+    </p:spTree>
+  </p:cSld>
+  <p:clrMapOvr>
+    <a:masterClrMapping/>
+  </p:clrMapOvr>
+</p:notes>
+</file>
+
+<file path=ppt/notesSlides/notesSlide8.xml><?xml version="1.0" encoding="utf-8"?>
+<p:notes xmlns:a="http://schemas.openxmlformats.org/drawingml/2006/main" xmlns:p="http://schemas.openxmlformats.org/presentationml/2006/main" xmlns:r="http://schemas.openxmlformats.org/officeDocument/2006/relationships">
+  <p:cSld>
+    <p:spTree>
+      <p:nvGrpSpPr>
+        <p:cNvPr id="1" name=""/>
+        <p:cNvGrpSpPr/>
+        <p:nvPr/>
+      </p:nvGrpSpPr>
+      <p:grpSpPr>
+        <a:xfrm>
+          <a:off x="0" y="0"/>
+          <a:ext cx="0" cy="0"/>
+          <a:chOff x="0" y="0"/>
+          <a:chExt cx="0" cy="0"/>
+        </a:xfrm>
+      </p:grpSpPr>
+      <p:sp>
+        <p:nvSpPr>
+          <p:cNvPr id="2" name="Slide Image Placeholder 1"/>
+          <p:cNvSpPr>
+            <a:spLocks noGrp="1"/>
+          </p:cNvSpPr>
+          <p:nvPr>
+            <p:ph type="sldImg" idx="2"/>
+          </p:nvPr>
+        </p:nvSpPr>
+        <p:spPr/>
+      </p:sp>
+      <p:sp>
+        <p:nvSpPr>
+          <p:cNvPr id="3" name="Notes Placeholder 2"/>
+          <p:cNvSpPr>
+            <a:spLocks noGrp="1"/>
+          </p:cNvSpPr>
+          <p:nvPr>
+            <p:ph type="body" idx="3" sz="quarter"/>
+          </p:nvPr>
+        </p:nvSpPr>
+        <p:spPr/>
+        <p:txBody>
+          <a:bodyPr/>
+          <a:lstStyle/>
+          <a:p>
+            <a:r>
+              <a:t>Agora sim a coluna 'base legal' da tabela da Fase 0 é preenchida. Para cada funcionalidade do pacote do grupo, escreva RFS e RGS testáveis, aponte a base legal e defina o nível ASVS alvo (L2, por causa dos dados de saúde). O catálogo desta fase alimenta o threat modeling (Aula 3) e a especificação (Aula 5).</a:t>
+            </a:r>
+          </a:p>
+        </p:txBody>
+      </p:sp>
+      <p:sp>
+        <p:nvSpPr>
+          <p:cNvPr id="4" name="Slide Number Placeholder 3"/>
+          <p:cNvSpPr>
+            <a:spLocks noGrp="1"/>
+          </p:cNvSpPr>
+          <p:nvPr>
+            <p:ph type="sldNum" idx="5" sz="quarter"/>
+          </p:nvPr>
+        </p:nvSpPr>
+        <p:spPr/>
+      </p:sp>
+    </p:spTree>
+  </p:cSld>
+  <p:clrMapOvr>
+    <a:masterClrMapping/>
+  </p:clrMapOvr>
+</p:notes>
 </file>
 
 <file path=ppt/slideLayouts/slideLayout1.xml><?xml version="1.0" encoding="utf-8"?>
@@ -3462,13 +4373,13 @@
         <p:spPr>
           <a:xfrm>
             <a:off x="0" y="0"/>
-            <a:ext cx="12191695" cy="1234440"/>
+            <a:ext cx="12191695" cy="6858000"/>
           </a:xfrm>
           <a:prstGeom prst="rect">
             <a:avLst/>
           </a:prstGeom>
           <a:solidFill>
-            <a:srgbClr val="2D7A3D"/>
+            <a:srgbClr val="1F5232"/>
           </a:solidFill>
           <a:ln>
             <a:noFill/>
@@ -3505,8 +4416,8 @@
         </p:nvSpPr>
         <p:spPr>
           <a:xfrm>
-            <a:off x="457200" y="164592"/>
-            <a:ext cx="11247120" cy="640080"/>
+            <a:off x="457200" y="2194560"/>
+            <a:ext cx="11247120" cy="548640"/>
           </a:xfrm>
           <a:prstGeom prst="rect">
             <a:avLst/>
@@ -3519,7 +4430,7 @@
           </a:bodyPr>
           <a:lstStyle/>
           <a:p>
-            <a:pPr algn="l">
+            <a:pPr algn="ctr">
               <a:lnSpc>
                 <a:spcPct val="100000"/>
               </a:lnSpc>
@@ -3531,13 +4442,13 @@
               </a:spcAft>
             </a:pPr>
             <a:r>
-              <a:rPr sz="3200" b="1" i="0">
-                <a:solidFill>
-                  <a:srgbClr val="FFFFFF"/>
-                </a:solidFill>
-                <a:latin typeface="Open Sans"/>
-              </a:rPr>
-              <a:t>Entregável da Fase 1</a:t>
+              <a:rPr sz="2000" b="1" i="0">
+                <a:solidFill>
+                  <a:srgbClr val="7CB342"/>
+                </a:solidFill>
+                <a:latin typeface="Open Sans"/>
+              </a:rPr>
+              <a:t>PARTE 3</a:t>
             </a:r>
           </a:p>
         </p:txBody>
@@ -3550,8 +4461,8 @@
         </p:nvSpPr>
         <p:spPr>
           <a:xfrm>
-            <a:off x="457200" y="777240"/>
-            <a:ext cx="11247120" cy="365760"/>
+            <a:off x="457200" y="2834640"/>
+            <a:ext cx="11247120" cy="1280160"/>
           </a:xfrm>
           <a:prstGeom prst="rect">
             <a:avLst/>
@@ -3564,7 +4475,7 @@
           </a:bodyPr>
           <a:lstStyle/>
           <a:p>
-            <a:pPr algn="l">
+            <a:pPr algn="ctr">
               <a:lnSpc>
                 <a:spcPct val="100000"/>
               </a:lnSpc>
@@ -3576,281 +4487,27 @@
               </a:spcAft>
             </a:pPr>
             <a:r>
-              <a:rPr sz="1600" b="0" i="1">
-                <a:solidFill>
-                  <a:srgbClr val="E0E8DB"/>
-                </a:solidFill>
-                <a:latin typeface="Open Sans"/>
-              </a:rPr>
-              <a:t>Catálogo inicial de requisitos</a:t>
-            </a:r>
-          </a:p>
-        </p:txBody>
-      </p:sp>
-      <p:sp>
-        <p:nvSpPr>
-          <p:cNvPr id="5" name="Rounded Rectangle 4"/>
-          <p:cNvSpPr/>
-          <p:nvPr/>
-        </p:nvSpPr>
-        <p:spPr>
-          <a:xfrm>
-            <a:off x="411480" y="1463040"/>
-            <a:ext cx="11384280" cy="5029200"/>
-          </a:xfrm>
-          <a:prstGeom prst="roundRect">
-            <a:avLst/>
-          </a:prstGeom>
-          <a:solidFill>
-            <a:srgbClr val="F5F5F5"/>
-          </a:solidFill>
-          <a:ln w="15875">
-            <a:solidFill>
-              <a:srgbClr val="7CB342"/>
-            </a:solidFill>
-          </a:ln>
-          <a:effectLst/>
-        </p:spPr>
-        <p:style>
-          <a:lnRef idx="1">
-            <a:schemeClr val="accent1"/>
-          </a:lnRef>
-          <a:fillRef idx="3">
-            <a:schemeClr val="accent1"/>
-          </a:fillRef>
-          <a:effectRef idx="2">
-            <a:schemeClr val="accent1"/>
-          </a:effectRef>
-          <a:fontRef idx="minor">
-            <a:schemeClr val="lt1"/>
-          </a:fontRef>
-        </p:style>
-        <p:txBody>
-          <a:bodyPr rtlCol="0" anchor="ctr"/>
-          <a:lstStyle/>
-          <a:p>
-            <a:pPr algn="ctr"/>
-          </a:p>
-        </p:txBody>
-      </p:sp>
-      <p:sp>
-        <p:nvSpPr>
-          <p:cNvPr id="6" name="TextBox 5"/>
+              <a:rPr sz="6000" b="1" i="0">
+                <a:solidFill>
+                  <a:srgbClr val="FFFFFF"/>
+                </a:solidFill>
+                <a:latin typeface="Open Sans"/>
+              </a:rPr>
+              <a:t>No VidaPlus</a:t>
+            </a:r>
+          </a:p>
+        </p:txBody>
+      </p:sp>
+      <p:sp>
+        <p:nvSpPr>
+          <p:cNvPr id="5" name="TextBox 4"/>
           <p:cNvSpPr txBox="1"/>
           <p:nvPr/>
         </p:nvSpPr>
         <p:spPr>
           <a:xfrm>
-            <a:off x="868680" y="1783080"/>
-            <a:ext cx="10515600" cy="4572000"/>
-          </a:xfrm>
-          <a:prstGeom prst="rect">
-            <a:avLst/>
-          </a:prstGeom>
-          <a:noFill/>
-        </p:spPr>
-        <p:txBody>
-          <a:bodyPr wrap="square">
-            <a:spAutoFit/>
-          </a:bodyPr>
-          <a:lstStyle/>
-          <a:p>
-            <a:pPr algn="l">
-              <a:lnSpc>
-                <a:spcPct val="110000"/>
-              </a:lnSpc>
-              <a:spcAft>
-                <a:spcPts val="1400"/>
-              </a:spcAft>
-            </a:pPr>
-            <a:r>
-              <a:rPr sz="2000" b="1">
-                <a:solidFill>
-                  <a:srgbClr val="7CB342"/>
-                </a:solidFill>
-                <a:latin typeface="Open Sans"/>
-              </a:rPr>
-              <a:t>▸ </a:t>
-            </a:r>
-            <a:r>
-              <a:rPr sz="1800" b="1">
-                <a:solidFill>
-                  <a:srgbClr val="2D7A3D"/>
-                </a:solidFill>
-                <a:latin typeface="Open Sans"/>
-              </a:rPr>
-              <a:t>Por funcionalidade: </a:t>
-            </a:r>
-            <a:r>
-              <a:rPr sz="1800">
-                <a:solidFill>
-                  <a:srgbClr val="212121"/>
-                </a:solidFill>
-                <a:latin typeface="Open Sans"/>
-              </a:rPr>
-              <a:t>derive RFS (mecanismo) + RGS (garantia).</a:t>
-            </a:r>
-          </a:p>
-          <a:p>
-            <a:pPr algn="l">
-              <a:lnSpc>
-                <a:spcPct val="110000"/>
-              </a:lnSpc>
-              <a:spcAft>
-                <a:spcPts val="1400"/>
-              </a:spcAft>
-            </a:pPr>
-            <a:r>
-              <a:rPr sz="2000" b="1">
-                <a:solidFill>
-                  <a:srgbClr val="7CB342"/>
-                </a:solidFill>
-                <a:latin typeface="Open Sans"/>
-              </a:rPr>
-              <a:t>▸ </a:t>
-            </a:r>
-            <a:r>
-              <a:rPr sz="1800" b="1">
-                <a:solidFill>
-                  <a:srgbClr val="2D7A3D"/>
-                </a:solidFill>
-                <a:latin typeface="Open Sans"/>
-              </a:rPr>
-              <a:t>Base legal: </a:t>
-            </a:r>
-            <a:r>
-              <a:rPr sz="1800">
-                <a:solidFill>
-                  <a:srgbClr val="212121"/>
-                </a:solidFill>
-                <a:latin typeface="Open Sans"/>
-              </a:rPr>
-              <a:t>amarre cada dado sensível a um artigo da LGPD.</a:t>
-            </a:r>
-          </a:p>
-          <a:p>
-            <a:pPr algn="l">
-              <a:lnSpc>
-                <a:spcPct val="110000"/>
-              </a:lnSpc>
-              <a:spcAft>
-                <a:spcPts val="1400"/>
-              </a:spcAft>
-            </a:pPr>
-            <a:r>
-              <a:rPr sz="2000" b="1">
-                <a:solidFill>
-                  <a:srgbClr val="7CB342"/>
-                </a:solidFill>
-                <a:latin typeface="Open Sans"/>
-              </a:rPr>
-              <a:t>▸ </a:t>
-            </a:r>
-            <a:r>
-              <a:rPr sz="1800" b="1">
-                <a:solidFill>
-                  <a:srgbClr val="2D7A3D"/>
-                </a:solidFill>
-                <a:latin typeface="Open Sans"/>
-              </a:rPr>
-              <a:t>Nível ASVS: </a:t>
-            </a:r>
-            <a:r>
-              <a:rPr sz="1800">
-                <a:solidFill>
-                  <a:srgbClr val="212121"/>
-                </a:solidFill>
-                <a:latin typeface="Open Sans"/>
-              </a:rPr>
-              <a:t>defina o alvo (L2) e justifique pela classificação.</a:t>
-            </a:r>
-          </a:p>
-          <a:p>
-            <a:pPr algn="l">
-              <a:lnSpc>
-                <a:spcPct val="110000"/>
-              </a:lnSpc>
-              <a:spcAft>
-                <a:spcPts val="1400"/>
-              </a:spcAft>
-            </a:pPr>
-            <a:r>
-              <a:rPr sz="2000" b="1">
-                <a:solidFill>
-                  <a:srgbClr val="7CB342"/>
-                </a:solidFill>
-                <a:latin typeface="Open Sans"/>
-              </a:rPr>
-              <a:t>▸ </a:t>
-            </a:r>
-            <a:r>
-              <a:rPr sz="1800" b="1">
-                <a:solidFill>
-                  <a:srgbClr val="2D7A3D"/>
-                </a:solidFill>
-                <a:latin typeface="Open Sans"/>
-              </a:rPr>
-              <a:t>Quatro fontes: </a:t>
-            </a:r>
-            <a:r>
-              <a:rPr sz="1800">
-                <a:solidFill>
-                  <a:srgbClr val="212121"/>
-                </a:solidFill>
-                <a:latin typeface="Open Sans"/>
-              </a:rPr>
-              <a:t>cruze negócio, lei, padrões e ameaças.</a:t>
-            </a:r>
-          </a:p>
-          <a:p>
-            <a:pPr algn="l">
-              <a:lnSpc>
-                <a:spcPct val="110000"/>
-              </a:lnSpc>
-              <a:spcAft>
-                <a:spcPts val="1400"/>
-              </a:spcAft>
-            </a:pPr>
-            <a:r>
-              <a:rPr sz="2000" b="1">
-                <a:solidFill>
-                  <a:srgbClr val="7CB342"/>
-                </a:solidFill>
-                <a:latin typeface="Open Sans"/>
-              </a:rPr>
-              <a:t>▸ </a:t>
-            </a:r>
-            <a:r>
-              <a:rPr sz="1800" b="1">
-                <a:solidFill>
-                  <a:srgbClr val="2D7A3D"/>
-                </a:solidFill>
-                <a:latin typeface="Open Sans"/>
-              </a:rPr>
-              <a:t>Regra de ouro: </a:t>
-            </a:r>
-            <a:r>
-              <a:rPr sz="1800">
-                <a:solidFill>
-                  <a:srgbClr val="212121"/>
-                </a:solidFill>
-                <a:latin typeface="Open Sans"/>
-              </a:rPr>
-              <a:t>ativo + ameaça + atributo + critério verificável.</a:t>
-            </a:r>
-          </a:p>
-        </p:txBody>
-      </p:sp>
-      <p:sp>
-        <p:nvSpPr>
-          <p:cNvPr id="7" name="TextBox 6"/>
-          <p:cNvSpPr txBox="1"/>
-          <p:nvPr/>
-        </p:nvSpPr>
-        <p:spPr>
-          <a:xfrm>
-            <a:off x="10972800" y="6446520"/>
-            <a:ext cx="914400" cy="320040"/>
+            <a:off x="457200" y="4297680"/>
+            <a:ext cx="11247120" cy="457200"/>
           </a:xfrm>
           <a:prstGeom prst="rect">
             <a:avLst/>
@@ -3863,7 +4520,7 @@
           </a:bodyPr>
           <a:lstStyle/>
           <a:p>
-            <a:pPr algn="r">
+            <a:pPr algn="ctr">
               <a:lnSpc>
                 <a:spcPct val="100000"/>
               </a:lnSpc>
@@ -3875,14 +4532,58 @@
               </a:spcAft>
             </a:pPr>
             <a:r>
-              <a:rPr sz="1100" b="0" i="0">
-                <a:solidFill>
-                  <a:srgbClr val="616161"/>
-                </a:solidFill>
-                <a:latin typeface="Open Sans"/>
-              </a:rPr>
-              <a:t>10</a:t>
-            </a:r>
+              <a:rPr sz="2200" b="0" i="1">
+                <a:solidFill>
+                  <a:srgbClr val="CCD7C0"/>
+                </a:solidFill>
+                <a:latin typeface="Open Sans"/>
+              </a:rPr>
+              <a:t>A etapa desta semana (Fase 1)</a:t>
+            </a:r>
+          </a:p>
+        </p:txBody>
+      </p:sp>
+      <p:sp>
+        <p:nvSpPr>
+          <p:cNvPr id="6" name="Rectangle 5"/>
+          <p:cNvSpPr/>
+          <p:nvPr/>
+        </p:nvSpPr>
+        <p:spPr>
+          <a:xfrm>
+            <a:off x="5184648" y="4983480"/>
+            <a:ext cx="1828800" cy="25400"/>
+          </a:xfrm>
+          <a:prstGeom prst="rect">
+            <a:avLst/>
+          </a:prstGeom>
+          <a:solidFill>
+            <a:srgbClr val="7CB342"/>
+          </a:solidFill>
+          <a:ln>
+            <a:noFill/>
+          </a:ln>
+          <a:effectLst/>
+        </p:spPr>
+        <p:style>
+          <a:lnRef idx="1">
+            <a:schemeClr val="accent1"/>
+          </a:lnRef>
+          <a:fillRef idx="3">
+            <a:schemeClr val="accent1"/>
+          </a:fillRef>
+          <a:effectRef idx="2">
+            <a:schemeClr val="accent1"/>
+          </a:effectRef>
+          <a:fontRef idx="minor">
+            <a:schemeClr val="lt1"/>
+          </a:fontRef>
+        </p:style>
+        <p:txBody>
+          <a:bodyPr rtlCol="0" anchor="ctr"/>
+          <a:lstStyle/>
+          <a:p>
+            <a:pPr algn="ctr"/>
           </a:p>
         </p:txBody>
       </p:sp>
@@ -3913,6 +4614,457 @@
         <p:spPr>
           <a:xfrm>
             <a:off x="0" y="0"/>
+            <a:ext cx="12191695" cy="1234440"/>
+          </a:xfrm>
+          <a:prstGeom prst="rect">
+            <a:avLst/>
+          </a:prstGeom>
+          <a:solidFill>
+            <a:srgbClr val="2D7A3D"/>
+          </a:solidFill>
+          <a:ln>
+            <a:noFill/>
+          </a:ln>
+          <a:effectLst/>
+        </p:spPr>
+        <p:style>
+          <a:lnRef idx="1">
+            <a:schemeClr val="accent1"/>
+          </a:lnRef>
+          <a:fillRef idx="3">
+            <a:schemeClr val="accent1"/>
+          </a:fillRef>
+          <a:effectRef idx="2">
+            <a:schemeClr val="accent1"/>
+          </a:effectRef>
+          <a:fontRef idx="minor">
+            <a:schemeClr val="lt1"/>
+          </a:fontRef>
+        </p:style>
+        <p:txBody>
+          <a:bodyPr rtlCol="0" anchor="ctr"/>
+          <a:lstStyle/>
+          <a:p>
+            <a:pPr algn="ctr"/>
+          </a:p>
+        </p:txBody>
+      </p:sp>
+      <p:sp>
+        <p:nvSpPr>
+          <p:cNvPr id="3" name="TextBox 2"/>
+          <p:cNvSpPr txBox="1"/>
+          <p:nvPr/>
+        </p:nvSpPr>
+        <p:spPr>
+          <a:xfrm>
+            <a:off x="457200" y="164592"/>
+            <a:ext cx="11247120" cy="640080"/>
+          </a:xfrm>
+          <a:prstGeom prst="rect">
+            <a:avLst/>
+          </a:prstGeom>
+          <a:noFill/>
+        </p:spPr>
+        <p:txBody>
+          <a:bodyPr wrap="square" anchor="t" lIns="0" rIns="0" tIns="0" bIns="0">
+            <a:spAutoFit/>
+          </a:bodyPr>
+          <a:lstStyle/>
+          <a:p>
+            <a:pPr algn="l">
+              <a:lnSpc>
+                <a:spcPct val="100000"/>
+              </a:lnSpc>
+              <a:spcBef>
+                <a:spcPts val="0"/>
+              </a:spcBef>
+              <a:spcAft>
+                <a:spcPts val="600"/>
+              </a:spcAft>
+            </a:pPr>
+            <a:r>
+              <a:rPr sz="3200" b="1" i="0">
+                <a:solidFill>
+                  <a:srgbClr val="FFFFFF"/>
+                </a:solidFill>
+                <a:latin typeface="Open Sans"/>
+              </a:rPr>
+              <a:t>Entregável da Fase 1</a:t>
+            </a:r>
+          </a:p>
+        </p:txBody>
+      </p:sp>
+      <p:sp>
+        <p:nvSpPr>
+          <p:cNvPr id="4" name="TextBox 3"/>
+          <p:cNvSpPr txBox="1"/>
+          <p:nvPr/>
+        </p:nvSpPr>
+        <p:spPr>
+          <a:xfrm>
+            <a:off x="457200" y="777240"/>
+            <a:ext cx="11247120" cy="365760"/>
+          </a:xfrm>
+          <a:prstGeom prst="rect">
+            <a:avLst/>
+          </a:prstGeom>
+          <a:noFill/>
+        </p:spPr>
+        <p:txBody>
+          <a:bodyPr wrap="square" anchor="t" lIns="0" rIns="0" tIns="0" bIns="0">
+            <a:spAutoFit/>
+          </a:bodyPr>
+          <a:lstStyle/>
+          <a:p>
+            <a:pPr algn="l">
+              <a:lnSpc>
+                <a:spcPct val="100000"/>
+              </a:lnSpc>
+              <a:spcBef>
+                <a:spcPts val="0"/>
+              </a:spcBef>
+              <a:spcAft>
+                <a:spcPts val="600"/>
+              </a:spcAft>
+            </a:pPr>
+            <a:r>
+              <a:rPr sz="1600" b="0" i="1">
+                <a:solidFill>
+                  <a:srgbClr val="E0E8DB"/>
+                </a:solidFill>
+                <a:latin typeface="Open Sans"/>
+              </a:rPr>
+              <a:t>Catálogo inicial de requisitos</a:t>
+            </a:r>
+          </a:p>
+        </p:txBody>
+      </p:sp>
+      <p:sp>
+        <p:nvSpPr>
+          <p:cNvPr id="5" name="Rounded Rectangle 4"/>
+          <p:cNvSpPr/>
+          <p:nvPr/>
+        </p:nvSpPr>
+        <p:spPr>
+          <a:xfrm>
+            <a:off x="411480" y="1463040"/>
+            <a:ext cx="11384280" cy="5029200"/>
+          </a:xfrm>
+          <a:prstGeom prst="roundRect">
+            <a:avLst/>
+          </a:prstGeom>
+          <a:solidFill>
+            <a:srgbClr val="F5F5F5"/>
+          </a:solidFill>
+          <a:ln w="15875">
+            <a:solidFill>
+              <a:srgbClr val="7CB342"/>
+            </a:solidFill>
+          </a:ln>
+          <a:effectLst/>
+        </p:spPr>
+        <p:style>
+          <a:lnRef idx="1">
+            <a:schemeClr val="accent1"/>
+          </a:lnRef>
+          <a:fillRef idx="3">
+            <a:schemeClr val="accent1"/>
+          </a:fillRef>
+          <a:effectRef idx="2">
+            <a:schemeClr val="accent1"/>
+          </a:effectRef>
+          <a:fontRef idx="minor">
+            <a:schemeClr val="lt1"/>
+          </a:fontRef>
+        </p:style>
+        <p:txBody>
+          <a:bodyPr rtlCol="0" anchor="ctr"/>
+          <a:lstStyle/>
+          <a:p>
+            <a:pPr algn="ctr"/>
+          </a:p>
+        </p:txBody>
+      </p:sp>
+      <p:sp>
+        <p:nvSpPr>
+          <p:cNvPr id="6" name="TextBox 5"/>
+          <p:cNvSpPr txBox="1"/>
+          <p:nvPr/>
+        </p:nvSpPr>
+        <p:spPr>
+          <a:xfrm>
+            <a:off x="868680" y="1783080"/>
+            <a:ext cx="10515600" cy="4572000"/>
+          </a:xfrm>
+          <a:prstGeom prst="rect">
+            <a:avLst/>
+          </a:prstGeom>
+          <a:noFill/>
+        </p:spPr>
+        <p:txBody>
+          <a:bodyPr wrap="square">
+            <a:spAutoFit/>
+          </a:bodyPr>
+          <a:lstStyle/>
+          <a:p>
+            <a:pPr algn="l">
+              <a:lnSpc>
+                <a:spcPct val="110000"/>
+              </a:lnSpc>
+              <a:spcAft>
+                <a:spcPts val="1400"/>
+              </a:spcAft>
+            </a:pPr>
+            <a:r>
+              <a:rPr sz="2000" b="1">
+                <a:solidFill>
+                  <a:srgbClr val="7CB342"/>
+                </a:solidFill>
+                <a:latin typeface="Open Sans"/>
+              </a:rPr>
+              <a:t>▸ </a:t>
+            </a:r>
+            <a:r>
+              <a:rPr sz="1800" b="1">
+                <a:solidFill>
+                  <a:srgbClr val="2D7A3D"/>
+                </a:solidFill>
+                <a:latin typeface="Open Sans"/>
+              </a:rPr>
+              <a:t>Por funcionalidade: </a:t>
+            </a:r>
+            <a:r>
+              <a:rPr sz="1800">
+                <a:solidFill>
+                  <a:srgbClr val="212121"/>
+                </a:solidFill>
+                <a:latin typeface="Open Sans"/>
+              </a:rPr>
+              <a:t>derive o RFS (mecanismo) + o RGS (garantia).</a:t>
+            </a:r>
+          </a:p>
+          <a:p>
+            <a:pPr algn="l">
+              <a:lnSpc>
+                <a:spcPct val="110000"/>
+              </a:lnSpc>
+              <a:spcAft>
+                <a:spcPts val="1400"/>
+              </a:spcAft>
+            </a:pPr>
+            <a:r>
+              <a:rPr sz="2000" b="1">
+                <a:solidFill>
+                  <a:srgbClr val="7CB342"/>
+                </a:solidFill>
+                <a:latin typeface="Open Sans"/>
+              </a:rPr>
+              <a:t>▸ </a:t>
+            </a:r>
+            <a:r>
+              <a:rPr sz="1800" b="1">
+                <a:solidFill>
+                  <a:srgbClr val="2D7A3D"/>
+                </a:solidFill>
+                <a:latin typeface="Open Sans"/>
+              </a:rPr>
+              <a:t>Base legal: </a:t>
+            </a:r>
+            <a:r>
+              <a:rPr sz="1800">
+                <a:solidFill>
+                  <a:srgbClr val="212121"/>
+                </a:solidFill>
+                <a:latin typeface="Open Sans"/>
+              </a:rPr>
+              <a:t>amarre cada dado sensível a um artigo da LGPD.</a:t>
+            </a:r>
+          </a:p>
+          <a:p>
+            <a:pPr algn="l">
+              <a:lnSpc>
+                <a:spcPct val="110000"/>
+              </a:lnSpc>
+              <a:spcAft>
+                <a:spcPts val="1400"/>
+              </a:spcAft>
+            </a:pPr>
+            <a:r>
+              <a:rPr sz="2000" b="1">
+                <a:solidFill>
+                  <a:srgbClr val="7CB342"/>
+                </a:solidFill>
+                <a:latin typeface="Open Sans"/>
+              </a:rPr>
+              <a:t>▸ </a:t>
+            </a:r>
+            <a:r>
+              <a:rPr sz="1800" b="1">
+                <a:solidFill>
+                  <a:srgbClr val="2D7A3D"/>
+                </a:solidFill>
+                <a:latin typeface="Open Sans"/>
+              </a:rPr>
+              <a:t>Nível ASVS: </a:t>
+            </a:r>
+            <a:r>
+              <a:rPr sz="1800">
+                <a:solidFill>
+                  <a:srgbClr val="212121"/>
+                </a:solidFill>
+                <a:latin typeface="Open Sans"/>
+              </a:rPr>
+              <a:t>defina o alvo (L2) e justifique pela classificação de dados.</a:t>
+            </a:r>
+          </a:p>
+          <a:p>
+            <a:pPr algn="l">
+              <a:lnSpc>
+                <a:spcPct val="110000"/>
+              </a:lnSpc>
+              <a:spcAft>
+                <a:spcPts val="1400"/>
+              </a:spcAft>
+            </a:pPr>
+            <a:r>
+              <a:rPr sz="2000" b="1">
+                <a:solidFill>
+                  <a:srgbClr val="7CB342"/>
+                </a:solidFill>
+                <a:latin typeface="Open Sans"/>
+              </a:rPr>
+              <a:t>▸ </a:t>
+            </a:r>
+            <a:r>
+              <a:rPr sz="1800" b="1">
+                <a:solidFill>
+                  <a:srgbClr val="2D7A3D"/>
+                </a:solidFill>
+                <a:latin typeface="Open Sans"/>
+              </a:rPr>
+              <a:t>Quatro fontes: </a:t>
+            </a:r>
+            <a:r>
+              <a:rPr sz="1800">
+                <a:solidFill>
+                  <a:srgbClr val="212121"/>
+                </a:solidFill>
+                <a:latin typeface="Open Sans"/>
+              </a:rPr>
+              <a:t>cruze negócio, lei, padrões e ameaças.</a:t>
+            </a:r>
+          </a:p>
+          <a:p>
+            <a:pPr algn="l">
+              <a:lnSpc>
+                <a:spcPct val="110000"/>
+              </a:lnSpc>
+              <a:spcAft>
+                <a:spcPts val="1400"/>
+              </a:spcAft>
+            </a:pPr>
+            <a:r>
+              <a:rPr sz="2000" b="1">
+                <a:solidFill>
+                  <a:srgbClr val="7CB342"/>
+                </a:solidFill>
+                <a:latin typeface="Open Sans"/>
+              </a:rPr>
+              <a:t>▸ </a:t>
+            </a:r>
+            <a:r>
+              <a:rPr sz="1800" b="1">
+                <a:solidFill>
+                  <a:srgbClr val="2D7A3D"/>
+                </a:solidFill>
+                <a:latin typeface="Open Sans"/>
+              </a:rPr>
+              <a:t>Regra de ouro: </a:t>
+            </a:r>
+            <a:r>
+              <a:rPr sz="1800">
+                <a:solidFill>
+                  <a:srgbClr val="212121"/>
+                </a:solidFill>
+                <a:latin typeface="Open Sans"/>
+              </a:rPr>
+              <a:t>ativo + ameaça + atributo + critério verificável + rastreabilidade.</a:t>
+            </a:r>
+          </a:p>
+        </p:txBody>
+      </p:sp>
+      <p:sp>
+        <p:nvSpPr>
+          <p:cNvPr id="7" name="TextBox 6"/>
+          <p:cNvSpPr txBox="1"/>
+          <p:nvPr/>
+        </p:nvSpPr>
+        <p:spPr>
+          <a:xfrm>
+            <a:off x="10972800" y="6446520"/>
+            <a:ext cx="914400" cy="320040"/>
+          </a:xfrm>
+          <a:prstGeom prst="rect">
+            <a:avLst/>
+          </a:prstGeom>
+          <a:noFill/>
+        </p:spPr>
+        <p:txBody>
+          <a:bodyPr wrap="square" anchor="t" lIns="0" rIns="0" tIns="0" bIns="0">
+            <a:spAutoFit/>
+          </a:bodyPr>
+          <a:lstStyle/>
+          <a:p>
+            <a:pPr algn="r">
+              <a:lnSpc>
+                <a:spcPct val="100000"/>
+              </a:lnSpc>
+              <a:spcBef>
+                <a:spcPts val="0"/>
+              </a:spcBef>
+              <a:spcAft>
+                <a:spcPts val="600"/>
+              </a:spcAft>
+            </a:pPr>
+            <a:r>
+              <a:rPr sz="1100" b="0" i="0">
+                <a:solidFill>
+                  <a:srgbClr val="616161"/>
+                </a:solidFill>
+                <a:latin typeface="Open Sans"/>
+              </a:rPr>
+              <a:t>11</a:t>
+            </a:r>
+          </a:p>
+        </p:txBody>
+      </p:sp>
+    </p:spTree>
+  </p:cSld>
+  <p:clrMapOvr>
+    <a:masterClrMapping/>
+  </p:clrMapOvr>
+</p:sld>
+</file>
+
+<file path=ppt/slides/slide12.xml><?xml version="1.0" encoding="utf-8"?>
+<p:sld xmlns:a="http://schemas.openxmlformats.org/drawingml/2006/main" xmlns:p="http://schemas.openxmlformats.org/presentationml/2006/main" xmlns:r="http://schemas.openxmlformats.org/officeDocument/2006/relationships">
+  <p:cSld>
+    <p:spTree>
+      <p:nvGrpSpPr>
+        <p:cNvPr id="1" name=""/>
+        <p:cNvGrpSpPr/>
+        <p:nvPr/>
+      </p:nvGrpSpPr>
+      <p:grpSpPr/>
+      <p:sp>
+        <p:nvSpPr>
+          <p:cNvPr id="2" name="Rectangle 1"/>
+          <p:cNvSpPr/>
+          <p:nvPr/>
+        </p:nvSpPr>
+        <p:spPr>
+          <a:xfrm>
+            <a:off x="0" y="0"/>
             <a:ext cx="12191695" cy="6858000"/>
           </a:xfrm>
           <a:prstGeom prst="rect">
@@ -4539,7 +5691,7 @@
                 </a:solidFill>
                 <a:latin typeface="Open Sans"/>
               </a:rPr>
-              <a:t>O mito do 'RNF opcional'</a:t>
+              <a:t>Requisito funcional × não-funcional</a:t>
             </a:r>
           </a:p>
         </p:txBody>
@@ -4584,7 +5736,7 @@
                 </a:solidFill>
                 <a:latin typeface="Open Sans"/>
               </a:rPr>
-              <a:t>Segurança é requisito de negócio</a:t>
+              <a:t>Onde a segurança se encaixa</a:t>
             </a:r>
           </a:p>
         </p:txBody>
@@ -4597,17 +5749,19 @@
         </p:nvSpPr>
         <p:spPr>
           <a:xfrm>
-            <a:off x="411480" y="1554480"/>
-            <a:ext cx="5486400" cy="640080"/>
+            <a:off x="411480" y="1463040"/>
+            <a:ext cx="11384280" cy="5029200"/>
           </a:xfrm>
           <a:prstGeom prst="roundRect">
             <a:avLst/>
           </a:prstGeom>
           <a:solidFill>
-            <a:srgbClr val="424242"/>
+            <a:srgbClr val="F5F5F5"/>
           </a:solidFill>
-          <a:ln>
-            <a:noFill/>
+          <a:ln w="15875">
+            <a:solidFill>
+              <a:srgbClr val="7CB342"/>
+            </a:solidFill>
           </a:ln>
           <a:effectLst/>
         </p:spPr>
@@ -4641,99 +5795,8 @@
         </p:nvSpPr>
         <p:spPr>
           <a:xfrm>
-            <a:off x="411480" y="1664208"/>
-            <a:ext cx="5486400" cy="457200"/>
-          </a:xfrm>
-          <a:prstGeom prst="rect">
-            <a:avLst/>
-          </a:prstGeom>
-          <a:noFill/>
-        </p:spPr>
-        <p:txBody>
-          <a:bodyPr wrap="square" anchor="t" lIns="0" rIns="0" tIns="0" bIns="0">
-            <a:spAutoFit/>
-          </a:bodyPr>
-          <a:lstStyle/>
-          <a:p>
-            <a:pPr algn="ctr">
-              <a:lnSpc>
-                <a:spcPct val="100000"/>
-              </a:lnSpc>
-              <a:spcBef>
-                <a:spcPts val="0"/>
-              </a:spcBef>
-              <a:spcAft>
-                <a:spcPts val="600"/>
-              </a:spcAft>
-            </a:pPr>
-            <a:r>
-              <a:rPr sz="2200" b="1" i="0">
-                <a:solidFill>
-                  <a:srgbClr val="FFFFFF"/>
-                </a:solidFill>
-                <a:latin typeface="Open Sans"/>
-              </a:rPr>
-              <a:t>Visão equivocada</a:t>
-            </a:r>
-          </a:p>
-        </p:txBody>
-      </p:sp>
-      <p:sp>
-        <p:nvSpPr>
-          <p:cNvPr id="7" name="Rounded Rectangle 6"/>
-          <p:cNvSpPr/>
-          <p:nvPr/>
-        </p:nvSpPr>
-        <p:spPr>
-          <a:xfrm>
-            <a:off x="411480" y="2240280"/>
-            <a:ext cx="5486400" cy="4160520"/>
-          </a:xfrm>
-          <a:prstGeom prst="roundRect">
-            <a:avLst/>
-          </a:prstGeom>
-          <a:solidFill>
-            <a:srgbClr val="F5F5F5"/>
-          </a:solidFill>
-          <a:ln w="12700">
-            <a:solidFill>
-              <a:srgbClr val="9E9E9E"/>
-            </a:solidFill>
-          </a:ln>
-          <a:effectLst/>
-        </p:spPr>
-        <p:style>
-          <a:lnRef idx="1">
-            <a:schemeClr val="accent1"/>
-          </a:lnRef>
-          <a:fillRef idx="3">
-            <a:schemeClr val="accent1"/>
-          </a:fillRef>
-          <a:effectRef idx="2">
-            <a:schemeClr val="accent1"/>
-          </a:effectRef>
-          <a:fontRef idx="minor">
-            <a:schemeClr val="lt1"/>
-          </a:fontRef>
-        </p:style>
-        <p:txBody>
-          <a:bodyPr rtlCol="0" anchor="ctr"/>
-          <a:lstStyle/>
-          <a:p>
-            <a:pPr algn="ctr"/>
-          </a:p>
-        </p:txBody>
-      </p:sp>
-      <p:sp>
-        <p:nvSpPr>
-          <p:cNvPr id="8" name="TextBox 7"/>
-          <p:cNvSpPr txBox="1"/>
-          <p:nvPr/>
-        </p:nvSpPr>
-        <p:spPr>
-          <a:xfrm>
-            <a:off x="685800" y="2423160"/>
-            <a:ext cx="5029200" cy="3840480"/>
+            <a:off x="868680" y="1783080"/>
+            <a:ext cx="10515600" cy="4572000"/>
           </a:xfrm>
           <a:prstGeom prst="rect">
             <a:avLst/>
@@ -4746,392 +5809,158 @@
           </a:bodyPr>
           <a:lstStyle/>
           <a:p>
-            <a:pPr>
+            <a:pPr algn="l">
               <a:lnSpc>
-                <a:spcPct val="105000"/>
+                <a:spcPct val="110000"/>
               </a:lnSpc>
               <a:spcAft>
-                <a:spcPts val="1000"/>
+                <a:spcPts val="1400"/>
               </a:spcAft>
             </a:pPr>
             <a:r>
-              <a:rPr sz="1600" b="1">
-                <a:solidFill>
-                  <a:srgbClr val="B71C1C"/>
-                </a:solidFill>
-                <a:latin typeface="Open Sans"/>
-              </a:rPr>
-              <a:t>✗  </a:t>
-            </a:r>
-            <a:r>
-              <a:rPr sz="1500">
+              <a:rPr sz="2000" b="1">
+                <a:solidFill>
+                  <a:srgbClr val="7CB342"/>
+                </a:solidFill>
+                <a:latin typeface="Open Sans"/>
+              </a:rPr>
+              <a:t>▸ </a:t>
+            </a:r>
+            <a:r>
+              <a:rPr sz="1800" b="1">
+                <a:solidFill>
+                  <a:srgbClr val="2D7A3D"/>
+                </a:solidFill>
+                <a:latin typeface="Open Sans"/>
+              </a:rPr>
+              <a:t>Requisito funcional (RF): </a:t>
+            </a:r>
+            <a:r>
+              <a:rPr sz="1800">
                 <a:solidFill>
                   <a:srgbClr val="212121"/>
                 </a:solidFill>
                 <a:latin typeface="Open Sans"/>
               </a:rPr>
-              <a:t>'É RNF, dá para deixar depois.'</a:t>
-            </a:r>
-          </a:p>
-          <a:p>
-            <a:pPr>
+              <a:t>o QUE o sistema faz — ex.: 'recuperar a senha por e-mail'.</a:t>
+            </a:r>
+          </a:p>
+          <a:p>
+            <a:pPr algn="l">
               <a:lnSpc>
-                <a:spcPct val="105000"/>
+                <a:spcPct val="110000"/>
               </a:lnSpc>
               <a:spcAft>
-                <a:spcPts val="1000"/>
+                <a:spcPts val="1400"/>
               </a:spcAft>
             </a:pPr>
             <a:r>
-              <a:rPr sz="1600" b="1">
-                <a:solidFill>
-                  <a:srgbClr val="B71C1C"/>
-                </a:solidFill>
-                <a:latin typeface="Open Sans"/>
-              </a:rPr>
-              <a:t>✗  </a:t>
-            </a:r>
-            <a:r>
-              <a:rPr sz="1500">
+              <a:rPr sz="2000" b="1">
+                <a:solidFill>
+                  <a:srgbClr val="7CB342"/>
+                </a:solidFill>
+                <a:latin typeface="Open Sans"/>
+              </a:rPr>
+              <a:t>▸ </a:t>
+            </a:r>
+            <a:r>
+              <a:rPr sz="1800" b="1">
+                <a:solidFill>
+                  <a:srgbClr val="2D7A3D"/>
+                </a:solidFill>
+                <a:latin typeface="Open Sans"/>
+              </a:rPr>
+              <a:t>Não-funcional (RNF): </a:t>
+            </a:r>
+            <a:r>
+              <a:rPr sz="1800">
                 <a:solidFill>
                   <a:srgbClr val="212121"/>
                 </a:solidFill>
                 <a:latin typeface="Open Sans"/>
               </a:rPr>
-              <a:t>'Pentest no fim resolve.'</a:t>
-            </a:r>
-          </a:p>
-          <a:p>
-            <a:pPr>
+              <a:t>COMO se comporta — desempenho, segurança, disponibilidade.</a:t>
+            </a:r>
+          </a:p>
+          <a:p>
+            <a:pPr algn="l">
               <a:lnSpc>
-                <a:spcPct val="105000"/>
+                <a:spcPct val="110000"/>
               </a:lnSpc>
               <a:spcAft>
-                <a:spcPts val="1000"/>
+                <a:spcPts val="1400"/>
               </a:spcAft>
             </a:pPr>
             <a:r>
-              <a:rPr sz="1600" b="1">
-                <a:solidFill>
-                  <a:srgbClr val="B71C1C"/>
-                </a:solidFill>
-                <a:latin typeface="Open Sans"/>
-              </a:rPr>
-              <a:t>✗  </a:t>
-            </a:r>
-            <a:r>
-              <a:rPr sz="1500">
+              <a:rPr sz="2000" b="1">
+                <a:solidFill>
+                  <a:srgbClr val="7CB342"/>
+                </a:solidFill>
+                <a:latin typeface="Open Sans"/>
+              </a:rPr>
+              <a:t>▸ </a:t>
+            </a:r>
+            <a:r>
+              <a:rPr sz="1800" b="1">
+                <a:solidFill>
+                  <a:srgbClr val="2D7A3D"/>
+                </a:solidFill>
+                <a:latin typeface="Open Sans"/>
+              </a:rPr>
+              <a:t>Segurança aparece nos dois: </a:t>
+            </a:r>
+            <a:r>
+              <a:rPr sz="1800">
                 <a:solidFill>
                   <a:srgbClr val="212121"/>
                 </a:solidFill>
                 <a:latin typeface="Open Sans"/>
               </a:rPr>
-              <a:t>Funcionalidade primeiro.</a:t>
-            </a:r>
-          </a:p>
-          <a:p>
-            <a:pPr>
+              <a:t>como função (login, cripto, auditoria) e como atributo transversal.</a:t>
+            </a:r>
+          </a:p>
+          <a:p>
+            <a:pPr algn="l">
               <a:lnSpc>
-                <a:spcPct val="105000"/>
+                <a:spcPct val="110000"/>
               </a:lnSpc>
               <a:spcAft>
-                <a:spcPts val="1000"/>
+                <a:spcPts val="1400"/>
               </a:spcAft>
             </a:pPr>
             <a:r>
-              <a:rPr sz="1600" b="1">
-                <a:solidFill>
-                  <a:srgbClr val="B71C1C"/>
-                </a:solidFill>
-                <a:latin typeface="Open Sans"/>
-              </a:rPr>
-              <a:t>✗  </a:t>
-            </a:r>
-            <a:r>
-              <a:rPr sz="1500">
+              <a:rPr sz="2000" b="1">
+                <a:solidFill>
+                  <a:srgbClr val="7CB342"/>
+                </a:solidFill>
+                <a:latin typeface="Open Sans"/>
+              </a:rPr>
+              <a:t>▸ </a:t>
+            </a:r>
+            <a:r>
+              <a:rPr sz="1800" b="1">
+                <a:solidFill>
+                  <a:srgbClr val="2D7A3D"/>
+                </a:solidFill>
+                <a:latin typeface="Open Sans"/>
+              </a:rPr>
+              <a:t>Requisito de segurança = </a:t>
+            </a:r>
+            <a:r>
+              <a:rPr sz="1800">
                 <a:solidFill>
                   <a:srgbClr val="212121"/>
                 </a:solidFill>
                 <a:latin typeface="Open Sans"/>
               </a:rPr>
-              <a:t>User stories só do uso legítimo.</a:t>
-            </a:r>
-          </a:p>
-        </p:txBody>
-      </p:sp>
-      <p:sp>
-        <p:nvSpPr>
-          <p:cNvPr id="9" name="Rounded Rectangle 8"/>
-          <p:cNvSpPr/>
-          <p:nvPr/>
-        </p:nvSpPr>
-        <p:spPr>
-          <a:xfrm>
-            <a:off x="6309360" y="1554480"/>
-            <a:ext cx="5486400" cy="640080"/>
-          </a:xfrm>
-          <a:prstGeom prst="roundRect">
-            <a:avLst/>
-          </a:prstGeom>
-          <a:solidFill>
-            <a:srgbClr val="2D7A3D"/>
-          </a:solidFill>
-          <a:ln>
-            <a:noFill/>
-          </a:ln>
-          <a:effectLst/>
-        </p:spPr>
-        <p:style>
-          <a:lnRef idx="1">
-            <a:schemeClr val="accent1"/>
-          </a:lnRef>
-          <a:fillRef idx="3">
-            <a:schemeClr val="accent1"/>
-          </a:fillRef>
-          <a:effectRef idx="2">
-            <a:schemeClr val="accent1"/>
-          </a:effectRef>
-          <a:fontRef idx="minor">
-            <a:schemeClr val="lt1"/>
-          </a:fontRef>
-        </p:style>
-        <p:txBody>
-          <a:bodyPr rtlCol="0" anchor="ctr"/>
-          <a:lstStyle/>
-          <a:p>
-            <a:pPr algn="ctr"/>
-          </a:p>
-        </p:txBody>
-      </p:sp>
-      <p:sp>
-        <p:nvSpPr>
-          <p:cNvPr id="10" name="TextBox 9"/>
-          <p:cNvSpPr txBox="1"/>
-          <p:nvPr/>
-        </p:nvSpPr>
-        <p:spPr>
-          <a:xfrm>
-            <a:off x="6309360" y="1664208"/>
-            <a:ext cx="5486400" cy="457200"/>
-          </a:xfrm>
-          <a:prstGeom prst="rect">
-            <a:avLst/>
-          </a:prstGeom>
-          <a:noFill/>
-        </p:spPr>
-        <p:txBody>
-          <a:bodyPr wrap="square" anchor="t" lIns="0" rIns="0" tIns="0" bIns="0">
-            <a:spAutoFit/>
-          </a:bodyPr>
-          <a:lstStyle/>
-          <a:p>
-            <a:pPr algn="ctr">
-              <a:lnSpc>
-                <a:spcPct val="100000"/>
-              </a:lnSpc>
-              <a:spcBef>
-                <a:spcPts val="0"/>
-              </a:spcBef>
-              <a:spcAft>
-                <a:spcPts val="600"/>
-              </a:spcAft>
-            </a:pPr>
-            <a:r>
-              <a:rPr sz="2200" b="1" i="0">
-                <a:solidFill>
-                  <a:srgbClr val="FFFFFF"/>
-                </a:solidFill>
-                <a:latin typeface="Open Sans"/>
-              </a:rPr>
-              <a:t>A realidade</a:t>
-            </a:r>
-          </a:p>
-        </p:txBody>
-      </p:sp>
-      <p:sp>
-        <p:nvSpPr>
-          <p:cNvPr id="11" name="Rounded Rectangle 10"/>
-          <p:cNvSpPr/>
-          <p:nvPr/>
-        </p:nvSpPr>
-        <p:spPr>
-          <a:xfrm>
-            <a:off x="6309360" y="2240280"/>
-            <a:ext cx="5486400" cy="4160520"/>
-          </a:xfrm>
-          <a:prstGeom prst="roundRect">
-            <a:avLst/>
-          </a:prstGeom>
-          <a:solidFill>
-            <a:srgbClr val="F5F5F5"/>
-          </a:solidFill>
-          <a:ln w="12700">
-            <a:solidFill>
-              <a:srgbClr val="7CB342"/>
-            </a:solidFill>
-          </a:ln>
-          <a:effectLst/>
-        </p:spPr>
-        <p:style>
-          <a:lnRef idx="1">
-            <a:schemeClr val="accent1"/>
-          </a:lnRef>
-          <a:fillRef idx="3">
-            <a:schemeClr val="accent1"/>
-          </a:fillRef>
-          <a:effectRef idx="2">
-            <a:schemeClr val="accent1"/>
-          </a:effectRef>
-          <a:fontRef idx="minor">
-            <a:schemeClr val="lt1"/>
-          </a:fontRef>
-        </p:style>
-        <p:txBody>
-          <a:bodyPr rtlCol="0" anchor="ctr"/>
-          <a:lstStyle/>
-          <a:p>
-            <a:pPr algn="ctr"/>
-          </a:p>
-        </p:txBody>
-      </p:sp>
-      <p:sp>
-        <p:nvSpPr>
-          <p:cNvPr id="12" name="TextBox 11"/>
-          <p:cNvSpPr txBox="1"/>
-          <p:nvPr/>
-        </p:nvSpPr>
-        <p:spPr>
-          <a:xfrm>
-            <a:off x="6583680" y="2423160"/>
-            <a:ext cx="5029200" cy="3840480"/>
-          </a:xfrm>
-          <a:prstGeom prst="rect">
-            <a:avLst/>
-          </a:prstGeom>
-          <a:noFill/>
-        </p:spPr>
-        <p:txBody>
-          <a:bodyPr wrap="square">
-            <a:spAutoFit/>
-          </a:bodyPr>
-          <a:lstStyle/>
-          <a:p>
-            <a:pPr>
-              <a:lnSpc>
-                <a:spcPct val="105000"/>
-              </a:lnSpc>
-              <a:spcAft>
-                <a:spcPts val="1000"/>
-              </a:spcAft>
-            </a:pPr>
-            <a:r>
-              <a:rPr sz="1600" b="1">
-                <a:solidFill>
-                  <a:srgbClr val="7CB342"/>
-                </a:solidFill>
-                <a:latin typeface="Open Sans"/>
-              </a:rPr>
-              <a:t>✓  </a:t>
-            </a:r>
-            <a:r>
-              <a:rPr sz="1500">
-                <a:solidFill>
-                  <a:srgbClr val="212121"/>
-                </a:solidFill>
-                <a:latin typeface="Open Sans"/>
-              </a:rPr>
-              <a:t>Vazamento = prejuízo legal.</a:t>
-            </a:r>
-          </a:p>
-          <a:p>
-            <a:pPr>
-              <a:lnSpc>
-                <a:spcPct val="105000"/>
-              </a:lnSpc>
-              <a:spcAft>
-                <a:spcPts val="1000"/>
-              </a:spcAft>
-            </a:pPr>
-            <a:r>
-              <a:rPr sz="1600" b="1">
-                <a:solidFill>
-                  <a:srgbClr val="7CB342"/>
-                </a:solidFill>
-                <a:latin typeface="Open Sans"/>
-              </a:rPr>
-              <a:t>✓  </a:t>
-            </a:r>
-            <a:r>
-              <a:rPr sz="1500">
-                <a:solidFill>
-                  <a:srgbClr val="212121"/>
-                </a:solidFill>
-                <a:latin typeface="Open Sans"/>
-              </a:rPr>
-              <a:t>Falha de segurança quebra o negócio.</a:t>
-            </a:r>
-          </a:p>
-          <a:p>
-            <a:pPr>
-              <a:lnSpc>
-                <a:spcPct val="105000"/>
-              </a:lnSpc>
-              <a:spcAft>
-                <a:spcPts val="1000"/>
-              </a:spcAft>
-            </a:pPr>
-            <a:r>
-              <a:rPr sz="1600" b="1">
-                <a:solidFill>
-                  <a:srgbClr val="7CB342"/>
-                </a:solidFill>
-                <a:latin typeface="Open Sans"/>
-              </a:rPr>
-              <a:t>✓  </a:t>
-            </a:r>
-            <a:r>
-              <a:rPr sz="1500">
-                <a:solidFill>
-                  <a:srgbClr val="212121"/>
-                </a:solidFill>
-                <a:latin typeface="Open Sans"/>
-              </a:rPr>
-              <a:t>Conformidade é obrigação.</a:t>
-            </a:r>
-          </a:p>
-          <a:p>
-            <a:pPr>
-              <a:lnSpc>
-                <a:spcPct val="105000"/>
-              </a:lnSpc>
-              <a:spcAft>
-                <a:spcPts val="1000"/>
-              </a:spcAft>
-            </a:pPr>
-            <a:r>
-              <a:rPr sz="1600" b="1">
-                <a:solidFill>
-                  <a:srgbClr val="7CB342"/>
-                </a:solidFill>
-                <a:latin typeface="Open Sans"/>
-              </a:rPr>
-              <a:t>✓  </a:t>
-            </a:r>
-            <a:r>
-              <a:rPr sz="1500">
-                <a:solidFill>
-                  <a:srgbClr val="212121"/>
-                </a:solidFill>
-                <a:latin typeface="Open Sans"/>
-              </a:rPr>
-              <a:t>Confiança do usuário é o produto.</a:t>
-            </a:r>
-          </a:p>
-        </p:txBody>
-      </p:sp>
-      <p:sp>
-        <p:nvSpPr>
-          <p:cNvPr id="13" name="TextBox 12"/>
+              <a:t>exigência explícita de proteger um ativo contra uma ameaça, com critério verificável.</a:t>
+            </a:r>
+          </a:p>
+        </p:txBody>
+      </p:sp>
+      <p:sp>
+        <p:nvSpPr>
+          <p:cNvPr id="7" name="TextBox 6"/>
           <p:cNvSpPr txBox="1"/>
           <p:nvPr/>
         </p:nvSpPr>
@@ -5276,7 +6105,7 @@
                 </a:solidFill>
                 <a:latin typeface="Open Sans"/>
               </a:rPr>
-              <a:t>RFS × RGS</a:t>
+              <a:t>O mito do 'RNF opcional'</a:t>
             </a:r>
           </a:p>
         </p:txBody>
@@ -5321,7 +6150,7 @@
                 </a:solidFill>
                 <a:latin typeface="Open Sans"/>
               </a:rPr>
-              <a:t>O que o sistema faz para se proteger × quanta confiança temos</a:t>
+              <a:t>Segurança é requisito de negócio</a:t>
             </a:r>
           </a:p>
         </p:txBody>
@@ -5334,19 +6163,17 @@
         </p:nvSpPr>
         <p:spPr>
           <a:xfrm>
-            <a:off x="411480" y="1463040"/>
-            <a:ext cx="5468112" cy="2423160"/>
+            <a:off x="411480" y="1554480"/>
+            <a:ext cx="5486400" cy="640080"/>
           </a:xfrm>
           <a:prstGeom prst="roundRect">
             <a:avLst/>
           </a:prstGeom>
           <a:solidFill>
-            <a:srgbClr val="F5F5F5"/>
+            <a:srgbClr val="424242"/>
           </a:solidFill>
-          <a:ln w="19050">
-            <a:solidFill>
-              <a:srgbClr val="2D7A3D"/>
-            </a:solidFill>
+          <a:ln>
+            <a:noFill/>
           </a:ln>
           <a:effectLst/>
         </p:spPr>
@@ -5380,8 +6207,8 @@
         </p:nvSpPr>
         <p:spPr>
           <a:xfrm>
-            <a:off x="777240" y="1737360"/>
-            <a:ext cx="4754880" cy="548640"/>
+            <a:off x="411480" y="1664208"/>
+            <a:ext cx="5486400" cy="457200"/>
           </a:xfrm>
           <a:prstGeom prst="rect">
             <a:avLst/>
@@ -5394,7 +6221,7 @@
           </a:bodyPr>
           <a:lstStyle/>
           <a:p>
-            <a:pPr algn="l">
+            <a:pPr algn="ctr">
               <a:lnSpc>
                 <a:spcPct val="100000"/>
               </a:lnSpc>
@@ -5408,70 +6235,25 @@
             <a:r>
               <a:rPr sz="2200" b="1" i="0">
                 <a:solidFill>
-                  <a:srgbClr val="2D7A3D"/>
-                </a:solidFill>
-                <a:latin typeface="Open Sans"/>
-              </a:rPr>
-              <a:t>RFS — mecanismo</a:t>
-            </a:r>
-          </a:p>
-        </p:txBody>
-      </p:sp>
-      <p:sp>
-        <p:nvSpPr>
-          <p:cNvPr id="7" name="TextBox 6"/>
-          <p:cNvSpPr txBox="1"/>
-          <p:nvPr/>
-        </p:nvSpPr>
-        <p:spPr>
-          <a:xfrm>
-            <a:off x="777240" y="2377440"/>
-            <a:ext cx="4754880" cy="1371600"/>
-          </a:xfrm>
-          <a:prstGeom prst="rect">
-            <a:avLst/>
-          </a:prstGeom>
-          <a:noFill/>
-        </p:spPr>
-        <p:txBody>
-          <a:bodyPr wrap="square" anchor="t" lIns="0" rIns="0" tIns="0" bIns="0">
-            <a:spAutoFit/>
-          </a:bodyPr>
-          <a:lstStyle/>
-          <a:p>
-            <a:pPr algn="l">
-              <a:lnSpc>
-                <a:spcPct val="110000"/>
-              </a:lnSpc>
-              <a:spcBef>
-                <a:spcPts val="0"/>
-              </a:spcBef>
-              <a:spcAft>
-                <a:spcPts val="600"/>
-              </a:spcAft>
-            </a:pPr>
-            <a:r>
-              <a:rPr sz="1500" b="0" i="0">
-                <a:solidFill>
-                  <a:srgbClr val="212121"/>
-                </a:solidFill>
-                <a:latin typeface="Open Sans"/>
-              </a:rPr>
-              <a:t>autenticação, autorização, cripto, auditoria</a:t>
-            </a:r>
-          </a:p>
-        </p:txBody>
-      </p:sp>
-      <p:sp>
-        <p:nvSpPr>
-          <p:cNvPr id="8" name="Rounded Rectangle 7"/>
+                  <a:srgbClr val="FFFFFF"/>
+                </a:solidFill>
+                <a:latin typeface="Open Sans"/>
+              </a:rPr>
+              <a:t>Visão equivocada</a:t>
+            </a:r>
+          </a:p>
+        </p:txBody>
+      </p:sp>
+      <p:sp>
+        <p:nvSpPr>
+          <p:cNvPr id="7" name="Rounded Rectangle 6"/>
           <p:cNvSpPr/>
           <p:nvPr/>
         </p:nvSpPr>
         <p:spPr>
           <a:xfrm>
-            <a:off x="6309360" y="1463040"/>
-            <a:ext cx="5468112" cy="2423160"/>
+            <a:off x="411480" y="2240280"/>
+            <a:ext cx="5486400" cy="4160520"/>
           </a:xfrm>
           <a:prstGeom prst="roundRect">
             <a:avLst/>
@@ -5479,9 +6261,9 @@
           <a:solidFill>
             <a:srgbClr val="F5F5F5"/>
           </a:solidFill>
-          <a:ln w="19050">
+          <a:ln w="12700">
             <a:solidFill>
-              <a:srgbClr val="1976D2"/>
+              <a:srgbClr val="9E9E9E"/>
             </a:solidFill>
           </a:ln>
           <a:effectLst/>
@@ -5510,14 +6292,193 @@
       </p:sp>
       <p:sp>
         <p:nvSpPr>
-          <p:cNvPr id="9" name="TextBox 8"/>
+          <p:cNvPr id="8" name="TextBox 7"/>
           <p:cNvSpPr txBox="1"/>
           <p:nvPr/>
         </p:nvSpPr>
         <p:spPr>
           <a:xfrm>
-            <a:off x="6675120" y="1737360"/>
-            <a:ext cx="4754880" cy="548640"/>
+            <a:off x="685800" y="2423160"/>
+            <a:ext cx="5029200" cy="3840480"/>
+          </a:xfrm>
+          <a:prstGeom prst="rect">
+            <a:avLst/>
+          </a:prstGeom>
+          <a:noFill/>
+        </p:spPr>
+        <p:txBody>
+          <a:bodyPr wrap="square">
+            <a:spAutoFit/>
+          </a:bodyPr>
+          <a:lstStyle/>
+          <a:p>
+            <a:pPr>
+              <a:lnSpc>
+                <a:spcPct val="105000"/>
+              </a:lnSpc>
+              <a:spcAft>
+                <a:spcPts val="1000"/>
+              </a:spcAft>
+            </a:pPr>
+            <a:r>
+              <a:rPr sz="1600" b="1">
+                <a:solidFill>
+                  <a:srgbClr val="B71C1C"/>
+                </a:solidFill>
+                <a:latin typeface="Open Sans"/>
+              </a:rPr>
+              <a:t>✗  </a:t>
+            </a:r>
+            <a:r>
+              <a:rPr sz="1500">
+                <a:solidFill>
+                  <a:srgbClr val="212121"/>
+                </a:solidFill>
+                <a:latin typeface="Open Sans"/>
+              </a:rPr>
+              <a:t>'É RNF, dá para deixar depois.'</a:t>
+            </a:r>
+          </a:p>
+          <a:p>
+            <a:pPr>
+              <a:lnSpc>
+                <a:spcPct val="105000"/>
+              </a:lnSpc>
+              <a:spcAft>
+                <a:spcPts val="1000"/>
+              </a:spcAft>
+            </a:pPr>
+            <a:r>
+              <a:rPr sz="1600" b="1">
+                <a:solidFill>
+                  <a:srgbClr val="B71C1C"/>
+                </a:solidFill>
+                <a:latin typeface="Open Sans"/>
+              </a:rPr>
+              <a:t>✗  </a:t>
+            </a:r>
+            <a:r>
+              <a:rPr sz="1500">
+                <a:solidFill>
+                  <a:srgbClr val="212121"/>
+                </a:solidFill>
+                <a:latin typeface="Open Sans"/>
+              </a:rPr>
+              <a:t>'Pentest no fim resolve.'</a:t>
+            </a:r>
+          </a:p>
+          <a:p>
+            <a:pPr>
+              <a:lnSpc>
+                <a:spcPct val="105000"/>
+              </a:lnSpc>
+              <a:spcAft>
+                <a:spcPts val="1000"/>
+              </a:spcAft>
+            </a:pPr>
+            <a:r>
+              <a:rPr sz="1600" b="1">
+                <a:solidFill>
+                  <a:srgbClr val="B71C1C"/>
+                </a:solidFill>
+                <a:latin typeface="Open Sans"/>
+              </a:rPr>
+              <a:t>✗  </a:t>
+            </a:r>
+            <a:r>
+              <a:rPr sz="1500">
+                <a:solidFill>
+                  <a:srgbClr val="212121"/>
+                </a:solidFill>
+                <a:latin typeface="Open Sans"/>
+              </a:rPr>
+              <a:t>Funcionalidade primeiro, segurança se sobrar.</a:t>
+            </a:r>
+          </a:p>
+          <a:p>
+            <a:pPr>
+              <a:lnSpc>
+                <a:spcPct val="105000"/>
+              </a:lnSpc>
+              <a:spcAft>
+                <a:spcPts val="1000"/>
+              </a:spcAft>
+            </a:pPr>
+            <a:r>
+              <a:rPr sz="1600" b="1">
+                <a:solidFill>
+                  <a:srgbClr val="B71C1C"/>
+                </a:solidFill>
+                <a:latin typeface="Open Sans"/>
+              </a:rPr>
+              <a:t>✗  </a:t>
+            </a:r>
+            <a:r>
+              <a:rPr sz="1500">
+                <a:solidFill>
+                  <a:srgbClr val="212121"/>
+                </a:solidFill>
+                <a:latin typeface="Open Sans"/>
+              </a:rPr>
+              <a:t>User stories só do uso legítimo.</a:t>
+            </a:r>
+          </a:p>
+        </p:txBody>
+      </p:sp>
+      <p:sp>
+        <p:nvSpPr>
+          <p:cNvPr id="9" name="Rounded Rectangle 8"/>
+          <p:cNvSpPr/>
+          <p:nvPr/>
+        </p:nvSpPr>
+        <p:spPr>
+          <a:xfrm>
+            <a:off x="6309360" y="1554480"/>
+            <a:ext cx="5486400" cy="640080"/>
+          </a:xfrm>
+          <a:prstGeom prst="roundRect">
+            <a:avLst/>
+          </a:prstGeom>
+          <a:solidFill>
+            <a:srgbClr val="2D7A3D"/>
+          </a:solidFill>
+          <a:ln>
+            <a:noFill/>
+          </a:ln>
+          <a:effectLst/>
+        </p:spPr>
+        <p:style>
+          <a:lnRef idx="1">
+            <a:schemeClr val="accent1"/>
+          </a:lnRef>
+          <a:fillRef idx="3">
+            <a:schemeClr val="accent1"/>
+          </a:fillRef>
+          <a:effectRef idx="2">
+            <a:schemeClr val="accent1"/>
+          </a:effectRef>
+          <a:fontRef idx="minor">
+            <a:schemeClr val="lt1"/>
+          </a:fontRef>
+        </p:style>
+        <p:txBody>
+          <a:bodyPr rtlCol="0" anchor="ctr"/>
+          <a:lstStyle/>
+          <a:p>
+            <a:pPr algn="ctr"/>
+          </a:p>
+        </p:txBody>
+      </p:sp>
+      <p:sp>
+        <p:nvSpPr>
+          <p:cNvPr id="10" name="TextBox 9"/>
+          <p:cNvSpPr txBox="1"/>
+          <p:nvPr/>
+        </p:nvSpPr>
+        <p:spPr>
+          <a:xfrm>
+            <a:off x="6309360" y="1664208"/>
+            <a:ext cx="5486400" cy="457200"/>
           </a:xfrm>
           <a:prstGeom prst="rect">
             <a:avLst/>
@@ -5530,7 +6491,7 @@
           </a:bodyPr>
           <a:lstStyle/>
           <a:p>
-            <a:pPr algn="l">
+            <a:pPr algn="ctr">
               <a:lnSpc>
                 <a:spcPct val="100000"/>
               </a:lnSpc>
@@ -5544,56 +6505,11 @@
             <a:r>
               <a:rPr sz="2200" b="1" i="0">
                 <a:solidFill>
-                  <a:srgbClr val="1976D2"/>
-                </a:solidFill>
-                <a:latin typeface="Open Sans"/>
-              </a:rPr>
-              <a:t>RGS — garantia</a:t>
-            </a:r>
-          </a:p>
-        </p:txBody>
-      </p:sp>
-      <p:sp>
-        <p:nvSpPr>
-          <p:cNvPr id="10" name="TextBox 9"/>
-          <p:cNvSpPr txBox="1"/>
-          <p:nvPr/>
-        </p:nvSpPr>
-        <p:spPr>
-          <a:xfrm>
-            <a:off x="6675120" y="2377440"/>
-            <a:ext cx="4754880" cy="1371600"/>
-          </a:xfrm>
-          <a:prstGeom prst="rect">
-            <a:avLst/>
-          </a:prstGeom>
-          <a:noFill/>
-        </p:spPr>
-        <p:txBody>
-          <a:bodyPr wrap="square" anchor="t" lIns="0" rIns="0" tIns="0" bIns="0">
-            <a:spAutoFit/>
-          </a:bodyPr>
-          <a:lstStyle/>
-          <a:p>
-            <a:pPr algn="l">
-              <a:lnSpc>
-                <a:spcPct val="110000"/>
-              </a:lnSpc>
-              <a:spcBef>
-                <a:spcPts val="0"/>
-              </a:spcBef>
-              <a:spcAft>
-                <a:spcPts val="600"/>
-              </a:spcAft>
-            </a:pPr>
-            <a:r>
-              <a:rPr sz="1500" b="0" i="0">
-                <a:solidFill>
-                  <a:srgbClr val="212121"/>
-                </a:solidFill>
-                <a:latin typeface="Open Sans"/>
-              </a:rPr>
-              <a:t>teste, cobertura, nível ASVS, atestação</a:t>
+                  <a:srgbClr val="FFFFFF"/>
+                </a:solidFill>
+                <a:latin typeface="Open Sans"/>
+              </a:rPr>
+              <a:t>A realidade</a:t>
             </a:r>
           </a:p>
         </p:txBody>
@@ -5606,8 +6522,8 @@
         </p:nvSpPr>
         <p:spPr>
           <a:xfrm>
-            <a:off x="411480" y="4069080"/>
-            <a:ext cx="5468112" cy="2423160"/>
+            <a:off x="6309360" y="2240280"/>
+            <a:ext cx="5486400" cy="4160520"/>
           </a:xfrm>
           <a:prstGeom prst="roundRect">
             <a:avLst/>
@@ -5615,9 +6531,9 @@
           <a:solidFill>
             <a:srgbClr val="F5F5F5"/>
           </a:solidFill>
-          <a:ln w="19050">
+          <a:ln w="12700">
             <a:solidFill>
-              <a:srgbClr val="E65100"/>
+              <a:srgbClr val="7CB342"/>
             </a:solidFill>
           </a:ln>
           <a:effectLst/>
@@ -5652,8 +6568,8 @@
         </p:nvSpPr>
         <p:spPr>
           <a:xfrm>
-            <a:off x="777240" y="4343400"/>
-            <a:ext cx="4754880" cy="548640"/>
+            <a:off x="6583680" y="2423160"/>
+            <a:ext cx="5029200" cy="3840480"/>
           </a:xfrm>
           <a:prstGeom prst="rect">
             <a:avLst/>
@@ -5661,218 +6577,127 @@
           <a:noFill/>
         </p:spPr>
         <p:txBody>
-          <a:bodyPr wrap="square" anchor="t" lIns="0" rIns="0" tIns="0" bIns="0">
+          <a:bodyPr wrap="square">
             <a:spAutoFit/>
           </a:bodyPr>
           <a:lstStyle/>
           <a:p>
-            <a:pPr algn="l">
+            <a:pPr>
               <a:lnSpc>
-                <a:spcPct val="100000"/>
+                <a:spcPct val="105000"/>
               </a:lnSpc>
-              <a:spcBef>
-                <a:spcPts val="0"/>
-              </a:spcBef>
               <a:spcAft>
-                <a:spcPts val="600"/>
+                <a:spcPts val="1000"/>
               </a:spcAft>
             </a:pPr>
             <a:r>
-              <a:rPr sz="2200" b="1" i="0">
-                <a:solidFill>
-                  <a:srgbClr val="E65100"/>
-                </a:solidFill>
-                <a:latin typeface="Open Sans"/>
-              </a:rPr>
-              <a:t>Analogia (RFS)</a:t>
-            </a:r>
-          </a:p>
-        </p:txBody>
-      </p:sp>
-      <p:sp>
-        <p:nvSpPr>
-          <p:cNvPr id="13" name="TextBox 12"/>
-          <p:cNvSpPr txBox="1"/>
-          <p:nvPr/>
-        </p:nvSpPr>
-        <p:spPr>
-          <a:xfrm>
-            <a:off x="777240" y="4983480"/>
-            <a:ext cx="4754880" cy="1371600"/>
-          </a:xfrm>
-          <a:prstGeom prst="rect">
-            <a:avLst/>
-          </a:prstGeom>
-          <a:noFill/>
-        </p:spPr>
-        <p:txBody>
-          <a:bodyPr wrap="square" anchor="t" lIns="0" rIns="0" tIns="0" bIns="0">
-            <a:spAutoFit/>
-          </a:bodyPr>
-          <a:lstStyle/>
-          <a:p>
-            <a:pPr algn="l">
+              <a:rPr sz="1600" b="1">
+                <a:solidFill>
+                  <a:srgbClr val="7CB342"/>
+                </a:solidFill>
+                <a:latin typeface="Open Sans"/>
+              </a:rPr>
+              <a:t>✓  </a:t>
+            </a:r>
+            <a:r>
+              <a:rPr sz="1500">
+                <a:solidFill>
+                  <a:srgbClr val="212121"/>
+                </a:solidFill>
+                <a:latin typeface="Open Sans"/>
+              </a:rPr>
+              <a:t>Vazamento = prejuízo financeiro e legal.</a:t>
+            </a:r>
+          </a:p>
+          <a:p>
+            <a:pPr>
               <a:lnSpc>
-                <a:spcPct val="110000"/>
+                <a:spcPct val="105000"/>
               </a:lnSpc>
-              <a:spcBef>
-                <a:spcPts val="0"/>
-              </a:spcBef>
               <a:spcAft>
-                <a:spcPts val="600"/>
+                <a:spcPts val="1000"/>
               </a:spcAft>
             </a:pPr>
             <a:r>
-              <a:rPr sz="1500" b="0" i="0">
+              <a:rPr sz="1600" b="1">
+                <a:solidFill>
+                  <a:srgbClr val="7CB342"/>
+                </a:solidFill>
+                <a:latin typeface="Open Sans"/>
+              </a:rPr>
+              <a:t>✓  </a:t>
+            </a:r>
+            <a:r>
+              <a:rPr sz="1500">
                 <a:solidFill>
                   <a:srgbClr val="212121"/>
                 </a:solidFill>
                 <a:latin typeface="Open Sans"/>
               </a:rPr>
-              <a:t>'a porta deve ter fechadura'</a:t>
-            </a:r>
-          </a:p>
-        </p:txBody>
-      </p:sp>
-      <p:sp>
-        <p:nvSpPr>
-          <p:cNvPr id="14" name="Rounded Rectangle 13"/>
-          <p:cNvSpPr/>
-          <p:nvPr/>
-        </p:nvSpPr>
-        <p:spPr>
-          <a:xfrm>
-            <a:off x="6309360" y="4069080"/>
-            <a:ext cx="5468112" cy="2423160"/>
-          </a:xfrm>
-          <a:prstGeom prst="roundRect">
-            <a:avLst/>
-          </a:prstGeom>
-          <a:solidFill>
-            <a:srgbClr val="F5F5F5"/>
-          </a:solidFill>
-          <a:ln w="19050">
-            <a:solidFill>
-              <a:srgbClr val="7CB342"/>
-            </a:solidFill>
-          </a:ln>
-          <a:effectLst/>
-        </p:spPr>
-        <p:style>
-          <a:lnRef idx="1">
-            <a:schemeClr val="accent1"/>
-          </a:lnRef>
-          <a:fillRef idx="3">
-            <a:schemeClr val="accent1"/>
-          </a:fillRef>
-          <a:effectRef idx="2">
-            <a:schemeClr val="accent1"/>
-          </a:effectRef>
-          <a:fontRef idx="minor">
-            <a:schemeClr val="lt1"/>
-          </a:fontRef>
-        </p:style>
-        <p:txBody>
-          <a:bodyPr rtlCol="0" anchor="ctr"/>
-          <a:lstStyle/>
-          <a:p>
-            <a:pPr algn="ctr"/>
-          </a:p>
-        </p:txBody>
-      </p:sp>
-      <p:sp>
-        <p:nvSpPr>
-          <p:cNvPr id="15" name="TextBox 14"/>
-          <p:cNvSpPr txBox="1"/>
-          <p:nvPr/>
-        </p:nvSpPr>
-        <p:spPr>
-          <a:xfrm>
-            <a:off x="6675120" y="4343400"/>
-            <a:ext cx="4754880" cy="548640"/>
-          </a:xfrm>
-          <a:prstGeom prst="rect">
-            <a:avLst/>
-          </a:prstGeom>
-          <a:noFill/>
-        </p:spPr>
-        <p:txBody>
-          <a:bodyPr wrap="square" anchor="t" lIns="0" rIns="0" tIns="0" bIns="0">
-            <a:spAutoFit/>
-          </a:bodyPr>
-          <a:lstStyle/>
-          <a:p>
-            <a:pPr algn="l">
+              <a:t>Falha de segurança quebra o negócio.</a:t>
+            </a:r>
+          </a:p>
+          <a:p>
+            <a:pPr>
               <a:lnSpc>
-                <a:spcPct val="100000"/>
+                <a:spcPct val="105000"/>
               </a:lnSpc>
-              <a:spcBef>
-                <a:spcPts val="0"/>
-              </a:spcBef>
               <a:spcAft>
-                <a:spcPts val="600"/>
+                <a:spcPts val="1000"/>
               </a:spcAft>
             </a:pPr>
             <a:r>
-              <a:rPr sz="2200" b="1" i="0">
+              <a:rPr sz="1600" b="1">
                 <a:solidFill>
                   <a:srgbClr val="7CB342"/>
                 </a:solidFill>
                 <a:latin typeface="Open Sans"/>
               </a:rPr>
-              <a:t>Analogia (RGS)</a:t>
-            </a:r>
-          </a:p>
-        </p:txBody>
-      </p:sp>
-      <p:sp>
-        <p:nvSpPr>
-          <p:cNvPr id="16" name="TextBox 15"/>
-          <p:cNvSpPr txBox="1"/>
-          <p:nvPr/>
-        </p:nvSpPr>
-        <p:spPr>
-          <a:xfrm>
-            <a:off x="6675120" y="4983480"/>
-            <a:ext cx="4754880" cy="1371600"/>
-          </a:xfrm>
-          <a:prstGeom prst="rect">
-            <a:avLst/>
-          </a:prstGeom>
-          <a:noFill/>
-        </p:spPr>
-        <p:txBody>
-          <a:bodyPr wrap="square" anchor="t" lIns="0" rIns="0" tIns="0" bIns="0">
-            <a:spAutoFit/>
-          </a:bodyPr>
-          <a:lstStyle/>
-          <a:p>
-            <a:pPr algn="l">
+              <a:t>✓  </a:t>
+            </a:r>
+            <a:r>
+              <a:rPr sz="1500">
+                <a:solidFill>
+                  <a:srgbClr val="212121"/>
+                </a:solidFill>
+                <a:latin typeface="Open Sans"/>
+              </a:rPr>
+              <a:t>Conformidade (LGPD) é obrigação legal.</a:t>
+            </a:r>
+          </a:p>
+          <a:p>
+            <a:pPr>
               <a:lnSpc>
-                <a:spcPct val="110000"/>
+                <a:spcPct val="105000"/>
               </a:lnSpc>
-              <a:spcBef>
-                <a:spcPts val="0"/>
-              </a:spcBef>
               <a:spcAft>
-                <a:spcPts val="600"/>
+                <a:spcPts val="1000"/>
               </a:spcAft>
             </a:pPr>
             <a:r>
-              <a:rPr sz="1500" b="0" i="0">
+              <a:rPr sz="1600" b="1">
+                <a:solidFill>
+                  <a:srgbClr val="7CB342"/>
+                </a:solidFill>
+                <a:latin typeface="Open Sans"/>
+              </a:rPr>
+              <a:t>✓  </a:t>
+            </a:r>
+            <a:r>
+              <a:rPr sz="1500">
                 <a:solidFill>
                   <a:srgbClr val="212121"/>
                 </a:solidFill>
                 <a:latin typeface="Open Sans"/>
               </a:rPr>
-              <a:t>'a fechadura deve ser testada e certificada'</a:t>
-            </a:r>
-          </a:p>
-        </p:txBody>
-      </p:sp>
-      <p:sp>
-        <p:nvSpPr>
-          <p:cNvPr id="17" name="TextBox 16"/>
+              <a:t>Confiança do usuário é o produto.</a:t>
+            </a:r>
+          </a:p>
+        </p:txBody>
+      </p:sp>
+      <p:sp>
+        <p:nvSpPr>
+          <p:cNvPr id="13" name="TextBox 12"/>
           <p:cNvSpPr txBox="1"/>
           <p:nvPr/>
         </p:nvSpPr>
@@ -6017,7 +6842,7 @@
                 </a:solidFill>
                 <a:latin typeface="Open Sans"/>
               </a:rPr>
-              <a:t>As 4 fontes dos requisitos</a:t>
+              <a:t>RFS × RGS</a:t>
             </a:r>
           </a:p>
         </p:txBody>
@@ -6062,7 +6887,7 @@
                 </a:solidFill>
                 <a:latin typeface="Open Sans"/>
               </a:rPr>
-              <a:t>Onde 'garimpar' o que proteger</a:t>
+              <a:t>O que o sistema faz para se proteger × quanta confiança temos</a:t>
             </a:r>
           </a:p>
         </p:txBody>
@@ -6153,7 +6978,7 @@
                 </a:solidFill>
                 <a:latin typeface="Open Sans"/>
               </a:rPr>
-              <a:t>Negócio</a:t>
+              <a:t>RFS — mecanismo</a:t>
             </a:r>
           </a:p>
         </p:txBody>
@@ -6198,7 +7023,7 @@
                 </a:solidFill>
                 <a:latin typeface="Open Sans"/>
               </a:rPr>
-              <a:t>ativos críticos, apetite a risco, SLAs</a:t>
+              <a:t>o controle em si: MFA, RBAC, cripto, auditoria</a:t>
             </a:r>
           </a:p>
         </p:txBody>
@@ -6222,7 +7047,7 @@
           </a:solidFill>
           <a:ln w="19050">
             <a:solidFill>
-              <a:srgbClr val="B71C1C"/>
+              <a:srgbClr val="1976D2"/>
             </a:solidFill>
           </a:ln>
           <a:effectLst/>
@@ -6285,11 +7110,11 @@
             <a:r>
               <a:rPr sz="2200" b="1" i="0">
                 <a:solidFill>
-                  <a:srgbClr val="B71C1C"/>
-                </a:solidFill>
-                <a:latin typeface="Open Sans"/>
-              </a:rPr>
-              <a:t>Legal/Regulatório</a:t>
+                  <a:srgbClr val="1976D2"/>
+                </a:solidFill>
+                <a:latin typeface="Open Sans"/>
+              </a:rPr>
+              <a:t>RGS — garantia</a:t>
             </a:r>
           </a:p>
         </p:txBody>
@@ -6334,7 +7159,7 @@
                 </a:solidFill>
                 <a:latin typeface="Open Sans"/>
               </a:rPr>
-              <a:t>LGPD, PCI-DSS, HIPAA — não-negociáveis</a:t>
+              <a:t>a evidência: teste, cobertura, nível ASVS, atestação</a:t>
             </a:r>
           </a:p>
         </p:txBody>
@@ -6358,7 +7183,7 @@
           </a:solidFill>
           <a:ln w="19050">
             <a:solidFill>
-              <a:srgbClr val="1976D2"/>
+              <a:srgbClr val="E65100"/>
             </a:solidFill>
           </a:ln>
           <a:effectLst/>
@@ -6421,11 +7246,11 @@
             <a:r>
               <a:rPr sz="2200" b="1" i="0">
                 <a:solidFill>
-                  <a:srgbClr val="1976D2"/>
-                </a:solidFill>
-                <a:latin typeface="Open Sans"/>
-              </a:rPr>
-              <a:t>Padrões</a:t>
+                  <a:srgbClr val="E65100"/>
+                </a:solidFill>
+                <a:latin typeface="Open Sans"/>
+              </a:rPr>
+              <a:t>Analogia (RFS)</a:t>
             </a:r>
           </a:p>
         </p:txBody>
@@ -6470,7 +7295,7 @@
                 </a:solidFill>
                 <a:latin typeface="Open Sans"/>
               </a:rPr>
-              <a:t>OWASP ASVS/Top 10, NIST, CIS</a:t>
+              <a:t>'a porta deve ter fechadura'</a:t>
             </a:r>
           </a:p>
         </p:txBody>
@@ -6494,7 +7319,7 @@
           </a:solidFill>
           <a:ln w="19050">
             <a:solidFill>
-              <a:srgbClr val="E65100"/>
+              <a:srgbClr val="7CB342"/>
             </a:solidFill>
           </a:ln>
           <a:effectLst/>
@@ -6557,11 +7382,11 @@
             <a:r>
               <a:rPr sz="2200" b="1" i="0">
                 <a:solidFill>
-                  <a:srgbClr val="E65100"/>
-                </a:solidFill>
-                <a:latin typeface="Open Sans"/>
-              </a:rPr>
-              <a:t>Ameaças</a:t>
+                  <a:srgbClr val="7CB342"/>
+                </a:solidFill>
+                <a:latin typeface="Open Sans"/>
+              </a:rPr>
+              <a:t>Analogia (RGS)</a:t>
             </a:r>
           </a:p>
         </p:txBody>
@@ -6606,7 +7431,7 @@
                 </a:solidFill>
                 <a:latin typeface="Open Sans"/>
               </a:rPr>
-              <a:t>threat modeling, abuse cases, incidentes</a:t>
+              <a:t>'a fechadura deve ser testada e certificada'</a:t>
             </a:r>
           </a:p>
         </p:txBody>
@@ -6683,13 +7508,13 @@
         <p:spPr>
           <a:xfrm>
             <a:off x="0" y="0"/>
-            <a:ext cx="12191695" cy="6858000"/>
+            <a:ext cx="12191695" cy="1234440"/>
           </a:xfrm>
           <a:prstGeom prst="rect">
             <a:avLst/>
           </a:prstGeom>
           <a:solidFill>
-            <a:srgbClr val="1F5232"/>
+            <a:srgbClr val="2D7A3D"/>
           </a:solidFill>
           <a:ln>
             <a:noFill/>
@@ -6726,8 +7551,8 @@
         </p:nvSpPr>
         <p:spPr>
           <a:xfrm>
-            <a:off x="457200" y="2194560"/>
-            <a:ext cx="11247120" cy="548640"/>
+            <a:off x="457200" y="164592"/>
+            <a:ext cx="11247120" cy="640080"/>
           </a:xfrm>
           <a:prstGeom prst="rect">
             <a:avLst/>
@@ -6740,7 +7565,7 @@
           </a:bodyPr>
           <a:lstStyle/>
           <a:p>
-            <a:pPr algn="ctr">
+            <a:pPr algn="l">
               <a:lnSpc>
                 <a:spcPct val="100000"/>
               </a:lnSpc>
@@ -6752,13 +7577,13 @@
               </a:spcAft>
             </a:pPr>
             <a:r>
-              <a:rPr sz="2000" b="1" i="0">
-                <a:solidFill>
-                  <a:srgbClr val="7CB342"/>
-                </a:solidFill>
-                <a:latin typeface="Open Sans"/>
-              </a:rPr>
-              <a:t>PARTE 2</a:t>
+              <a:rPr sz="3200" b="1" i="0">
+                <a:solidFill>
+                  <a:srgbClr val="FFFFFF"/>
+                </a:solidFill>
+                <a:latin typeface="Open Sans"/>
+              </a:rPr>
+              <a:t>As 4 fontes dos requisitos</a:t>
             </a:r>
           </a:p>
         </p:txBody>
@@ -6771,8 +7596,8 @@
         </p:nvSpPr>
         <p:spPr>
           <a:xfrm>
-            <a:off x="457200" y="2834640"/>
-            <a:ext cx="11247120" cy="1280160"/>
+            <a:off x="457200" y="777240"/>
+            <a:ext cx="11247120" cy="365760"/>
           </a:xfrm>
           <a:prstGeom prst="rect">
             <a:avLst/>
@@ -6785,7 +7610,7 @@
           </a:bodyPr>
           <a:lstStyle/>
           <a:p>
-            <a:pPr algn="ctr">
+            <a:pPr algn="l">
               <a:lnSpc>
                 <a:spcPct val="100000"/>
               </a:lnSpc>
@@ -6797,27 +7622,73 @@
               </a:spcAft>
             </a:pPr>
             <a:r>
-              <a:rPr sz="6000" b="1" i="0">
-                <a:solidFill>
-                  <a:srgbClr val="FFFFFF"/>
-                </a:solidFill>
-                <a:latin typeface="Open Sans"/>
-              </a:rPr>
-              <a:t>LGPD como fonte</a:t>
-            </a:r>
-          </a:p>
-        </p:txBody>
-      </p:sp>
-      <p:sp>
-        <p:nvSpPr>
-          <p:cNvPr id="5" name="TextBox 4"/>
+              <a:rPr sz="1600" b="0" i="1">
+                <a:solidFill>
+                  <a:srgbClr val="E0E8DB"/>
+                </a:solidFill>
+                <a:latin typeface="Open Sans"/>
+              </a:rPr>
+              <a:t>Onde 'garimpar' o que proteger</a:t>
+            </a:r>
+          </a:p>
+        </p:txBody>
+      </p:sp>
+      <p:sp>
+        <p:nvSpPr>
+          <p:cNvPr id="5" name="Rounded Rectangle 4"/>
+          <p:cNvSpPr/>
+          <p:nvPr/>
+        </p:nvSpPr>
+        <p:spPr>
+          <a:xfrm>
+            <a:off x="411480" y="1463040"/>
+            <a:ext cx="5468112" cy="2423160"/>
+          </a:xfrm>
+          <a:prstGeom prst="roundRect">
+            <a:avLst/>
+          </a:prstGeom>
+          <a:solidFill>
+            <a:srgbClr val="F5F5F5"/>
+          </a:solidFill>
+          <a:ln w="19050">
+            <a:solidFill>
+              <a:srgbClr val="2D7A3D"/>
+            </a:solidFill>
+          </a:ln>
+          <a:effectLst/>
+        </p:spPr>
+        <p:style>
+          <a:lnRef idx="1">
+            <a:schemeClr val="accent1"/>
+          </a:lnRef>
+          <a:fillRef idx="3">
+            <a:schemeClr val="accent1"/>
+          </a:fillRef>
+          <a:effectRef idx="2">
+            <a:schemeClr val="accent1"/>
+          </a:effectRef>
+          <a:fontRef idx="minor">
+            <a:schemeClr val="lt1"/>
+          </a:fontRef>
+        </p:style>
+        <p:txBody>
+          <a:bodyPr rtlCol="0" anchor="ctr"/>
+          <a:lstStyle/>
+          <a:p>
+            <a:pPr algn="ctr"/>
+          </a:p>
+        </p:txBody>
+      </p:sp>
+      <p:sp>
+        <p:nvSpPr>
+          <p:cNvPr id="6" name="TextBox 5"/>
           <p:cNvSpPr txBox="1"/>
           <p:nvPr/>
         </p:nvSpPr>
         <p:spPr>
           <a:xfrm>
-            <a:off x="457200" y="4297680"/>
-            <a:ext cx="11247120" cy="457200"/>
+            <a:off x="777240" y="1737360"/>
+            <a:ext cx="4754880" cy="548640"/>
           </a:xfrm>
           <a:prstGeom prst="rect">
             <a:avLst/>
@@ -6830,7 +7701,7 @@
           </a:bodyPr>
           <a:lstStyle/>
           <a:p>
-            <a:pPr algn="ctr">
+            <a:pPr algn="l">
               <a:lnSpc>
                 <a:spcPct val="100000"/>
               </a:lnSpc>
@@ -6842,36 +7713,83 @@
               </a:spcAft>
             </a:pPr>
             <a:r>
-              <a:rPr sz="2200" b="0" i="1">
-                <a:solidFill>
-                  <a:srgbClr val="CCD7C0"/>
-                </a:solidFill>
-                <a:latin typeface="Open Sans"/>
-              </a:rPr>
-              <a:t>Cada regulação vira exigência concreta</a:t>
-            </a:r>
-          </a:p>
-        </p:txBody>
-      </p:sp>
-      <p:sp>
-        <p:nvSpPr>
-          <p:cNvPr id="6" name="Rectangle 5"/>
+              <a:rPr sz="2200" b="1" i="0">
+                <a:solidFill>
+                  <a:srgbClr val="2D7A3D"/>
+                </a:solidFill>
+                <a:latin typeface="Open Sans"/>
+              </a:rPr>
+              <a:t>Negócio</a:t>
+            </a:r>
+          </a:p>
+        </p:txBody>
+      </p:sp>
+      <p:sp>
+        <p:nvSpPr>
+          <p:cNvPr id="7" name="TextBox 6"/>
+          <p:cNvSpPr txBox="1"/>
+          <p:nvPr/>
+        </p:nvSpPr>
+        <p:spPr>
+          <a:xfrm>
+            <a:off x="777240" y="2377440"/>
+            <a:ext cx="4754880" cy="1371600"/>
+          </a:xfrm>
+          <a:prstGeom prst="rect">
+            <a:avLst/>
+          </a:prstGeom>
+          <a:noFill/>
+        </p:spPr>
+        <p:txBody>
+          <a:bodyPr wrap="square" anchor="t" lIns="0" rIns="0" tIns="0" bIns="0">
+            <a:spAutoFit/>
+          </a:bodyPr>
+          <a:lstStyle/>
+          <a:p>
+            <a:pPr algn="l">
+              <a:lnSpc>
+                <a:spcPct val="110000"/>
+              </a:lnSpc>
+              <a:spcBef>
+                <a:spcPts val="0"/>
+              </a:spcBef>
+              <a:spcAft>
+                <a:spcPts val="600"/>
+              </a:spcAft>
+            </a:pPr>
+            <a:r>
+              <a:rPr sz="1500" b="0" i="0">
+                <a:solidFill>
+                  <a:srgbClr val="212121"/>
+                </a:solidFill>
+                <a:latin typeface="Open Sans"/>
+              </a:rPr>
+              <a:t>ativos críticos, apetite a risco, SLAs</a:t>
+            </a:r>
+          </a:p>
+        </p:txBody>
+      </p:sp>
+      <p:sp>
+        <p:nvSpPr>
+          <p:cNvPr id="8" name="Rounded Rectangle 7"/>
           <p:cNvSpPr/>
           <p:nvPr/>
         </p:nvSpPr>
         <p:spPr>
           <a:xfrm>
-            <a:off x="5184648" y="4983480"/>
-            <a:ext cx="1828800" cy="25400"/>
-          </a:xfrm>
-          <a:prstGeom prst="rect">
+            <a:off x="6309360" y="1463040"/>
+            <a:ext cx="5468112" cy="2423160"/>
+          </a:xfrm>
+          <a:prstGeom prst="roundRect">
             <a:avLst/>
           </a:prstGeom>
           <a:solidFill>
-            <a:srgbClr val="7CB342"/>
+            <a:srgbClr val="F5F5F5"/>
           </a:solidFill>
-          <a:ln>
-            <a:noFill/>
+          <a:ln w="19050">
+            <a:solidFill>
+              <a:srgbClr val="B71C1C"/>
+            </a:solidFill>
           </a:ln>
           <a:effectLst/>
         </p:spPr>
@@ -6894,6 +7812,413 @@
           <a:lstStyle/>
           <a:p>
             <a:pPr algn="ctr"/>
+          </a:p>
+        </p:txBody>
+      </p:sp>
+      <p:sp>
+        <p:nvSpPr>
+          <p:cNvPr id="9" name="TextBox 8"/>
+          <p:cNvSpPr txBox="1"/>
+          <p:nvPr/>
+        </p:nvSpPr>
+        <p:spPr>
+          <a:xfrm>
+            <a:off x="6675120" y="1737360"/>
+            <a:ext cx="4754880" cy="548640"/>
+          </a:xfrm>
+          <a:prstGeom prst="rect">
+            <a:avLst/>
+          </a:prstGeom>
+          <a:noFill/>
+        </p:spPr>
+        <p:txBody>
+          <a:bodyPr wrap="square" anchor="t" lIns="0" rIns="0" tIns="0" bIns="0">
+            <a:spAutoFit/>
+          </a:bodyPr>
+          <a:lstStyle/>
+          <a:p>
+            <a:pPr algn="l">
+              <a:lnSpc>
+                <a:spcPct val="100000"/>
+              </a:lnSpc>
+              <a:spcBef>
+                <a:spcPts val="0"/>
+              </a:spcBef>
+              <a:spcAft>
+                <a:spcPts val="600"/>
+              </a:spcAft>
+            </a:pPr>
+            <a:r>
+              <a:rPr sz="2200" b="1" i="0">
+                <a:solidFill>
+                  <a:srgbClr val="B71C1C"/>
+                </a:solidFill>
+                <a:latin typeface="Open Sans"/>
+              </a:rPr>
+              <a:t>Legal/Regulatório</a:t>
+            </a:r>
+          </a:p>
+        </p:txBody>
+      </p:sp>
+      <p:sp>
+        <p:nvSpPr>
+          <p:cNvPr id="10" name="TextBox 9"/>
+          <p:cNvSpPr txBox="1"/>
+          <p:nvPr/>
+        </p:nvSpPr>
+        <p:spPr>
+          <a:xfrm>
+            <a:off x="6675120" y="2377440"/>
+            <a:ext cx="4754880" cy="1371600"/>
+          </a:xfrm>
+          <a:prstGeom prst="rect">
+            <a:avLst/>
+          </a:prstGeom>
+          <a:noFill/>
+        </p:spPr>
+        <p:txBody>
+          <a:bodyPr wrap="square" anchor="t" lIns="0" rIns="0" tIns="0" bIns="0">
+            <a:spAutoFit/>
+          </a:bodyPr>
+          <a:lstStyle/>
+          <a:p>
+            <a:pPr algn="l">
+              <a:lnSpc>
+                <a:spcPct val="110000"/>
+              </a:lnSpc>
+              <a:spcBef>
+                <a:spcPts val="0"/>
+              </a:spcBef>
+              <a:spcAft>
+                <a:spcPts val="600"/>
+              </a:spcAft>
+            </a:pPr>
+            <a:r>
+              <a:rPr sz="1500" b="0" i="0">
+                <a:solidFill>
+                  <a:srgbClr val="212121"/>
+                </a:solidFill>
+                <a:latin typeface="Open Sans"/>
+              </a:rPr>
+              <a:t>LGPD, PCI-DSS, HIPAA — não-negociáveis</a:t>
+            </a:r>
+          </a:p>
+        </p:txBody>
+      </p:sp>
+      <p:sp>
+        <p:nvSpPr>
+          <p:cNvPr id="11" name="Rounded Rectangle 10"/>
+          <p:cNvSpPr/>
+          <p:nvPr/>
+        </p:nvSpPr>
+        <p:spPr>
+          <a:xfrm>
+            <a:off x="411480" y="4069080"/>
+            <a:ext cx="5468112" cy="2423160"/>
+          </a:xfrm>
+          <a:prstGeom prst="roundRect">
+            <a:avLst/>
+          </a:prstGeom>
+          <a:solidFill>
+            <a:srgbClr val="F5F5F5"/>
+          </a:solidFill>
+          <a:ln w="19050">
+            <a:solidFill>
+              <a:srgbClr val="1976D2"/>
+            </a:solidFill>
+          </a:ln>
+          <a:effectLst/>
+        </p:spPr>
+        <p:style>
+          <a:lnRef idx="1">
+            <a:schemeClr val="accent1"/>
+          </a:lnRef>
+          <a:fillRef idx="3">
+            <a:schemeClr val="accent1"/>
+          </a:fillRef>
+          <a:effectRef idx="2">
+            <a:schemeClr val="accent1"/>
+          </a:effectRef>
+          <a:fontRef idx="minor">
+            <a:schemeClr val="lt1"/>
+          </a:fontRef>
+        </p:style>
+        <p:txBody>
+          <a:bodyPr rtlCol="0" anchor="ctr"/>
+          <a:lstStyle/>
+          <a:p>
+            <a:pPr algn="ctr"/>
+          </a:p>
+        </p:txBody>
+      </p:sp>
+      <p:sp>
+        <p:nvSpPr>
+          <p:cNvPr id="12" name="TextBox 11"/>
+          <p:cNvSpPr txBox="1"/>
+          <p:nvPr/>
+        </p:nvSpPr>
+        <p:spPr>
+          <a:xfrm>
+            <a:off x="777240" y="4343400"/>
+            <a:ext cx="4754880" cy="548640"/>
+          </a:xfrm>
+          <a:prstGeom prst="rect">
+            <a:avLst/>
+          </a:prstGeom>
+          <a:noFill/>
+        </p:spPr>
+        <p:txBody>
+          <a:bodyPr wrap="square" anchor="t" lIns="0" rIns="0" tIns="0" bIns="0">
+            <a:spAutoFit/>
+          </a:bodyPr>
+          <a:lstStyle/>
+          <a:p>
+            <a:pPr algn="l">
+              <a:lnSpc>
+                <a:spcPct val="100000"/>
+              </a:lnSpc>
+              <a:spcBef>
+                <a:spcPts val="0"/>
+              </a:spcBef>
+              <a:spcAft>
+                <a:spcPts val="600"/>
+              </a:spcAft>
+            </a:pPr>
+            <a:r>
+              <a:rPr sz="2200" b="1" i="0">
+                <a:solidFill>
+                  <a:srgbClr val="1976D2"/>
+                </a:solidFill>
+                <a:latin typeface="Open Sans"/>
+              </a:rPr>
+              <a:t>Padrões</a:t>
+            </a:r>
+          </a:p>
+        </p:txBody>
+      </p:sp>
+      <p:sp>
+        <p:nvSpPr>
+          <p:cNvPr id="13" name="TextBox 12"/>
+          <p:cNvSpPr txBox="1"/>
+          <p:nvPr/>
+        </p:nvSpPr>
+        <p:spPr>
+          <a:xfrm>
+            <a:off x="777240" y="4983480"/>
+            <a:ext cx="4754880" cy="1371600"/>
+          </a:xfrm>
+          <a:prstGeom prst="rect">
+            <a:avLst/>
+          </a:prstGeom>
+          <a:noFill/>
+        </p:spPr>
+        <p:txBody>
+          <a:bodyPr wrap="square" anchor="t" lIns="0" rIns="0" tIns="0" bIns="0">
+            <a:spAutoFit/>
+          </a:bodyPr>
+          <a:lstStyle/>
+          <a:p>
+            <a:pPr algn="l">
+              <a:lnSpc>
+                <a:spcPct val="110000"/>
+              </a:lnSpc>
+              <a:spcBef>
+                <a:spcPts val="0"/>
+              </a:spcBef>
+              <a:spcAft>
+                <a:spcPts val="600"/>
+              </a:spcAft>
+            </a:pPr>
+            <a:r>
+              <a:rPr sz="1500" b="0" i="0">
+                <a:solidFill>
+                  <a:srgbClr val="212121"/>
+                </a:solidFill>
+                <a:latin typeface="Open Sans"/>
+              </a:rPr>
+              <a:t>OWASP ASVS/Top 10, NIST, CIS</a:t>
+            </a:r>
+          </a:p>
+        </p:txBody>
+      </p:sp>
+      <p:sp>
+        <p:nvSpPr>
+          <p:cNvPr id="14" name="Rounded Rectangle 13"/>
+          <p:cNvSpPr/>
+          <p:nvPr/>
+        </p:nvSpPr>
+        <p:spPr>
+          <a:xfrm>
+            <a:off x="6309360" y="4069080"/>
+            <a:ext cx="5468112" cy="2423160"/>
+          </a:xfrm>
+          <a:prstGeom prst="roundRect">
+            <a:avLst/>
+          </a:prstGeom>
+          <a:solidFill>
+            <a:srgbClr val="F5F5F5"/>
+          </a:solidFill>
+          <a:ln w="19050">
+            <a:solidFill>
+              <a:srgbClr val="E65100"/>
+            </a:solidFill>
+          </a:ln>
+          <a:effectLst/>
+        </p:spPr>
+        <p:style>
+          <a:lnRef idx="1">
+            <a:schemeClr val="accent1"/>
+          </a:lnRef>
+          <a:fillRef idx="3">
+            <a:schemeClr val="accent1"/>
+          </a:fillRef>
+          <a:effectRef idx="2">
+            <a:schemeClr val="accent1"/>
+          </a:effectRef>
+          <a:fontRef idx="minor">
+            <a:schemeClr val="lt1"/>
+          </a:fontRef>
+        </p:style>
+        <p:txBody>
+          <a:bodyPr rtlCol="0" anchor="ctr"/>
+          <a:lstStyle/>
+          <a:p>
+            <a:pPr algn="ctr"/>
+          </a:p>
+        </p:txBody>
+      </p:sp>
+      <p:sp>
+        <p:nvSpPr>
+          <p:cNvPr id="15" name="TextBox 14"/>
+          <p:cNvSpPr txBox="1"/>
+          <p:nvPr/>
+        </p:nvSpPr>
+        <p:spPr>
+          <a:xfrm>
+            <a:off x="6675120" y="4343400"/>
+            <a:ext cx="4754880" cy="548640"/>
+          </a:xfrm>
+          <a:prstGeom prst="rect">
+            <a:avLst/>
+          </a:prstGeom>
+          <a:noFill/>
+        </p:spPr>
+        <p:txBody>
+          <a:bodyPr wrap="square" anchor="t" lIns="0" rIns="0" tIns="0" bIns="0">
+            <a:spAutoFit/>
+          </a:bodyPr>
+          <a:lstStyle/>
+          <a:p>
+            <a:pPr algn="l">
+              <a:lnSpc>
+                <a:spcPct val="100000"/>
+              </a:lnSpc>
+              <a:spcBef>
+                <a:spcPts val="0"/>
+              </a:spcBef>
+              <a:spcAft>
+                <a:spcPts val="600"/>
+              </a:spcAft>
+            </a:pPr>
+            <a:r>
+              <a:rPr sz="2200" b="1" i="0">
+                <a:solidFill>
+                  <a:srgbClr val="E65100"/>
+                </a:solidFill>
+                <a:latin typeface="Open Sans"/>
+              </a:rPr>
+              <a:t>Ameaças</a:t>
+            </a:r>
+          </a:p>
+        </p:txBody>
+      </p:sp>
+      <p:sp>
+        <p:nvSpPr>
+          <p:cNvPr id="16" name="TextBox 15"/>
+          <p:cNvSpPr txBox="1"/>
+          <p:nvPr/>
+        </p:nvSpPr>
+        <p:spPr>
+          <a:xfrm>
+            <a:off x="6675120" y="4983480"/>
+            <a:ext cx="4754880" cy="1371600"/>
+          </a:xfrm>
+          <a:prstGeom prst="rect">
+            <a:avLst/>
+          </a:prstGeom>
+          <a:noFill/>
+        </p:spPr>
+        <p:txBody>
+          <a:bodyPr wrap="square" anchor="t" lIns="0" rIns="0" tIns="0" bIns="0">
+            <a:spAutoFit/>
+          </a:bodyPr>
+          <a:lstStyle/>
+          <a:p>
+            <a:pPr algn="l">
+              <a:lnSpc>
+                <a:spcPct val="110000"/>
+              </a:lnSpc>
+              <a:spcBef>
+                <a:spcPts val="0"/>
+              </a:spcBef>
+              <a:spcAft>
+                <a:spcPts val="600"/>
+              </a:spcAft>
+            </a:pPr>
+            <a:r>
+              <a:rPr sz="1500" b="0" i="0">
+                <a:solidFill>
+                  <a:srgbClr val="212121"/>
+                </a:solidFill>
+                <a:latin typeface="Open Sans"/>
+              </a:rPr>
+              <a:t>threat modeling, abuse cases, incidentes</a:t>
+            </a:r>
+          </a:p>
+        </p:txBody>
+      </p:sp>
+      <p:sp>
+        <p:nvSpPr>
+          <p:cNvPr id="17" name="TextBox 16"/>
+          <p:cNvSpPr txBox="1"/>
+          <p:nvPr/>
+        </p:nvSpPr>
+        <p:spPr>
+          <a:xfrm>
+            <a:off x="10972800" y="6446520"/>
+            <a:ext cx="914400" cy="320040"/>
+          </a:xfrm>
+          <a:prstGeom prst="rect">
+            <a:avLst/>
+          </a:prstGeom>
+          <a:noFill/>
+        </p:spPr>
+        <p:txBody>
+          <a:bodyPr wrap="square" anchor="t" lIns="0" rIns="0" tIns="0" bIns="0">
+            <a:spAutoFit/>
+          </a:bodyPr>
+          <a:lstStyle/>
+          <a:p>
+            <a:pPr algn="r">
+              <a:lnSpc>
+                <a:spcPct val="100000"/>
+              </a:lnSpc>
+              <a:spcBef>
+                <a:spcPts val="0"/>
+              </a:spcBef>
+              <a:spcAft>
+                <a:spcPts val="600"/>
+              </a:spcAft>
+            </a:pPr>
+            <a:r>
+              <a:rPr sz="1100" b="0" i="0">
+                <a:solidFill>
+                  <a:srgbClr val="616161"/>
+                </a:solidFill>
+                <a:latin typeface="Open Sans"/>
+              </a:rPr>
+              <a:t>6</a:t>
+            </a:r>
           </a:p>
         </p:txBody>
       </p:sp>
@@ -6924,13 +8249,13 @@
         <p:spPr>
           <a:xfrm>
             <a:off x="0" y="0"/>
-            <a:ext cx="12191695" cy="1234440"/>
+            <a:ext cx="12191695" cy="6858000"/>
           </a:xfrm>
           <a:prstGeom prst="rect">
             <a:avLst/>
           </a:prstGeom>
           <a:solidFill>
-            <a:srgbClr val="2D7A3D"/>
+            <a:srgbClr val="1F5232"/>
           </a:solidFill>
           <a:ln>
             <a:noFill/>
@@ -6967,188 +8292,8 @@
         </p:nvSpPr>
         <p:spPr>
           <a:xfrm>
-            <a:off x="457200" y="164592"/>
-            <a:ext cx="11247120" cy="640080"/>
-          </a:xfrm>
-          <a:prstGeom prst="rect">
-            <a:avLst/>
-          </a:prstGeom>
-          <a:noFill/>
-        </p:spPr>
-        <p:txBody>
-          <a:bodyPr wrap="square" anchor="t" lIns="0" rIns="0" tIns="0" bIns="0">
-            <a:spAutoFit/>
-          </a:bodyPr>
-          <a:lstStyle/>
-          <a:p>
-            <a:pPr algn="l">
-              <a:lnSpc>
-                <a:spcPct val="100000"/>
-              </a:lnSpc>
-              <a:spcBef>
-                <a:spcPts val="0"/>
-              </a:spcBef>
-              <a:spcAft>
-                <a:spcPts val="600"/>
-              </a:spcAft>
-            </a:pPr>
-            <a:r>
-              <a:rPr sz="3200" b="1" i="0">
-                <a:solidFill>
-                  <a:srgbClr val="FFFFFF"/>
-                </a:solidFill>
-                <a:latin typeface="Open Sans"/>
-              </a:rPr>
-              <a:t>LGPD no VidaPlus</a:t>
-            </a:r>
-          </a:p>
-        </p:txBody>
-      </p:sp>
-      <p:sp>
-        <p:nvSpPr>
-          <p:cNvPr id="4" name="TextBox 3"/>
-          <p:cNvSpPr txBox="1"/>
-          <p:nvPr/>
-        </p:nvSpPr>
-        <p:spPr>
-          <a:xfrm>
-            <a:off x="457200" y="777240"/>
-            <a:ext cx="11247120" cy="365760"/>
-          </a:xfrm>
-          <a:prstGeom prst="rect">
-            <a:avLst/>
-          </a:prstGeom>
-          <a:noFill/>
-        </p:spPr>
-        <p:txBody>
-          <a:bodyPr wrap="square" anchor="t" lIns="0" rIns="0" tIns="0" bIns="0">
-            <a:spAutoFit/>
-          </a:bodyPr>
-          <a:lstStyle/>
-          <a:p>
-            <a:pPr algn="l">
-              <a:lnSpc>
-                <a:spcPct val="100000"/>
-              </a:lnSpc>
-              <a:spcBef>
-                <a:spcPts val="0"/>
-              </a:spcBef>
-              <a:spcAft>
-                <a:spcPts val="600"/>
-              </a:spcAft>
-            </a:pPr>
-            <a:r>
-              <a:rPr sz="1600" b="0" i="1">
-                <a:solidFill>
-                  <a:srgbClr val="E0E8DB"/>
-                </a:solidFill>
-                <a:latin typeface="Open Sans"/>
-              </a:rPr>
-              <a:t>Artigos que mais impactam</a:t>
-            </a:r>
-          </a:p>
-        </p:txBody>
-      </p:sp>
-      <p:sp>
-        <p:nvSpPr>
-          <p:cNvPr id="5" name="Rounded Rectangle 4"/>
-          <p:cNvSpPr/>
-          <p:nvPr/>
-        </p:nvSpPr>
-        <p:spPr>
-          <a:xfrm>
-            <a:off x="411480" y="1508760"/>
-            <a:ext cx="11384280" cy="749808"/>
-          </a:xfrm>
-          <a:prstGeom prst="roundRect">
-            <a:avLst/>
-          </a:prstGeom>
-          <a:solidFill>
-            <a:srgbClr val="E8F0DB"/>
-          </a:solidFill>
-          <a:ln w="12700">
-            <a:solidFill>
-              <a:srgbClr val="7CB342"/>
-            </a:solidFill>
-          </a:ln>
-          <a:effectLst/>
-        </p:spPr>
-        <p:style>
-          <a:lnRef idx="1">
-            <a:schemeClr val="accent1"/>
-          </a:lnRef>
-          <a:fillRef idx="3">
-            <a:schemeClr val="accent1"/>
-          </a:fillRef>
-          <a:effectRef idx="2">
-            <a:schemeClr val="accent1"/>
-          </a:effectRef>
-          <a:fontRef idx="minor">
-            <a:schemeClr val="lt1"/>
-          </a:fontRef>
-        </p:style>
-        <p:txBody>
-          <a:bodyPr rtlCol="0" anchor="ctr"/>
-          <a:lstStyle/>
-          <a:p>
-            <a:pPr algn="ctr"/>
-          </a:p>
-        </p:txBody>
-      </p:sp>
-      <p:sp>
-        <p:nvSpPr>
-          <p:cNvPr id="6" name="Rounded Rectangle 5"/>
-          <p:cNvSpPr/>
-          <p:nvPr/>
-        </p:nvSpPr>
-        <p:spPr>
-          <a:xfrm>
-            <a:off x="502920" y="1600200"/>
-            <a:ext cx="1920240" cy="566927"/>
-          </a:xfrm>
-          <a:prstGeom prst="roundRect">
-            <a:avLst/>
-          </a:prstGeom>
-          <a:solidFill>
-            <a:srgbClr val="2D7A3D"/>
-          </a:solidFill>
-          <a:ln>
-            <a:noFill/>
-          </a:ln>
-          <a:effectLst/>
-        </p:spPr>
-        <p:style>
-          <a:lnRef idx="1">
-            <a:schemeClr val="accent1"/>
-          </a:lnRef>
-          <a:fillRef idx="3">
-            <a:schemeClr val="accent1"/>
-          </a:fillRef>
-          <a:effectRef idx="2">
-            <a:schemeClr val="accent1"/>
-          </a:effectRef>
-          <a:fontRef idx="minor">
-            <a:schemeClr val="lt1"/>
-          </a:fontRef>
-        </p:style>
-        <p:txBody>
-          <a:bodyPr rtlCol="0" anchor="ctr"/>
-          <a:lstStyle/>
-          <a:p>
-            <a:pPr algn="ctr"/>
-          </a:p>
-        </p:txBody>
-      </p:sp>
-      <p:sp>
-        <p:nvSpPr>
-          <p:cNvPr id="7" name="TextBox 6"/>
-          <p:cNvSpPr txBox="1"/>
-          <p:nvPr/>
-        </p:nvSpPr>
-        <p:spPr>
-          <a:xfrm>
-            <a:off x="502920" y="1709928"/>
-            <a:ext cx="1920240" cy="457200"/>
+            <a:off x="457200" y="2194560"/>
+            <a:ext cx="11247120" cy="548640"/>
           </a:xfrm>
           <a:prstGeom prst="rect">
             <a:avLst/>
@@ -7173,207 +8318,27 @@
               </a:spcAft>
             </a:pPr>
             <a:r>
-              <a:rPr sz="1800" b="1" i="0">
-                <a:solidFill>
-                  <a:srgbClr val="FFFFFF"/>
-                </a:solidFill>
-                <a:latin typeface="Open Sans"/>
-              </a:rPr>
-              <a:t>Art. 6</a:t>
-            </a:r>
-          </a:p>
-        </p:txBody>
-      </p:sp>
-      <p:sp>
-        <p:nvSpPr>
-          <p:cNvPr id="8" name="TextBox 7"/>
+              <a:rPr sz="2000" b="1" i="0">
+                <a:solidFill>
+                  <a:srgbClr val="7CB342"/>
+                </a:solidFill>
+                <a:latin typeface="Open Sans"/>
+              </a:rPr>
+              <a:t>PARTE 2</a:t>
+            </a:r>
+          </a:p>
+        </p:txBody>
+      </p:sp>
+      <p:sp>
+        <p:nvSpPr>
+          <p:cNvPr id="4" name="TextBox 3"/>
           <p:cNvSpPr txBox="1"/>
           <p:nvPr/>
         </p:nvSpPr>
         <p:spPr>
           <a:xfrm>
-            <a:off x="2697480" y="1709928"/>
-            <a:ext cx="3657600" cy="457200"/>
-          </a:xfrm>
-          <a:prstGeom prst="rect">
-            <a:avLst/>
-          </a:prstGeom>
-          <a:noFill/>
-        </p:spPr>
-        <p:txBody>
-          <a:bodyPr wrap="square" anchor="t" lIns="0" rIns="0" tIns="0" bIns="0">
-            <a:spAutoFit/>
-          </a:bodyPr>
-          <a:lstStyle/>
-          <a:p>
-            <a:pPr algn="l">
-              <a:lnSpc>
-                <a:spcPct val="100000"/>
-              </a:lnSpc>
-              <a:spcBef>
-                <a:spcPts val="0"/>
-              </a:spcBef>
-              <a:spcAft>
-                <a:spcPts val="600"/>
-              </a:spcAft>
-            </a:pPr>
-            <a:r>
-              <a:rPr sz="1500" b="1" i="0">
-                <a:solidFill>
-                  <a:srgbClr val="2D7A3D"/>
-                </a:solidFill>
-                <a:latin typeface="Open Sans"/>
-              </a:rPr>
-              <a:t>Princípios</a:t>
-            </a:r>
-          </a:p>
-        </p:txBody>
-      </p:sp>
-      <p:sp>
-        <p:nvSpPr>
-          <p:cNvPr id="9" name="TextBox 8"/>
-          <p:cNvSpPr txBox="1"/>
-          <p:nvPr/>
-        </p:nvSpPr>
-        <p:spPr>
-          <a:xfrm>
-            <a:off x="6492240" y="1728216"/>
-            <a:ext cx="5120640" cy="457200"/>
-          </a:xfrm>
-          <a:prstGeom prst="rect">
-            <a:avLst/>
-          </a:prstGeom>
-          <a:noFill/>
-        </p:spPr>
-        <p:txBody>
-          <a:bodyPr wrap="square" anchor="t" lIns="0" rIns="0" tIns="0" bIns="0">
-            <a:spAutoFit/>
-          </a:bodyPr>
-          <a:lstStyle/>
-          <a:p>
-            <a:pPr algn="l">
-              <a:lnSpc>
-                <a:spcPct val="100000"/>
-              </a:lnSpc>
-              <a:spcBef>
-                <a:spcPts val="0"/>
-              </a:spcBef>
-              <a:spcAft>
-                <a:spcPts val="600"/>
-              </a:spcAft>
-            </a:pPr>
-            <a:r>
-              <a:rPr sz="1300" b="0" i="0">
-                <a:solidFill>
-                  <a:srgbClr val="212121"/>
-                </a:solidFill>
-                <a:latin typeface="Open Sans"/>
-              </a:rPr>
-              <a:t>finalidade, minimização, segurança, accountability</a:t>
-            </a:r>
-          </a:p>
-        </p:txBody>
-      </p:sp>
-      <p:sp>
-        <p:nvSpPr>
-          <p:cNvPr id="10" name="Rounded Rectangle 9"/>
-          <p:cNvSpPr/>
-          <p:nvPr/>
-        </p:nvSpPr>
-        <p:spPr>
-          <a:xfrm>
-            <a:off x="411480" y="2313432"/>
-            <a:ext cx="11384280" cy="749808"/>
-          </a:xfrm>
-          <a:prstGeom prst="roundRect">
-            <a:avLst/>
-          </a:prstGeom>
-          <a:solidFill>
-            <a:srgbClr val="E8F0DB"/>
-          </a:solidFill>
-          <a:ln w="12700">
-            <a:solidFill>
-              <a:srgbClr val="7CB342"/>
-            </a:solidFill>
-          </a:ln>
-          <a:effectLst/>
-        </p:spPr>
-        <p:style>
-          <a:lnRef idx="1">
-            <a:schemeClr val="accent1"/>
-          </a:lnRef>
-          <a:fillRef idx="3">
-            <a:schemeClr val="accent1"/>
-          </a:fillRef>
-          <a:effectRef idx="2">
-            <a:schemeClr val="accent1"/>
-          </a:effectRef>
-          <a:fontRef idx="minor">
-            <a:schemeClr val="lt1"/>
-          </a:fontRef>
-        </p:style>
-        <p:txBody>
-          <a:bodyPr rtlCol="0" anchor="ctr"/>
-          <a:lstStyle/>
-          <a:p>
-            <a:pPr algn="ctr"/>
-          </a:p>
-        </p:txBody>
-      </p:sp>
-      <p:sp>
-        <p:nvSpPr>
-          <p:cNvPr id="11" name="Rounded Rectangle 10"/>
-          <p:cNvSpPr/>
-          <p:nvPr/>
-        </p:nvSpPr>
-        <p:spPr>
-          <a:xfrm>
-            <a:off x="502920" y="2404872"/>
-            <a:ext cx="1920240" cy="566927"/>
-          </a:xfrm>
-          <a:prstGeom prst="roundRect">
-            <a:avLst/>
-          </a:prstGeom>
-          <a:solidFill>
-            <a:srgbClr val="2D7A3D"/>
-          </a:solidFill>
-          <a:ln>
-            <a:noFill/>
-          </a:ln>
-          <a:effectLst/>
-        </p:spPr>
-        <p:style>
-          <a:lnRef idx="1">
-            <a:schemeClr val="accent1"/>
-          </a:lnRef>
-          <a:fillRef idx="3">
-            <a:schemeClr val="accent1"/>
-          </a:fillRef>
-          <a:effectRef idx="2">
-            <a:schemeClr val="accent1"/>
-          </a:effectRef>
-          <a:fontRef idx="minor">
-            <a:schemeClr val="lt1"/>
-          </a:fontRef>
-        </p:style>
-        <p:txBody>
-          <a:bodyPr rtlCol="0" anchor="ctr"/>
-          <a:lstStyle/>
-          <a:p>
-            <a:pPr algn="ctr"/>
-          </a:p>
-        </p:txBody>
-      </p:sp>
-      <p:sp>
-        <p:nvSpPr>
-          <p:cNvPr id="12" name="TextBox 11"/>
-          <p:cNvSpPr txBox="1"/>
-          <p:nvPr/>
-        </p:nvSpPr>
-        <p:spPr>
-          <a:xfrm>
-            <a:off x="502920" y="2514600"/>
-            <a:ext cx="1920240" cy="457200"/>
+            <a:off x="457200" y="2834640"/>
+            <a:ext cx="11247120" cy="1280160"/>
           </a:xfrm>
           <a:prstGeom prst="rect">
             <a:avLst/>
@@ -7398,207 +8363,27 @@
               </a:spcAft>
             </a:pPr>
             <a:r>
-              <a:rPr sz="1800" b="1" i="0">
+              <a:rPr sz="6000" b="1" i="0">
                 <a:solidFill>
                   <a:srgbClr val="FFFFFF"/>
                 </a:solidFill>
                 <a:latin typeface="Open Sans"/>
               </a:rPr>
-              <a:t>Art. 7/11</a:t>
-            </a:r>
-          </a:p>
-        </p:txBody>
-      </p:sp>
-      <p:sp>
-        <p:nvSpPr>
-          <p:cNvPr id="13" name="TextBox 12"/>
+              <a:t>LGPD como fonte</a:t>
+            </a:r>
+          </a:p>
+        </p:txBody>
+      </p:sp>
+      <p:sp>
+        <p:nvSpPr>
+          <p:cNvPr id="5" name="TextBox 4"/>
           <p:cNvSpPr txBox="1"/>
           <p:nvPr/>
         </p:nvSpPr>
         <p:spPr>
           <a:xfrm>
-            <a:off x="2697480" y="2514600"/>
-            <a:ext cx="3657600" cy="457200"/>
-          </a:xfrm>
-          <a:prstGeom prst="rect">
-            <a:avLst/>
-          </a:prstGeom>
-          <a:noFill/>
-        </p:spPr>
-        <p:txBody>
-          <a:bodyPr wrap="square" anchor="t" lIns="0" rIns="0" tIns="0" bIns="0">
-            <a:spAutoFit/>
-          </a:bodyPr>
-          <a:lstStyle/>
-          <a:p>
-            <a:pPr algn="l">
-              <a:lnSpc>
-                <a:spcPct val="100000"/>
-              </a:lnSpc>
-              <a:spcBef>
-                <a:spcPts val="0"/>
-              </a:spcBef>
-              <a:spcAft>
-                <a:spcPts val="600"/>
-              </a:spcAft>
-            </a:pPr>
-            <a:r>
-              <a:rPr sz="1500" b="1" i="0">
-                <a:solidFill>
-                  <a:srgbClr val="2D7A3D"/>
-                </a:solidFill>
-                <a:latin typeface="Open Sans"/>
-              </a:rPr>
-              <a:t>Bases legais</a:t>
-            </a:r>
-          </a:p>
-        </p:txBody>
-      </p:sp>
-      <p:sp>
-        <p:nvSpPr>
-          <p:cNvPr id="14" name="TextBox 13"/>
-          <p:cNvSpPr txBox="1"/>
-          <p:nvPr/>
-        </p:nvSpPr>
-        <p:spPr>
-          <a:xfrm>
-            <a:off x="6492240" y="2532887"/>
-            <a:ext cx="5120640" cy="457200"/>
-          </a:xfrm>
-          <a:prstGeom prst="rect">
-            <a:avLst/>
-          </a:prstGeom>
-          <a:noFill/>
-        </p:spPr>
-        <p:txBody>
-          <a:bodyPr wrap="square" anchor="t" lIns="0" rIns="0" tIns="0" bIns="0">
-            <a:spAutoFit/>
-          </a:bodyPr>
-          <a:lstStyle/>
-          <a:p>
-            <a:pPr algn="l">
-              <a:lnSpc>
-                <a:spcPct val="100000"/>
-              </a:lnSpc>
-              <a:spcBef>
-                <a:spcPts val="0"/>
-              </a:spcBef>
-              <a:spcAft>
-                <a:spcPts val="600"/>
-              </a:spcAft>
-            </a:pPr>
-            <a:r>
-              <a:rPr sz="1300" b="0" i="0">
-                <a:solidFill>
-                  <a:srgbClr val="212121"/>
-                </a:solidFill>
-                <a:latin typeface="Open Sans"/>
-              </a:rPr>
-              <a:t>dados sensíveis de saúde -&gt; regime reforçado</a:t>
-            </a:r>
-          </a:p>
-        </p:txBody>
-      </p:sp>
-      <p:sp>
-        <p:nvSpPr>
-          <p:cNvPr id="15" name="Rounded Rectangle 14"/>
-          <p:cNvSpPr/>
-          <p:nvPr/>
-        </p:nvSpPr>
-        <p:spPr>
-          <a:xfrm>
-            <a:off x="411480" y="3118103"/>
-            <a:ext cx="11384280" cy="749808"/>
-          </a:xfrm>
-          <a:prstGeom prst="roundRect">
-            <a:avLst/>
-          </a:prstGeom>
-          <a:solidFill>
-            <a:srgbClr val="E8F0DB"/>
-          </a:solidFill>
-          <a:ln w="12700">
-            <a:solidFill>
-              <a:srgbClr val="7CB342"/>
-            </a:solidFill>
-          </a:ln>
-          <a:effectLst/>
-        </p:spPr>
-        <p:style>
-          <a:lnRef idx="1">
-            <a:schemeClr val="accent1"/>
-          </a:lnRef>
-          <a:fillRef idx="3">
-            <a:schemeClr val="accent1"/>
-          </a:fillRef>
-          <a:effectRef idx="2">
-            <a:schemeClr val="accent1"/>
-          </a:effectRef>
-          <a:fontRef idx="minor">
-            <a:schemeClr val="lt1"/>
-          </a:fontRef>
-        </p:style>
-        <p:txBody>
-          <a:bodyPr rtlCol="0" anchor="ctr"/>
-          <a:lstStyle/>
-          <a:p>
-            <a:pPr algn="ctr"/>
-          </a:p>
-        </p:txBody>
-      </p:sp>
-      <p:sp>
-        <p:nvSpPr>
-          <p:cNvPr id="16" name="Rounded Rectangle 15"/>
-          <p:cNvSpPr/>
-          <p:nvPr/>
-        </p:nvSpPr>
-        <p:spPr>
-          <a:xfrm>
-            <a:off x="502920" y="3209544"/>
-            <a:ext cx="1920240" cy="566927"/>
-          </a:xfrm>
-          <a:prstGeom prst="roundRect">
-            <a:avLst/>
-          </a:prstGeom>
-          <a:solidFill>
-            <a:srgbClr val="2D7A3D"/>
-          </a:solidFill>
-          <a:ln>
-            <a:noFill/>
-          </a:ln>
-          <a:effectLst/>
-        </p:spPr>
-        <p:style>
-          <a:lnRef idx="1">
-            <a:schemeClr val="accent1"/>
-          </a:lnRef>
-          <a:fillRef idx="3">
-            <a:schemeClr val="accent1"/>
-          </a:fillRef>
-          <a:effectRef idx="2">
-            <a:schemeClr val="accent1"/>
-          </a:effectRef>
-          <a:fontRef idx="minor">
-            <a:schemeClr val="lt1"/>
-          </a:fontRef>
-        </p:style>
-        <p:txBody>
-          <a:bodyPr rtlCol="0" anchor="ctr"/>
-          <a:lstStyle/>
-          <a:p>
-            <a:pPr algn="ctr"/>
-          </a:p>
-        </p:txBody>
-      </p:sp>
-      <p:sp>
-        <p:nvSpPr>
-          <p:cNvPr id="17" name="TextBox 16"/>
-          <p:cNvSpPr txBox="1"/>
-          <p:nvPr/>
-        </p:nvSpPr>
-        <p:spPr>
-          <a:xfrm>
-            <a:off x="502920" y="3319272"/>
-            <a:ext cx="1920240" cy="457200"/>
+            <a:off x="457200" y="4297680"/>
+            <a:ext cx="11247120" cy="457200"/>
           </a:xfrm>
           <a:prstGeom prst="rect">
             <a:avLst/>
@@ -7623,128 +8408,36 @@
               </a:spcAft>
             </a:pPr>
             <a:r>
-              <a:rPr sz="1800" b="1" i="0">
-                <a:solidFill>
-                  <a:srgbClr val="FFFFFF"/>
-                </a:solidFill>
-                <a:latin typeface="Open Sans"/>
-              </a:rPr>
-              <a:t>Art. 18</a:t>
-            </a:r>
-          </a:p>
-        </p:txBody>
-      </p:sp>
-      <p:sp>
-        <p:nvSpPr>
-          <p:cNvPr id="18" name="TextBox 17"/>
-          <p:cNvSpPr txBox="1"/>
-          <p:nvPr/>
-        </p:nvSpPr>
-        <p:spPr>
-          <a:xfrm>
-            <a:off x="2697480" y="3319272"/>
-            <a:ext cx="3657600" cy="457200"/>
+              <a:rPr sz="2200" b="0" i="1">
+                <a:solidFill>
+                  <a:srgbClr val="CCD7C0"/>
+                </a:solidFill>
+                <a:latin typeface="Open Sans"/>
+              </a:rPr>
+              <a:t>Cada regulação vira exigência concreta</a:t>
+            </a:r>
+          </a:p>
+        </p:txBody>
+      </p:sp>
+      <p:sp>
+        <p:nvSpPr>
+          <p:cNvPr id="6" name="Rectangle 5"/>
+          <p:cNvSpPr/>
+          <p:nvPr/>
+        </p:nvSpPr>
+        <p:spPr>
+          <a:xfrm>
+            <a:off x="5184648" y="4983480"/>
+            <a:ext cx="1828800" cy="25400"/>
           </a:xfrm>
           <a:prstGeom prst="rect">
             <a:avLst/>
           </a:prstGeom>
-          <a:noFill/>
-        </p:spPr>
-        <p:txBody>
-          <a:bodyPr wrap="square" anchor="t" lIns="0" rIns="0" tIns="0" bIns="0">
-            <a:spAutoFit/>
-          </a:bodyPr>
-          <a:lstStyle/>
-          <a:p>
-            <a:pPr algn="l">
-              <a:lnSpc>
-                <a:spcPct val="100000"/>
-              </a:lnSpc>
-              <a:spcBef>
-                <a:spcPts val="0"/>
-              </a:spcBef>
-              <a:spcAft>
-                <a:spcPts val="600"/>
-              </a:spcAft>
-            </a:pPr>
-            <a:r>
-              <a:rPr sz="1500" b="1" i="0">
-                <a:solidFill>
-                  <a:srgbClr val="2D7A3D"/>
-                </a:solidFill>
-                <a:latin typeface="Open Sans"/>
-              </a:rPr>
-              <a:t>Direitos do titular</a:t>
-            </a:r>
-          </a:p>
-        </p:txBody>
-      </p:sp>
-      <p:sp>
-        <p:nvSpPr>
-          <p:cNvPr id="19" name="TextBox 18"/>
-          <p:cNvSpPr txBox="1"/>
-          <p:nvPr/>
-        </p:nvSpPr>
-        <p:spPr>
-          <a:xfrm>
-            <a:off x="6492240" y="3337559"/>
-            <a:ext cx="5120640" cy="457200"/>
-          </a:xfrm>
-          <a:prstGeom prst="rect">
-            <a:avLst/>
-          </a:prstGeom>
-          <a:noFill/>
-        </p:spPr>
-        <p:txBody>
-          <a:bodyPr wrap="square" anchor="t" lIns="0" rIns="0" tIns="0" bIns="0">
-            <a:spAutoFit/>
-          </a:bodyPr>
-          <a:lstStyle/>
-          <a:p>
-            <a:pPr algn="l">
-              <a:lnSpc>
-                <a:spcPct val="100000"/>
-              </a:lnSpc>
-              <a:spcBef>
-                <a:spcPts val="0"/>
-              </a:spcBef>
-              <a:spcAft>
-                <a:spcPts val="600"/>
-              </a:spcAft>
-            </a:pPr>
-            <a:r>
-              <a:rPr sz="1300" b="0" i="0">
-                <a:solidFill>
-                  <a:srgbClr val="212121"/>
-                </a:solidFill>
-                <a:latin typeface="Open Sans"/>
-              </a:rPr>
-              <a:t>acesso, portabilidade, eliminação</a:t>
-            </a:r>
-          </a:p>
-        </p:txBody>
-      </p:sp>
-      <p:sp>
-        <p:nvSpPr>
-          <p:cNvPr id="20" name="Rounded Rectangle 19"/>
-          <p:cNvSpPr/>
-          <p:nvPr/>
-        </p:nvSpPr>
-        <p:spPr>
-          <a:xfrm>
-            <a:off x="411480" y="3922775"/>
-            <a:ext cx="11384280" cy="749808"/>
-          </a:xfrm>
-          <a:prstGeom prst="roundRect">
-            <a:avLst/>
-          </a:prstGeom>
           <a:solidFill>
-            <a:srgbClr val="E8F0DB"/>
+            <a:srgbClr val="7CB342"/>
           </a:solidFill>
-          <a:ln w="12700">
-            <a:solidFill>
-              <a:srgbClr val="7CB342"/>
-            </a:solidFill>
+          <a:ln>
+            <a:noFill/>
           </a:ln>
           <a:effectLst/>
         </p:spPr>
@@ -7767,680 +8460,6 @@
           <a:lstStyle/>
           <a:p>
             <a:pPr algn="ctr"/>
-          </a:p>
-        </p:txBody>
-      </p:sp>
-      <p:sp>
-        <p:nvSpPr>
-          <p:cNvPr id="21" name="Rounded Rectangle 20"/>
-          <p:cNvSpPr/>
-          <p:nvPr/>
-        </p:nvSpPr>
-        <p:spPr>
-          <a:xfrm>
-            <a:off x="502920" y="4014215"/>
-            <a:ext cx="1920240" cy="566927"/>
-          </a:xfrm>
-          <a:prstGeom prst="roundRect">
-            <a:avLst/>
-          </a:prstGeom>
-          <a:solidFill>
-            <a:srgbClr val="2D7A3D"/>
-          </a:solidFill>
-          <a:ln>
-            <a:noFill/>
-          </a:ln>
-          <a:effectLst/>
-        </p:spPr>
-        <p:style>
-          <a:lnRef idx="1">
-            <a:schemeClr val="accent1"/>
-          </a:lnRef>
-          <a:fillRef idx="3">
-            <a:schemeClr val="accent1"/>
-          </a:fillRef>
-          <a:effectRef idx="2">
-            <a:schemeClr val="accent1"/>
-          </a:effectRef>
-          <a:fontRef idx="minor">
-            <a:schemeClr val="lt1"/>
-          </a:fontRef>
-        </p:style>
-        <p:txBody>
-          <a:bodyPr rtlCol="0" anchor="ctr"/>
-          <a:lstStyle/>
-          <a:p>
-            <a:pPr algn="ctr"/>
-          </a:p>
-        </p:txBody>
-      </p:sp>
-      <p:sp>
-        <p:nvSpPr>
-          <p:cNvPr id="22" name="TextBox 21"/>
-          <p:cNvSpPr txBox="1"/>
-          <p:nvPr/>
-        </p:nvSpPr>
-        <p:spPr>
-          <a:xfrm>
-            <a:off x="502920" y="4123943"/>
-            <a:ext cx="1920240" cy="457200"/>
-          </a:xfrm>
-          <a:prstGeom prst="rect">
-            <a:avLst/>
-          </a:prstGeom>
-          <a:noFill/>
-        </p:spPr>
-        <p:txBody>
-          <a:bodyPr wrap="square" anchor="t" lIns="0" rIns="0" tIns="0" bIns="0">
-            <a:spAutoFit/>
-          </a:bodyPr>
-          <a:lstStyle/>
-          <a:p>
-            <a:pPr algn="ctr">
-              <a:lnSpc>
-                <a:spcPct val="100000"/>
-              </a:lnSpc>
-              <a:spcBef>
-                <a:spcPts val="0"/>
-              </a:spcBef>
-              <a:spcAft>
-                <a:spcPts val="600"/>
-              </a:spcAft>
-            </a:pPr>
-            <a:r>
-              <a:rPr sz="1800" b="1" i="0">
-                <a:solidFill>
-                  <a:srgbClr val="FFFFFF"/>
-                </a:solidFill>
-                <a:latin typeface="Open Sans"/>
-              </a:rPr>
-              <a:t>Art. 8/9</a:t>
-            </a:r>
-          </a:p>
-        </p:txBody>
-      </p:sp>
-      <p:sp>
-        <p:nvSpPr>
-          <p:cNvPr id="23" name="TextBox 22"/>
-          <p:cNvSpPr txBox="1"/>
-          <p:nvPr/>
-        </p:nvSpPr>
-        <p:spPr>
-          <a:xfrm>
-            <a:off x="2697480" y="4123943"/>
-            <a:ext cx="3657600" cy="457200"/>
-          </a:xfrm>
-          <a:prstGeom prst="rect">
-            <a:avLst/>
-          </a:prstGeom>
-          <a:noFill/>
-        </p:spPr>
-        <p:txBody>
-          <a:bodyPr wrap="square" anchor="t" lIns="0" rIns="0" tIns="0" bIns="0">
-            <a:spAutoFit/>
-          </a:bodyPr>
-          <a:lstStyle/>
-          <a:p>
-            <a:pPr algn="l">
-              <a:lnSpc>
-                <a:spcPct val="100000"/>
-              </a:lnSpc>
-              <a:spcBef>
-                <a:spcPts val="0"/>
-              </a:spcBef>
-              <a:spcAft>
-                <a:spcPts val="600"/>
-              </a:spcAft>
-            </a:pPr>
-            <a:r>
-              <a:rPr sz="1500" b="1" i="0">
-                <a:solidFill>
-                  <a:srgbClr val="2D7A3D"/>
-                </a:solidFill>
-                <a:latin typeface="Open Sans"/>
-              </a:rPr>
-              <a:t>Consentimento</a:t>
-            </a:r>
-          </a:p>
-        </p:txBody>
-      </p:sp>
-      <p:sp>
-        <p:nvSpPr>
-          <p:cNvPr id="24" name="TextBox 23"/>
-          <p:cNvSpPr txBox="1"/>
-          <p:nvPr/>
-        </p:nvSpPr>
-        <p:spPr>
-          <a:xfrm>
-            <a:off x="6492240" y="4142231"/>
-            <a:ext cx="5120640" cy="457200"/>
-          </a:xfrm>
-          <a:prstGeom prst="rect">
-            <a:avLst/>
-          </a:prstGeom>
-          <a:noFill/>
-        </p:spPr>
-        <p:txBody>
-          <a:bodyPr wrap="square" anchor="t" lIns="0" rIns="0" tIns="0" bIns="0">
-            <a:spAutoFit/>
-          </a:bodyPr>
-          <a:lstStyle/>
-          <a:p>
-            <a:pPr algn="l">
-              <a:lnSpc>
-                <a:spcPct val="100000"/>
-              </a:lnSpc>
-              <a:spcBef>
-                <a:spcPts val="0"/>
-              </a:spcBef>
-              <a:spcAft>
-                <a:spcPts val="600"/>
-              </a:spcAft>
-            </a:pPr>
-            <a:r>
-              <a:rPr sz="1300" b="0" i="0">
-                <a:solidFill>
-                  <a:srgbClr val="212121"/>
-                </a:solidFill>
-                <a:latin typeface="Open Sans"/>
-              </a:rPr>
-              <a:t>específico, versionado, revogável</a:t>
-            </a:r>
-          </a:p>
-        </p:txBody>
-      </p:sp>
-      <p:sp>
-        <p:nvSpPr>
-          <p:cNvPr id="25" name="Rounded Rectangle 24"/>
-          <p:cNvSpPr/>
-          <p:nvPr/>
-        </p:nvSpPr>
-        <p:spPr>
-          <a:xfrm>
-            <a:off x="411480" y="4727448"/>
-            <a:ext cx="11384280" cy="749808"/>
-          </a:xfrm>
-          <a:prstGeom prst="roundRect">
-            <a:avLst/>
-          </a:prstGeom>
-          <a:solidFill>
-            <a:srgbClr val="E8F0DB"/>
-          </a:solidFill>
-          <a:ln w="12700">
-            <a:solidFill>
-              <a:srgbClr val="7CB342"/>
-            </a:solidFill>
-          </a:ln>
-          <a:effectLst/>
-        </p:spPr>
-        <p:style>
-          <a:lnRef idx="1">
-            <a:schemeClr val="accent1"/>
-          </a:lnRef>
-          <a:fillRef idx="3">
-            <a:schemeClr val="accent1"/>
-          </a:fillRef>
-          <a:effectRef idx="2">
-            <a:schemeClr val="accent1"/>
-          </a:effectRef>
-          <a:fontRef idx="minor">
-            <a:schemeClr val="lt1"/>
-          </a:fontRef>
-        </p:style>
-        <p:txBody>
-          <a:bodyPr rtlCol="0" anchor="ctr"/>
-          <a:lstStyle/>
-          <a:p>
-            <a:pPr algn="ctr"/>
-          </a:p>
-        </p:txBody>
-      </p:sp>
-      <p:sp>
-        <p:nvSpPr>
-          <p:cNvPr id="26" name="Rounded Rectangle 25"/>
-          <p:cNvSpPr/>
-          <p:nvPr/>
-        </p:nvSpPr>
-        <p:spPr>
-          <a:xfrm>
-            <a:off x="502920" y="4818888"/>
-            <a:ext cx="1920240" cy="566927"/>
-          </a:xfrm>
-          <a:prstGeom prst="roundRect">
-            <a:avLst/>
-          </a:prstGeom>
-          <a:solidFill>
-            <a:srgbClr val="2D7A3D"/>
-          </a:solidFill>
-          <a:ln>
-            <a:noFill/>
-          </a:ln>
-          <a:effectLst/>
-        </p:spPr>
-        <p:style>
-          <a:lnRef idx="1">
-            <a:schemeClr val="accent1"/>
-          </a:lnRef>
-          <a:fillRef idx="3">
-            <a:schemeClr val="accent1"/>
-          </a:fillRef>
-          <a:effectRef idx="2">
-            <a:schemeClr val="accent1"/>
-          </a:effectRef>
-          <a:fontRef idx="minor">
-            <a:schemeClr val="lt1"/>
-          </a:fontRef>
-        </p:style>
-        <p:txBody>
-          <a:bodyPr rtlCol="0" anchor="ctr"/>
-          <a:lstStyle/>
-          <a:p>
-            <a:pPr algn="ctr"/>
-          </a:p>
-        </p:txBody>
-      </p:sp>
-      <p:sp>
-        <p:nvSpPr>
-          <p:cNvPr id="27" name="TextBox 26"/>
-          <p:cNvSpPr txBox="1"/>
-          <p:nvPr/>
-        </p:nvSpPr>
-        <p:spPr>
-          <a:xfrm>
-            <a:off x="502920" y="4928616"/>
-            <a:ext cx="1920240" cy="457200"/>
-          </a:xfrm>
-          <a:prstGeom prst="rect">
-            <a:avLst/>
-          </a:prstGeom>
-          <a:noFill/>
-        </p:spPr>
-        <p:txBody>
-          <a:bodyPr wrap="square" anchor="t" lIns="0" rIns="0" tIns="0" bIns="0">
-            <a:spAutoFit/>
-          </a:bodyPr>
-          <a:lstStyle/>
-          <a:p>
-            <a:pPr algn="ctr">
-              <a:lnSpc>
-                <a:spcPct val="100000"/>
-              </a:lnSpc>
-              <a:spcBef>
-                <a:spcPts val="0"/>
-              </a:spcBef>
-              <a:spcAft>
-                <a:spcPts val="600"/>
-              </a:spcAft>
-            </a:pPr>
-            <a:r>
-              <a:rPr sz="1800" b="1" i="0">
-                <a:solidFill>
-                  <a:srgbClr val="FFFFFF"/>
-                </a:solidFill>
-                <a:latin typeface="Open Sans"/>
-              </a:rPr>
-              <a:t>Art. 46</a:t>
-            </a:r>
-          </a:p>
-        </p:txBody>
-      </p:sp>
-      <p:sp>
-        <p:nvSpPr>
-          <p:cNvPr id="28" name="TextBox 27"/>
-          <p:cNvSpPr txBox="1"/>
-          <p:nvPr/>
-        </p:nvSpPr>
-        <p:spPr>
-          <a:xfrm>
-            <a:off x="2697480" y="4928616"/>
-            <a:ext cx="3657600" cy="457200"/>
-          </a:xfrm>
-          <a:prstGeom prst="rect">
-            <a:avLst/>
-          </a:prstGeom>
-          <a:noFill/>
-        </p:spPr>
-        <p:txBody>
-          <a:bodyPr wrap="square" anchor="t" lIns="0" rIns="0" tIns="0" bIns="0">
-            <a:spAutoFit/>
-          </a:bodyPr>
-          <a:lstStyle/>
-          <a:p>
-            <a:pPr algn="l">
-              <a:lnSpc>
-                <a:spcPct val="100000"/>
-              </a:lnSpc>
-              <a:spcBef>
-                <a:spcPts val="0"/>
-              </a:spcBef>
-              <a:spcAft>
-                <a:spcPts val="600"/>
-              </a:spcAft>
-            </a:pPr>
-            <a:r>
-              <a:rPr sz="1500" b="1" i="0">
-                <a:solidFill>
-                  <a:srgbClr val="2D7A3D"/>
-                </a:solidFill>
-                <a:latin typeface="Open Sans"/>
-              </a:rPr>
-              <a:t>Segurança</a:t>
-            </a:r>
-          </a:p>
-        </p:txBody>
-      </p:sp>
-      <p:sp>
-        <p:nvSpPr>
-          <p:cNvPr id="29" name="TextBox 28"/>
-          <p:cNvSpPr txBox="1"/>
-          <p:nvPr/>
-        </p:nvSpPr>
-        <p:spPr>
-          <a:xfrm>
-            <a:off x="6492240" y="4946904"/>
-            <a:ext cx="5120640" cy="457200"/>
-          </a:xfrm>
-          <a:prstGeom prst="rect">
-            <a:avLst/>
-          </a:prstGeom>
-          <a:noFill/>
-        </p:spPr>
-        <p:txBody>
-          <a:bodyPr wrap="square" anchor="t" lIns="0" rIns="0" tIns="0" bIns="0">
-            <a:spAutoFit/>
-          </a:bodyPr>
-          <a:lstStyle/>
-          <a:p>
-            <a:pPr algn="l">
-              <a:lnSpc>
-                <a:spcPct val="100000"/>
-              </a:lnSpc>
-              <a:spcBef>
-                <a:spcPts val="0"/>
-              </a:spcBef>
-              <a:spcAft>
-                <a:spcPts val="600"/>
-              </a:spcAft>
-            </a:pPr>
-            <a:r>
-              <a:rPr sz="1300" b="0" i="0">
-                <a:solidFill>
-                  <a:srgbClr val="212121"/>
-                </a:solidFill>
-                <a:latin typeface="Open Sans"/>
-              </a:rPr>
-              <a:t>cripto, controle de acesso, auditoria</a:t>
-            </a:r>
-          </a:p>
-        </p:txBody>
-      </p:sp>
-      <p:sp>
-        <p:nvSpPr>
-          <p:cNvPr id="30" name="Rounded Rectangle 29"/>
-          <p:cNvSpPr/>
-          <p:nvPr/>
-        </p:nvSpPr>
-        <p:spPr>
-          <a:xfrm>
-            <a:off x="411480" y="5532119"/>
-            <a:ext cx="11384280" cy="749808"/>
-          </a:xfrm>
-          <a:prstGeom prst="roundRect">
-            <a:avLst/>
-          </a:prstGeom>
-          <a:solidFill>
-            <a:srgbClr val="E8F0DB"/>
-          </a:solidFill>
-          <a:ln w="12700">
-            <a:solidFill>
-              <a:srgbClr val="7CB342"/>
-            </a:solidFill>
-          </a:ln>
-          <a:effectLst/>
-        </p:spPr>
-        <p:style>
-          <a:lnRef idx="1">
-            <a:schemeClr val="accent1"/>
-          </a:lnRef>
-          <a:fillRef idx="3">
-            <a:schemeClr val="accent1"/>
-          </a:fillRef>
-          <a:effectRef idx="2">
-            <a:schemeClr val="accent1"/>
-          </a:effectRef>
-          <a:fontRef idx="minor">
-            <a:schemeClr val="lt1"/>
-          </a:fontRef>
-        </p:style>
-        <p:txBody>
-          <a:bodyPr rtlCol="0" anchor="ctr"/>
-          <a:lstStyle/>
-          <a:p>
-            <a:pPr algn="ctr"/>
-          </a:p>
-        </p:txBody>
-      </p:sp>
-      <p:sp>
-        <p:nvSpPr>
-          <p:cNvPr id="31" name="Rounded Rectangle 30"/>
-          <p:cNvSpPr/>
-          <p:nvPr/>
-        </p:nvSpPr>
-        <p:spPr>
-          <a:xfrm>
-            <a:off x="502920" y="5623559"/>
-            <a:ext cx="1920240" cy="566927"/>
-          </a:xfrm>
-          <a:prstGeom prst="roundRect">
-            <a:avLst/>
-          </a:prstGeom>
-          <a:solidFill>
-            <a:srgbClr val="2D7A3D"/>
-          </a:solidFill>
-          <a:ln>
-            <a:noFill/>
-          </a:ln>
-          <a:effectLst/>
-        </p:spPr>
-        <p:style>
-          <a:lnRef idx="1">
-            <a:schemeClr val="accent1"/>
-          </a:lnRef>
-          <a:fillRef idx="3">
-            <a:schemeClr val="accent1"/>
-          </a:fillRef>
-          <a:effectRef idx="2">
-            <a:schemeClr val="accent1"/>
-          </a:effectRef>
-          <a:fontRef idx="minor">
-            <a:schemeClr val="lt1"/>
-          </a:fontRef>
-        </p:style>
-        <p:txBody>
-          <a:bodyPr rtlCol="0" anchor="ctr"/>
-          <a:lstStyle/>
-          <a:p>
-            <a:pPr algn="ctr"/>
-          </a:p>
-        </p:txBody>
-      </p:sp>
-      <p:sp>
-        <p:nvSpPr>
-          <p:cNvPr id="32" name="TextBox 31"/>
-          <p:cNvSpPr txBox="1"/>
-          <p:nvPr/>
-        </p:nvSpPr>
-        <p:spPr>
-          <a:xfrm>
-            <a:off x="502920" y="5733287"/>
-            <a:ext cx="1920240" cy="457200"/>
-          </a:xfrm>
-          <a:prstGeom prst="rect">
-            <a:avLst/>
-          </a:prstGeom>
-          <a:noFill/>
-        </p:spPr>
-        <p:txBody>
-          <a:bodyPr wrap="square" anchor="t" lIns="0" rIns="0" tIns="0" bIns="0">
-            <a:spAutoFit/>
-          </a:bodyPr>
-          <a:lstStyle/>
-          <a:p>
-            <a:pPr algn="ctr">
-              <a:lnSpc>
-                <a:spcPct val="100000"/>
-              </a:lnSpc>
-              <a:spcBef>
-                <a:spcPts val="0"/>
-              </a:spcBef>
-              <a:spcAft>
-                <a:spcPts val="600"/>
-              </a:spcAft>
-            </a:pPr>
-            <a:r>
-              <a:rPr sz="1800" b="1" i="0">
-                <a:solidFill>
-                  <a:srgbClr val="FFFFFF"/>
-                </a:solidFill>
-                <a:latin typeface="Open Sans"/>
-              </a:rPr>
-              <a:t>Art. 38</a:t>
-            </a:r>
-          </a:p>
-        </p:txBody>
-      </p:sp>
-      <p:sp>
-        <p:nvSpPr>
-          <p:cNvPr id="33" name="TextBox 32"/>
-          <p:cNvSpPr txBox="1"/>
-          <p:nvPr/>
-        </p:nvSpPr>
-        <p:spPr>
-          <a:xfrm>
-            <a:off x="2697480" y="5733287"/>
-            <a:ext cx="3657600" cy="457200"/>
-          </a:xfrm>
-          <a:prstGeom prst="rect">
-            <a:avLst/>
-          </a:prstGeom>
-          <a:noFill/>
-        </p:spPr>
-        <p:txBody>
-          <a:bodyPr wrap="square" anchor="t" lIns="0" rIns="0" tIns="0" bIns="0">
-            <a:spAutoFit/>
-          </a:bodyPr>
-          <a:lstStyle/>
-          <a:p>
-            <a:pPr algn="l">
-              <a:lnSpc>
-                <a:spcPct val="100000"/>
-              </a:lnSpc>
-              <a:spcBef>
-                <a:spcPts val="0"/>
-              </a:spcBef>
-              <a:spcAft>
-                <a:spcPts val="600"/>
-              </a:spcAft>
-            </a:pPr>
-            <a:r>
-              <a:rPr sz="1500" b="1" i="0">
-                <a:solidFill>
-                  <a:srgbClr val="2D7A3D"/>
-                </a:solidFill>
-                <a:latin typeface="Open Sans"/>
-              </a:rPr>
-              <a:t>RIPD/DPIA</a:t>
-            </a:r>
-          </a:p>
-        </p:txBody>
-      </p:sp>
-      <p:sp>
-        <p:nvSpPr>
-          <p:cNvPr id="34" name="TextBox 33"/>
-          <p:cNvSpPr txBox="1"/>
-          <p:nvPr/>
-        </p:nvSpPr>
-        <p:spPr>
-          <a:xfrm>
-            <a:off x="6492240" y="5751575"/>
-            <a:ext cx="5120640" cy="457200"/>
-          </a:xfrm>
-          <a:prstGeom prst="rect">
-            <a:avLst/>
-          </a:prstGeom>
-          <a:noFill/>
-        </p:spPr>
-        <p:txBody>
-          <a:bodyPr wrap="square" anchor="t" lIns="0" rIns="0" tIns="0" bIns="0">
-            <a:spAutoFit/>
-          </a:bodyPr>
-          <a:lstStyle/>
-          <a:p>
-            <a:pPr algn="l">
-              <a:lnSpc>
-                <a:spcPct val="100000"/>
-              </a:lnSpc>
-              <a:spcBef>
-                <a:spcPts val="0"/>
-              </a:spcBef>
-              <a:spcAft>
-                <a:spcPts val="600"/>
-              </a:spcAft>
-            </a:pPr>
-            <a:r>
-              <a:rPr sz="1300" b="0" i="0">
-                <a:solidFill>
-                  <a:srgbClr val="212121"/>
-                </a:solidFill>
-                <a:latin typeface="Open Sans"/>
-              </a:rPr>
-              <a:t>relatório de impacto em alto risco</a:t>
-            </a:r>
-          </a:p>
-        </p:txBody>
-      </p:sp>
-      <p:sp>
-        <p:nvSpPr>
-          <p:cNvPr id="35" name="TextBox 34"/>
-          <p:cNvSpPr txBox="1"/>
-          <p:nvPr/>
-        </p:nvSpPr>
-        <p:spPr>
-          <a:xfrm>
-            <a:off x="10972800" y="6446520"/>
-            <a:ext cx="914400" cy="320040"/>
-          </a:xfrm>
-          <a:prstGeom prst="rect">
-            <a:avLst/>
-          </a:prstGeom>
-          <a:noFill/>
-        </p:spPr>
-        <p:txBody>
-          <a:bodyPr wrap="square" anchor="t" lIns="0" rIns="0" tIns="0" bIns="0">
-            <a:spAutoFit/>
-          </a:bodyPr>
-          <a:lstStyle/>
-          <a:p>
-            <a:pPr algn="r">
-              <a:lnSpc>
-                <a:spcPct val="100000"/>
-              </a:lnSpc>
-              <a:spcBef>
-                <a:spcPts val="0"/>
-              </a:spcBef>
-              <a:spcAft>
-                <a:spcPts val="600"/>
-              </a:spcAft>
-            </a:pPr>
-            <a:r>
-              <a:rPr sz="1100" b="0" i="0">
-                <a:solidFill>
-                  <a:srgbClr val="616161"/>
-                </a:solidFill>
-                <a:latin typeface="Open Sans"/>
-              </a:rPr>
-              <a:t>7</a:t>
-            </a:r>
           </a:p>
         </p:txBody>
       </p:sp>
@@ -8546,7 +8565,7 @@
                 </a:solidFill>
                 <a:latin typeface="Open Sans"/>
               </a:rPr>
-              <a:t>Como escrever um bom requisito</a:t>
+              <a:t>LGPD no VidaPlus</a:t>
             </a:r>
           </a:p>
         </p:txBody>
@@ -8591,7 +8610,7 @@
                 </a:solidFill>
                 <a:latin typeface="Open Sans"/>
               </a:rPr>
-              <a:t>SMART e testável</a:t>
+              <a:t>Artigos que mais impactam</a:t>
             </a:r>
           </a:p>
         </p:txBody>
@@ -8604,18 +8623,18 @@
         </p:nvSpPr>
         <p:spPr>
           <a:xfrm>
-            <a:off x="411480" y="1463040"/>
-            <a:ext cx="5468112" cy="2423160"/>
+            <a:off x="411480" y="1508760"/>
+            <a:ext cx="11384280" cy="749808"/>
           </a:xfrm>
           <a:prstGeom prst="roundRect">
             <a:avLst/>
           </a:prstGeom>
           <a:solidFill>
-            <a:srgbClr val="F5F5F5"/>
+            <a:srgbClr val="E8F0DB"/>
           </a:solidFill>
-          <a:ln w="19050">
+          <a:ln w="12700">
             <a:solidFill>
-              <a:srgbClr val="2D7A3D"/>
+              <a:srgbClr val="7CB342"/>
             </a:solidFill>
           </a:ln>
           <a:effectLst/>
@@ -8644,14 +8663,103 @@
       </p:sp>
       <p:sp>
         <p:nvSpPr>
-          <p:cNvPr id="6" name="TextBox 5"/>
+          <p:cNvPr id="6" name="Rounded Rectangle 5"/>
+          <p:cNvSpPr/>
+          <p:nvPr/>
+        </p:nvSpPr>
+        <p:spPr>
+          <a:xfrm>
+            <a:off x="502920" y="1600200"/>
+            <a:ext cx="1920240" cy="566927"/>
+          </a:xfrm>
+          <a:prstGeom prst="roundRect">
+            <a:avLst/>
+          </a:prstGeom>
+          <a:solidFill>
+            <a:srgbClr val="2D7A3D"/>
+          </a:solidFill>
+          <a:ln>
+            <a:noFill/>
+          </a:ln>
+          <a:effectLst/>
+        </p:spPr>
+        <p:style>
+          <a:lnRef idx="1">
+            <a:schemeClr val="accent1"/>
+          </a:lnRef>
+          <a:fillRef idx="3">
+            <a:schemeClr val="accent1"/>
+          </a:fillRef>
+          <a:effectRef idx="2">
+            <a:schemeClr val="accent1"/>
+          </a:effectRef>
+          <a:fontRef idx="minor">
+            <a:schemeClr val="lt1"/>
+          </a:fontRef>
+        </p:style>
+        <p:txBody>
+          <a:bodyPr rtlCol="0" anchor="ctr"/>
+          <a:lstStyle/>
+          <a:p>
+            <a:pPr algn="ctr"/>
+          </a:p>
+        </p:txBody>
+      </p:sp>
+      <p:sp>
+        <p:nvSpPr>
+          <p:cNvPr id="7" name="TextBox 6"/>
           <p:cNvSpPr txBox="1"/>
           <p:nvPr/>
         </p:nvSpPr>
         <p:spPr>
           <a:xfrm>
-            <a:off x="777240" y="1737360"/>
-            <a:ext cx="4754880" cy="548640"/>
+            <a:off x="502920" y="1709928"/>
+            <a:ext cx="1920240" cy="457200"/>
+          </a:xfrm>
+          <a:prstGeom prst="rect">
+            <a:avLst/>
+          </a:prstGeom>
+          <a:noFill/>
+        </p:spPr>
+        <p:txBody>
+          <a:bodyPr wrap="square" anchor="t" lIns="0" rIns="0" tIns="0" bIns="0">
+            <a:spAutoFit/>
+          </a:bodyPr>
+          <a:lstStyle/>
+          <a:p>
+            <a:pPr algn="ctr">
+              <a:lnSpc>
+                <a:spcPct val="100000"/>
+              </a:lnSpc>
+              <a:spcBef>
+                <a:spcPts val="0"/>
+              </a:spcBef>
+              <a:spcAft>
+                <a:spcPts val="600"/>
+              </a:spcAft>
+            </a:pPr>
+            <a:r>
+              <a:rPr sz="1800" b="1" i="0">
+                <a:solidFill>
+                  <a:srgbClr val="FFFFFF"/>
+                </a:solidFill>
+                <a:latin typeface="Open Sans"/>
+              </a:rPr>
+              <a:t>Art. 6</a:t>
+            </a:r>
+          </a:p>
+        </p:txBody>
+      </p:sp>
+      <p:sp>
+        <p:nvSpPr>
+          <p:cNvPr id="8" name="TextBox 7"/>
+          <p:cNvSpPr txBox="1"/>
+          <p:nvPr/>
+        </p:nvSpPr>
+        <p:spPr>
+          <a:xfrm>
+            <a:off x="2697480" y="1709928"/>
+            <a:ext cx="3657600" cy="457200"/>
           </a:xfrm>
           <a:prstGeom prst="rect">
             <a:avLst/>
@@ -8676,105 +8784,14 @@
               </a:spcAft>
             </a:pPr>
             <a:r>
-              <a:rPr sz="2200" b="1" i="0">
+              <a:rPr sz="1500" b="1" i="0">
                 <a:solidFill>
                   <a:srgbClr val="2D7A3D"/>
                 </a:solidFill>
                 <a:latin typeface="Open Sans"/>
               </a:rPr>
-              <a:t>Específico</a:t>
-            </a:r>
-          </a:p>
-        </p:txBody>
-      </p:sp>
-      <p:sp>
-        <p:nvSpPr>
-          <p:cNvPr id="7" name="TextBox 6"/>
-          <p:cNvSpPr txBox="1"/>
-          <p:nvPr/>
-        </p:nvSpPr>
-        <p:spPr>
-          <a:xfrm>
-            <a:off x="777240" y="2377440"/>
-            <a:ext cx="4754880" cy="1371600"/>
-          </a:xfrm>
-          <a:prstGeom prst="rect">
-            <a:avLst/>
-          </a:prstGeom>
-          <a:noFill/>
-        </p:spPr>
-        <p:txBody>
-          <a:bodyPr wrap="square" anchor="t" lIns="0" rIns="0" tIns="0" bIns="0">
-            <a:spAutoFit/>
-          </a:bodyPr>
-          <a:lstStyle/>
-          <a:p>
-            <a:pPr algn="l">
-              <a:lnSpc>
-                <a:spcPct val="110000"/>
-              </a:lnSpc>
-              <a:spcBef>
-                <a:spcPts val="0"/>
-              </a:spcBef>
-              <a:spcAft>
-                <a:spcPts val="600"/>
-              </a:spcAft>
-            </a:pPr>
-            <a:r>
-              <a:rPr sz="1500" b="0" i="0">
-                <a:solidFill>
-                  <a:srgbClr val="212121"/>
-                </a:solidFill>
-                <a:latin typeface="Open Sans"/>
-              </a:rPr>
-              <a:t>sem ambiguidade — evite 'ser seguro'</a:t>
-            </a:r>
-          </a:p>
-        </p:txBody>
-      </p:sp>
-      <p:sp>
-        <p:nvSpPr>
-          <p:cNvPr id="8" name="Rounded Rectangle 7"/>
-          <p:cNvSpPr/>
-          <p:nvPr/>
-        </p:nvSpPr>
-        <p:spPr>
-          <a:xfrm>
-            <a:off x="6309360" y="1463040"/>
-            <a:ext cx="5468112" cy="2423160"/>
-          </a:xfrm>
-          <a:prstGeom prst="roundRect">
-            <a:avLst/>
-          </a:prstGeom>
-          <a:solidFill>
-            <a:srgbClr val="F5F5F5"/>
-          </a:solidFill>
-          <a:ln w="19050">
-            <a:solidFill>
-              <a:srgbClr val="2D7A3D"/>
-            </a:solidFill>
-          </a:ln>
-          <a:effectLst/>
-        </p:spPr>
-        <p:style>
-          <a:lnRef idx="1">
-            <a:schemeClr val="accent1"/>
-          </a:lnRef>
-          <a:fillRef idx="3">
-            <a:schemeClr val="accent1"/>
-          </a:fillRef>
-          <a:effectRef idx="2">
-            <a:schemeClr val="accent1"/>
-          </a:effectRef>
-          <a:fontRef idx="minor">
-            <a:schemeClr val="lt1"/>
-          </a:fontRef>
-        </p:style>
-        <p:txBody>
-          <a:bodyPr rtlCol="0" anchor="ctr"/>
-          <a:lstStyle/>
-          <a:p>
-            <a:pPr algn="ctr"/>
+              <a:t>Princípios</a:t>
+            </a:r>
           </a:p>
         </p:txBody>
       </p:sp>
@@ -8786,8 +8803,8 @@
         </p:nvSpPr>
         <p:spPr>
           <a:xfrm>
-            <a:off x="6675120" y="1737360"/>
-            <a:ext cx="4754880" cy="548640"/>
+            <a:off x="6492240" y="1728216"/>
+            <a:ext cx="5120640" cy="457200"/>
           </a:xfrm>
           <a:prstGeom prst="rect">
             <a:avLst/>
@@ -8812,27 +8829,117 @@
               </a:spcAft>
             </a:pPr>
             <a:r>
-              <a:rPr sz="2200" b="1" i="0">
-                <a:solidFill>
-                  <a:srgbClr val="2D7A3D"/>
-                </a:solidFill>
-                <a:latin typeface="Open Sans"/>
-              </a:rPr>
-              <a:t>Mensurável</a:t>
-            </a:r>
-          </a:p>
-        </p:txBody>
-      </p:sp>
-      <p:sp>
-        <p:nvSpPr>
-          <p:cNvPr id="10" name="TextBox 9"/>
+              <a:rPr sz="1300" b="0" i="0">
+                <a:solidFill>
+                  <a:srgbClr val="212121"/>
+                </a:solidFill>
+                <a:latin typeface="Open Sans"/>
+              </a:rPr>
+              <a:t>finalidade, minimização, segurança, accountability</a:t>
+            </a:r>
+          </a:p>
+        </p:txBody>
+      </p:sp>
+      <p:sp>
+        <p:nvSpPr>
+          <p:cNvPr id="10" name="Rounded Rectangle 9"/>
+          <p:cNvSpPr/>
+          <p:nvPr/>
+        </p:nvSpPr>
+        <p:spPr>
+          <a:xfrm>
+            <a:off x="411480" y="2313432"/>
+            <a:ext cx="11384280" cy="749808"/>
+          </a:xfrm>
+          <a:prstGeom prst="roundRect">
+            <a:avLst/>
+          </a:prstGeom>
+          <a:solidFill>
+            <a:srgbClr val="E8F0DB"/>
+          </a:solidFill>
+          <a:ln w="12700">
+            <a:solidFill>
+              <a:srgbClr val="7CB342"/>
+            </a:solidFill>
+          </a:ln>
+          <a:effectLst/>
+        </p:spPr>
+        <p:style>
+          <a:lnRef idx="1">
+            <a:schemeClr val="accent1"/>
+          </a:lnRef>
+          <a:fillRef idx="3">
+            <a:schemeClr val="accent1"/>
+          </a:fillRef>
+          <a:effectRef idx="2">
+            <a:schemeClr val="accent1"/>
+          </a:effectRef>
+          <a:fontRef idx="minor">
+            <a:schemeClr val="lt1"/>
+          </a:fontRef>
+        </p:style>
+        <p:txBody>
+          <a:bodyPr rtlCol="0" anchor="ctr"/>
+          <a:lstStyle/>
+          <a:p>
+            <a:pPr algn="ctr"/>
+          </a:p>
+        </p:txBody>
+      </p:sp>
+      <p:sp>
+        <p:nvSpPr>
+          <p:cNvPr id="11" name="Rounded Rectangle 10"/>
+          <p:cNvSpPr/>
+          <p:nvPr/>
+        </p:nvSpPr>
+        <p:spPr>
+          <a:xfrm>
+            <a:off x="502920" y="2404872"/>
+            <a:ext cx="1920240" cy="566927"/>
+          </a:xfrm>
+          <a:prstGeom prst="roundRect">
+            <a:avLst/>
+          </a:prstGeom>
+          <a:solidFill>
+            <a:srgbClr val="2D7A3D"/>
+          </a:solidFill>
+          <a:ln>
+            <a:noFill/>
+          </a:ln>
+          <a:effectLst/>
+        </p:spPr>
+        <p:style>
+          <a:lnRef idx="1">
+            <a:schemeClr val="accent1"/>
+          </a:lnRef>
+          <a:fillRef idx="3">
+            <a:schemeClr val="accent1"/>
+          </a:fillRef>
+          <a:effectRef idx="2">
+            <a:schemeClr val="accent1"/>
+          </a:effectRef>
+          <a:fontRef idx="minor">
+            <a:schemeClr val="lt1"/>
+          </a:fontRef>
+        </p:style>
+        <p:txBody>
+          <a:bodyPr rtlCol="0" anchor="ctr"/>
+          <a:lstStyle/>
+          <a:p>
+            <a:pPr algn="ctr"/>
+          </a:p>
+        </p:txBody>
+      </p:sp>
+      <p:sp>
+        <p:nvSpPr>
+          <p:cNvPr id="12" name="TextBox 11"/>
           <p:cNvSpPr txBox="1"/>
           <p:nvPr/>
         </p:nvSpPr>
         <p:spPr>
           <a:xfrm>
-            <a:off x="6675120" y="2377440"/>
-            <a:ext cx="4754880" cy="1371600"/>
+            <a:off x="502920" y="2514600"/>
+            <a:ext cx="1920240" cy="457200"/>
           </a:xfrm>
           <a:prstGeom prst="rect">
             <a:avLst/>
@@ -8845,9 +8952,9 @@
           </a:bodyPr>
           <a:lstStyle/>
           <a:p>
-            <a:pPr algn="l">
+            <a:pPr algn="ctr">
               <a:lnSpc>
-                <a:spcPct val="110000"/>
+                <a:spcPct val="100000"/>
               </a:lnSpc>
               <a:spcBef>
                 <a:spcPts val="0"/>
@@ -8857,73 +8964,27 @@
               </a:spcAft>
             </a:pPr>
             <a:r>
-              <a:rPr sz="1500" b="0" i="0">
-                <a:solidFill>
-                  <a:srgbClr val="212121"/>
-                </a:solidFill>
-                <a:latin typeface="Open Sans"/>
-              </a:rPr>
-              <a:t>verificável por teste</a:t>
-            </a:r>
-          </a:p>
-        </p:txBody>
-      </p:sp>
-      <p:sp>
-        <p:nvSpPr>
-          <p:cNvPr id="11" name="Rounded Rectangle 10"/>
-          <p:cNvSpPr/>
-          <p:nvPr/>
-        </p:nvSpPr>
-        <p:spPr>
-          <a:xfrm>
-            <a:off x="411480" y="4069080"/>
-            <a:ext cx="5468112" cy="2423160"/>
-          </a:xfrm>
-          <a:prstGeom prst="roundRect">
-            <a:avLst/>
-          </a:prstGeom>
-          <a:solidFill>
-            <a:srgbClr val="F5F5F5"/>
-          </a:solidFill>
-          <a:ln w="19050">
-            <a:solidFill>
-              <a:srgbClr val="1976D2"/>
-            </a:solidFill>
-          </a:ln>
-          <a:effectLst/>
-        </p:spPr>
-        <p:style>
-          <a:lnRef idx="1">
-            <a:schemeClr val="accent1"/>
-          </a:lnRef>
-          <a:fillRef idx="3">
-            <a:schemeClr val="accent1"/>
-          </a:fillRef>
-          <a:effectRef idx="2">
-            <a:schemeClr val="accent1"/>
-          </a:effectRef>
-          <a:fontRef idx="minor">
-            <a:schemeClr val="lt1"/>
-          </a:fontRef>
-        </p:style>
-        <p:txBody>
-          <a:bodyPr rtlCol="0" anchor="ctr"/>
-          <a:lstStyle/>
-          <a:p>
-            <a:pPr algn="ctr"/>
-          </a:p>
-        </p:txBody>
-      </p:sp>
-      <p:sp>
-        <p:nvSpPr>
-          <p:cNvPr id="12" name="TextBox 11"/>
+              <a:rPr sz="1800" b="1" i="0">
+                <a:solidFill>
+                  <a:srgbClr val="FFFFFF"/>
+                </a:solidFill>
+                <a:latin typeface="Open Sans"/>
+              </a:rPr>
+              <a:t>Art. 7/11</a:t>
+            </a:r>
+          </a:p>
+        </p:txBody>
+      </p:sp>
+      <p:sp>
+        <p:nvSpPr>
+          <p:cNvPr id="13" name="TextBox 12"/>
           <p:cNvSpPr txBox="1"/>
           <p:nvPr/>
         </p:nvSpPr>
         <p:spPr>
           <a:xfrm>
-            <a:off x="777240" y="4343400"/>
-            <a:ext cx="4754880" cy="548640"/>
+            <a:off x="2697480" y="2514600"/>
+            <a:ext cx="3657600" cy="457200"/>
           </a:xfrm>
           <a:prstGeom prst="rect">
             <a:avLst/>
@@ -8948,118 +9009,27 @@
               </a:spcAft>
             </a:pPr>
             <a:r>
-              <a:rPr sz="2200" b="1" i="0">
-                <a:solidFill>
-                  <a:srgbClr val="1976D2"/>
-                </a:solidFill>
-                <a:latin typeface="Open Sans"/>
-              </a:rPr>
-              <a:t>Rastreável</a:t>
-            </a:r>
-          </a:p>
-        </p:txBody>
-      </p:sp>
-      <p:sp>
-        <p:nvSpPr>
-          <p:cNvPr id="13" name="TextBox 12"/>
+              <a:rPr sz="1500" b="1" i="0">
+                <a:solidFill>
+                  <a:srgbClr val="2D7A3D"/>
+                </a:solidFill>
+                <a:latin typeface="Open Sans"/>
+              </a:rPr>
+              <a:t>Bases legais</a:t>
+            </a:r>
+          </a:p>
+        </p:txBody>
+      </p:sp>
+      <p:sp>
+        <p:nvSpPr>
+          <p:cNvPr id="14" name="TextBox 13"/>
           <p:cNvSpPr txBox="1"/>
           <p:nvPr/>
         </p:nvSpPr>
         <p:spPr>
           <a:xfrm>
-            <a:off x="777240" y="4983480"/>
-            <a:ext cx="4754880" cy="1371600"/>
-          </a:xfrm>
-          <a:prstGeom prst="rect">
-            <a:avLst/>
-          </a:prstGeom>
-          <a:noFill/>
-        </p:spPr>
-        <p:txBody>
-          <a:bodyPr wrap="square" anchor="t" lIns="0" rIns="0" tIns="0" bIns="0">
-            <a:spAutoFit/>
-          </a:bodyPr>
-          <a:lstStyle/>
-          <a:p>
-            <a:pPr algn="l">
-              <a:lnSpc>
-                <a:spcPct val="110000"/>
-              </a:lnSpc>
-              <a:spcBef>
-                <a:spcPts val="0"/>
-              </a:spcBef>
-              <a:spcAft>
-                <a:spcPts val="600"/>
-              </a:spcAft>
-            </a:pPr>
-            <a:r>
-              <a:rPr sz="1500" b="0" i="0">
-                <a:solidFill>
-                  <a:srgbClr val="212121"/>
-                </a:solidFill>
-                <a:latin typeface="Open Sans"/>
-              </a:rPr>
-              <a:t>ligado a ativo, ameaça e fonte</a:t>
-            </a:r>
-          </a:p>
-        </p:txBody>
-      </p:sp>
-      <p:sp>
-        <p:nvSpPr>
-          <p:cNvPr id="14" name="Rounded Rectangle 13"/>
-          <p:cNvSpPr/>
-          <p:nvPr/>
-        </p:nvSpPr>
-        <p:spPr>
-          <a:xfrm>
-            <a:off x="6309360" y="4069080"/>
-            <a:ext cx="5468112" cy="2423160"/>
-          </a:xfrm>
-          <a:prstGeom prst="roundRect">
-            <a:avLst/>
-          </a:prstGeom>
-          <a:solidFill>
-            <a:srgbClr val="F5F5F5"/>
-          </a:solidFill>
-          <a:ln w="19050">
-            <a:solidFill>
-              <a:srgbClr val="E65100"/>
-            </a:solidFill>
-          </a:ln>
-          <a:effectLst/>
-        </p:spPr>
-        <p:style>
-          <a:lnRef idx="1">
-            <a:schemeClr val="accent1"/>
-          </a:lnRef>
-          <a:fillRef idx="3">
-            <a:schemeClr val="accent1"/>
-          </a:fillRef>
-          <a:effectRef idx="2">
-            <a:schemeClr val="accent1"/>
-          </a:effectRef>
-          <a:fontRef idx="minor">
-            <a:schemeClr val="lt1"/>
-          </a:fontRef>
-        </p:style>
-        <p:txBody>
-          <a:bodyPr rtlCol="0" anchor="ctr"/>
-          <a:lstStyle/>
-          <a:p>
-            <a:pPr algn="ctr"/>
-          </a:p>
-        </p:txBody>
-      </p:sp>
-      <p:sp>
-        <p:nvSpPr>
-          <p:cNvPr id="15" name="TextBox 14"/>
-          <p:cNvSpPr txBox="1"/>
-          <p:nvPr/>
-        </p:nvSpPr>
-        <p:spPr>
-          <a:xfrm>
-            <a:off x="6675120" y="4343400"/>
-            <a:ext cx="4754880" cy="548640"/>
+            <a:off x="6492240" y="2532887"/>
+            <a:ext cx="5120640" cy="457200"/>
           </a:xfrm>
           <a:prstGeom prst="rect">
             <a:avLst/>
@@ -9084,27 +9054,117 @@
               </a:spcAft>
             </a:pPr>
             <a:r>
-              <a:rPr sz="2200" b="1" i="0">
-                <a:solidFill>
-                  <a:srgbClr val="E65100"/>
-                </a:solidFill>
-                <a:latin typeface="Open Sans"/>
-              </a:rPr>
-              <a:t>Ruim -&gt; Bom</a:t>
-            </a:r>
-          </a:p>
-        </p:txBody>
-      </p:sp>
-      <p:sp>
-        <p:nvSpPr>
-          <p:cNvPr id="16" name="TextBox 15"/>
+              <a:rPr sz="1300" b="0" i="0">
+                <a:solidFill>
+                  <a:srgbClr val="212121"/>
+                </a:solidFill>
+                <a:latin typeface="Open Sans"/>
+              </a:rPr>
+              <a:t>dados de saúde = sensíveis -&gt; regime reforçado</a:t>
+            </a:r>
+          </a:p>
+        </p:txBody>
+      </p:sp>
+      <p:sp>
+        <p:nvSpPr>
+          <p:cNvPr id="15" name="Rounded Rectangle 14"/>
+          <p:cNvSpPr/>
+          <p:nvPr/>
+        </p:nvSpPr>
+        <p:spPr>
+          <a:xfrm>
+            <a:off x="411480" y="3118103"/>
+            <a:ext cx="11384280" cy="749808"/>
+          </a:xfrm>
+          <a:prstGeom prst="roundRect">
+            <a:avLst/>
+          </a:prstGeom>
+          <a:solidFill>
+            <a:srgbClr val="E8F0DB"/>
+          </a:solidFill>
+          <a:ln w="12700">
+            <a:solidFill>
+              <a:srgbClr val="7CB342"/>
+            </a:solidFill>
+          </a:ln>
+          <a:effectLst/>
+        </p:spPr>
+        <p:style>
+          <a:lnRef idx="1">
+            <a:schemeClr val="accent1"/>
+          </a:lnRef>
+          <a:fillRef idx="3">
+            <a:schemeClr val="accent1"/>
+          </a:fillRef>
+          <a:effectRef idx="2">
+            <a:schemeClr val="accent1"/>
+          </a:effectRef>
+          <a:fontRef idx="minor">
+            <a:schemeClr val="lt1"/>
+          </a:fontRef>
+        </p:style>
+        <p:txBody>
+          <a:bodyPr rtlCol="0" anchor="ctr"/>
+          <a:lstStyle/>
+          <a:p>
+            <a:pPr algn="ctr"/>
+          </a:p>
+        </p:txBody>
+      </p:sp>
+      <p:sp>
+        <p:nvSpPr>
+          <p:cNvPr id="16" name="Rounded Rectangle 15"/>
+          <p:cNvSpPr/>
+          <p:nvPr/>
+        </p:nvSpPr>
+        <p:spPr>
+          <a:xfrm>
+            <a:off x="502920" y="3209544"/>
+            <a:ext cx="1920240" cy="566927"/>
+          </a:xfrm>
+          <a:prstGeom prst="roundRect">
+            <a:avLst/>
+          </a:prstGeom>
+          <a:solidFill>
+            <a:srgbClr val="2D7A3D"/>
+          </a:solidFill>
+          <a:ln>
+            <a:noFill/>
+          </a:ln>
+          <a:effectLst/>
+        </p:spPr>
+        <p:style>
+          <a:lnRef idx="1">
+            <a:schemeClr val="accent1"/>
+          </a:lnRef>
+          <a:fillRef idx="3">
+            <a:schemeClr val="accent1"/>
+          </a:fillRef>
+          <a:effectRef idx="2">
+            <a:schemeClr val="accent1"/>
+          </a:effectRef>
+          <a:fontRef idx="minor">
+            <a:schemeClr val="lt1"/>
+          </a:fontRef>
+        </p:style>
+        <p:txBody>
+          <a:bodyPr rtlCol="0" anchor="ctr"/>
+          <a:lstStyle/>
+          <a:p>
+            <a:pPr algn="ctr"/>
+          </a:p>
+        </p:txBody>
+      </p:sp>
+      <p:sp>
+        <p:nvSpPr>
+          <p:cNvPr id="17" name="TextBox 16"/>
           <p:cNvSpPr txBox="1"/>
           <p:nvPr/>
         </p:nvSpPr>
         <p:spPr>
           <a:xfrm>
-            <a:off x="6675120" y="4983480"/>
-            <a:ext cx="4754880" cy="1371600"/>
+            <a:off x="502920" y="3319272"/>
+            <a:ext cx="1920240" cy="457200"/>
           </a:xfrm>
           <a:prstGeom prst="rect">
             <a:avLst/>
@@ -9117,9 +9177,9 @@
           </a:bodyPr>
           <a:lstStyle/>
           <a:p>
-            <a:pPr algn="l">
+            <a:pPr algn="ctr">
               <a:lnSpc>
-                <a:spcPct val="110000"/>
+                <a:spcPct val="100000"/>
               </a:lnSpc>
               <a:spcBef>
                 <a:spcPts val="0"/>
@@ -9129,20 +9189,785 @@
               </a:spcAft>
             </a:pPr>
             <a:r>
-              <a:rPr sz="1500" b="0" i="0">
+              <a:rPr sz="1800" b="1" i="0">
+                <a:solidFill>
+                  <a:srgbClr val="FFFFFF"/>
+                </a:solidFill>
+                <a:latin typeface="Open Sans"/>
+              </a:rPr>
+              <a:t>Art. 18</a:t>
+            </a:r>
+          </a:p>
+        </p:txBody>
+      </p:sp>
+      <p:sp>
+        <p:nvSpPr>
+          <p:cNvPr id="18" name="TextBox 17"/>
+          <p:cNvSpPr txBox="1"/>
+          <p:nvPr/>
+        </p:nvSpPr>
+        <p:spPr>
+          <a:xfrm>
+            <a:off x="2697480" y="3319272"/>
+            <a:ext cx="3657600" cy="457200"/>
+          </a:xfrm>
+          <a:prstGeom prst="rect">
+            <a:avLst/>
+          </a:prstGeom>
+          <a:noFill/>
+        </p:spPr>
+        <p:txBody>
+          <a:bodyPr wrap="square" anchor="t" lIns="0" rIns="0" tIns="0" bIns="0">
+            <a:spAutoFit/>
+          </a:bodyPr>
+          <a:lstStyle/>
+          <a:p>
+            <a:pPr algn="l">
+              <a:lnSpc>
+                <a:spcPct val="100000"/>
+              </a:lnSpc>
+              <a:spcBef>
+                <a:spcPts val="0"/>
+              </a:spcBef>
+              <a:spcAft>
+                <a:spcPts val="600"/>
+              </a:spcAft>
+            </a:pPr>
+            <a:r>
+              <a:rPr sz="1500" b="1" i="0">
+                <a:solidFill>
+                  <a:srgbClr val="2D7A3D"/>
+                </a:solidFill>
+                <a:latin typeface="Open Sans"/>
+              </a:rPr>
+              <a:t>Direitos do titular</a:t>
+            </a:r>
+          </a:p>
+        </p:txBody>
+      </p:sp>
+      <p:sp>
+        <p:nvSpPr>
+          <p:cNvPr id="19" name="TextBox 18"/>
+          <p:cNvSpPr txBox="1"/>
+          <p:nvPr/>
+        </p:nvSpPr>
+        <p:spPr>
+          <a:xfrm>
+            <a:off x="6492240" y="3337559"/>
+            <a:ext cx="5120640" cy="457200"/>
+          </a:xfrm>
+          <a:prstGeom prst="rect">
+            <a:avLst/>
+          </a:prstGeom>
+          <a:noFill/>
+        </p:spPr>
+        <p:txBody>
+          <a:bodyPr wrap="square" anchor="t" lIns="0" rIns="0" tIns="0" bIns="0">
+            <a:spAutoFit/>
+          </a:bodyPr>
+          <a:lstStyle/>
+          <a:p>
+            <a:pPr algn="l">
+              <a:lnSpc>
+                <a:spcPct val="100000"/>
+              </a:lnSpc>
+              <a:spcBef>
+                <a:spcPts val="0"/>
+              </a:spcBef>
+              <a:spcAft>
+                <a:spcPts val="600"/>
+              </a:spcAft>
+            </a:pPr>
+            <a:r>
+              <a:rPr sz="1300" b="0" i="0">
                 <a:solidFill>
                   <a:srgbClr val="212121"/>
                 </a:solidFill>
                 <a:latin typeface="Open Sans"/>
               </a:rPr>
-              <a:t>'proteger senhas' -&gt; 'Argon2id, salt 16B, MD5 proibido'</a:t>
-            </a:r>
-          </a:p>
-        </p:txBody>
-      </p:sp>
-      <p:sp>
-        <p:nvSpPr>
-          <p:cNvPr id="17" name="TextBox 16"/>
+              <a:t>acesso, portabilidade, eliminação</a:t>
+            </a:r>
+          </a:p>
+        </p:txBody>
+      </p:sp>
+      <p:sp>
+        <p:nvSpPr>
+          <p:cNvPr id="20" name="Rounded Rectangle 19"/>
+          <p:cNvSpPr/>
+          <p:nvPr/>
+        </p:nvSpPr>
+        <p:spPr>
+          <a:xfrm>
+            <a:off x="411480" y="3922775"/>
+            <a:ext cx="11384280" cy="749808"/>
+          </a:xfrm>
+          <a:prstGeom prst="roundRect">
+            <a:avLst/>
+          </a:prstGeom>
+          <a:solidFill>
+            <a:srgbClr val="E8F0DB"/>
+          </a:solidFill>
+          <a:ln w="12700">
+            <a:solidFill>
+              <a:srgbClr val="7CB342"/>
+            </a:solidFill>
+          </a:ln>
+          <a:effectLst/>
+        </p:spPr>
+        <p:style>
+          <a:lnRef idx="1">
+            <a:schemeClr val="accent1"/>
+          </a:lnRef>
+          <a:fillRef idx="3">
+            <a:schemeClr val="accent1"/>
+          </a:fillRef>
+          <a:effectRef idx="2">
+            <a:schemeClr val="accent1"/>
+          </a:effectRef>
+          <a:fontRef idx="minor">
+            <a:schemeClr val="lt1"/>
+          </a:fontRef>
+        </p:style>
+        <p:txBody>
+          <a:bodyPr rtlCol="0" anchor="ctr"/>
+          <a:lstStyle/>
+          <a:p>
+            <a:pPr algn="ctr"/>
+          </a:p>
+        </p:txBody>
+      </p:sp>
+      <p:sp>
+        <p:nvSpPr>
+          <p:cNvPr id="21" name="Rounded Rectangle 20"/>
+          <p:cNvSpPr/>
+          <p:nvPr/>
+        </p:nvSpPr>
+        <p:spPr>
+          <a:xfrm>
+            <a:off x="502920" y="4014215"/>
+            <a:ext cx="1920240" cy="566927"/>
+          </a:xfrm>
+          <a:prstGeom prst="roundRect">
+            <a:avLst/>
+          </a:prstGeom>
+          <a:solidFill>
+            <a:srgbClr val="2D7A3D"/>
+          </a:solidFill>
+          <a:ln>
+            <a:noFill/>
+          </a:ln>
+          <a:effectLst/>
+        </p:spPr>
+        <p:style>
+          <a:lnRef idx="1">
+            <a:schemeClr val="accent1"/>
+          </a:lnRef>
+          <a:fillRef idx="3">
+            <a:schemeClr val="accent1"/>
+          </a:fillRef>
+          <a:effectRef idx="2">
+            <a:schemeClr val="accent1"/>
+          </a:effectRef>
+          <a:fontRef idx="minor">
+            <a:schemeClr val="lt1"/>
+          </a:fontRef>
+        </p:style>
+        <p:txBody>
+          <a:bodyPr rtlCol="0" anchor="ctr"/>
+          <a:lstStyle/>
+          <a:p>
+            <a:pPr algn="ctr"/>
+          </a:p>
+        </p:txBody>
+      </p:sp>
+      <p:sp>
+        <p:nvSpPr>
+          <p:cNvPr id="22" name="TextBox 21"/>
+          <p:cNvSpPr txBox="1"/>
+          <p:nvPr/>
+        </p:nvSpPr>
+        <p:spPr>
+          <a:xfrm>
+            <a:off x="502920" y="4123943"/>
+            <a:ext cx="1920240" cy="457200"/>
+          </a:xfrm>
+          <a:prstGeom prst="rect">
+            <a:avLst/>
+          </a:prstGeom>
+          <a:noFill/>
+        </p:spPr>
+        <p:txBody>
+          <a:bodyPr wrap="square" anchor="t" lIns="0" rIns="0" tIns="0" bIns="0">
+            <a:spAutoFit/>
+          </a:bodyPr>
+          <a:lstStyle/>
+          <a:p>
+            <a:pPr algn="ctr">
+              <a:lnSpc>
+                <a:spcPct val="100000"/>
+              </a:lnSpc>
+              <a:spcBef>
+                <a:spcPts val="0"/>
+              </a:spcBef>
+              <a:spcAft>
+                <a:spcPts val="600"/>
+              </a:spcAft>
+            </a:pPr>
+            <a:r>
+              <a:rPr sz="1800" b="1" i="0">
+                <a:solidFill>
+                  <a:srgbClr val="FFFFFF"/>
+                </a:solidFill>
+                <a:latin typeface="Open Sans"/>
+              </a:rPr>
+              <a:t>Art. 8/9</a:t>
+            </a:r>
+          </a:p>
+        </p:txBody>
+      </p:sp>
+      <p:sp>
+        <p:nvSpPr>
+          <p:cNvPr id="23" name="TextBox 22"/>
+          <p:cNvSpPr txBox="1"/>
+          <p:nvPr/>
+        </p:nvSpPr>
+        <p:spPr>
+          <a:xfrm>
+            <a:off x="2697480" y="4123943"/>
+            <a:ext cx="3657600" cy="457200"/>
+          </a:xfrm>
+          <a:prstGeom prst="rect">
+            <a:avLst/>
+          </a:prstGeom>
+          <a:noFill/>
+        </p:spPr>
+        <p:txBody>
+          <a:bodyPr wrap="square" anchor="t" lIns="0" rIns="0" tIns="0" bIns="0">
+            <a:spAutoFit/>
+          </a:bodyPr>
+          <a:lstStyle/>
+          <a:p>
+            <a:pPr algn="l">
+              <a:lnSpc>
+                <a:spcPct val="100000"/>
+              </a:lnSpc>
+              <a:spcBef>
+                <a:spcPts val="0"/>
+              </a:spcBef>
+              <a:spcAft>
+                <a:spcPts val="600"/>
+              </a:spcAft>
+            </a:pPr>
+            <a:r>
+              <a:rPr sz="1500" b="1" i="0">
+                <a:solidFill>
+                  <a:srgbClr val="2D7A3D"/>
+                </a:solidFill>
+                <a:latin typeface="Open Sans"/>
+              </a:rPr>
+              <a:t>Consentimento</a:t>
+            </a:r>
+          </a:p>
+        </p:txBody>
+      </p:sp>
+      <p:sp>
+        <p:nvSpPr>
+          <p:cNvPr id="24" name="TextBox 23"/>
+          <p:cNvSpPr txBox="1"/>
+          <p:nvPr/>
+        </p:nvSpPr>
+        <p:spPr>
+          <a:xfrm>
+            <a:off x="6492240" y="4142231"/>
+            <a:ext cx="5120640" cy="457200"/>
+          </a:xfrm>
+          <a:prstGeom prst="rect">
+            <a:avLst/>
+          </a:prstGeom>
+          <a:noFill/>
+        </p:spPr>
+        <p:txBody>
+          <a:bodyPr wrap="square" anchor="t" lIns="0" rIns="0" tIns="0" bIns="0">
+            <a:spAutoFit/>
+          </a:bodyPr>
+          <a:lstStyle/>
+          <a:p>
+            <a:pPr algn="l">
+              <a:lnSpc>
+                <a:spcPct val="100000"/>
+              </a:lnSpc>
+              <a:spcBef>
+                <a:spcPts val="0"/>
+              </a:spcBef>
+              <a:spcAft>
+                <a:spcPts val="600"/>
+              </a:spcAft>
+            </a:pPr>
+            <a:r>
+              <a:rPr sz="1300" b="0" i="0">
+                <a:solidFill>
+                  <a:srgbClr val="212121"/>
+                </a:solidFill>
+                <a:latin typeface="Open Sans"/>
+              </a:rPr>
+              <a:t>específico, versionado, revogável</a:t>
+            </a:r>
+          </a:p>
+        </p:txBody>
+      </p:sp>
+      <p:sp>
+        <p:nvSpPr>
+          <p:cNvPr id="25" name="Rounded Rectangle 24"/>
+          <p:cNvSpPr/>
+          <p:nvPr/>
+        </p:nvSpPr>
+        <p:spPr>
+          <a:xfrm>
+            <a:off x="411480" y="4727448"/>
+            <a:ext cx="11384280" cy="749808"/>
+          </a:xfrm>
+          <a:prstGeom prst="roundRect">
+            <a:avLst/>
+          </a:prstGeom>
+          <a:solidFill>
+            <a:srgbClr val="E8F0DB"/>
+          </a:solidFill>
+          <a:ln w="12700">
+            <a:solidFill>
+              <a:srgbClr val="7CB342"/>
+            </a:solidFill>
+          </a:ln>
+          <a:effectLst/>
+        </p:spPr>
+        <p:style>
+          <a:lnRef idx="1">
+            <a:schemeClr val="accent1"/>
+          </a:lnRef>
+          <a:fillRef idx="3">
+            <a:schemeClr val="accent1"/>
+          </a:fillRef>
+          <a:effectRef idx="2">
+            <a:schemeClr val="accent1"/>
+          </a:effectRef>
+          <a:fontRef idx="minor">
+            <a:schemeClr val="lt1"/>
+          </a:fontRef>
+        </p:style>
+        <p:txBody>
+          <a:bodyPr rtlCol="0" anchor="ctr"/>
+          <a:lstStyle/>
+          <a:p>
+            <a:pPr algn="ctr"/>
+          </a:p>
+        </p:txBody>
+      </p:sp>
+      <p:sp>
+        <p:nvSpPr>
+          <p:cNvPr id="26" name="Rounded Rectangle 25"/>
+          <p:cNvSpPr/>
+          <p:nvPr/>
+        </p:nvSpPr>
+        <p:spPr>
+          <a:xfrm>
+            <a:off x="502920" y="4818888"/>
+            <a:ext cx="1920240" cy="566927"/>
+          </a:xfrm>
+          <a:prstGeom prst="roundRect">
+            <a:avLst/>
+          </a:prstGeom>
+          <a:solidFill>
+            <a:srgbClr val="2D7A3D"/>
+          </a:solidFill>
+          <a:ln>
+            <a:noFill/>
+          </a:ln>
+          <a:effectLst/>
+        </p:spPr>
+        <p:style>
+          <a:lnRef idx="1">
+            <a:schemeClr val="accent1"/>
+          </a:lnRef>
+          <a:fillRef idx="3">
+            <a:schemeClr val="accent1"/>
+          </a:fillRef>
+          <a:effectRef idx="2">
+            <a:schemeClr val="accent1"/>
+          </a:effectRef>
+          <a:fontRef idx="minor">
+            <a:schemeClr val="lt1"/>
+          </a:fontRef>
+        </p:style>
+        <p:txBody>
+          <a:bodyPr rtlCol="0" anchor="ctr"/>
+          <a:lstStyle/>
+          <a:p>
+            <a:pPr algn="ctr"/>
+          </a:p>
+        </p:txBody>
+      </p:sp>
+      <p:sp>
+        <p:nvSpPr>
+          <p:cNvPr id="27" name="TextBox 26"/>
+          <p:cNvSpPr txBox="1"/>
+          <p:nvPr/>
+        </p:nvSpPr>
+        <p:spPr>
+          <a:xfrm>
+            <a:off x="502920" y="4928616"/>
+            <a:ext cx="1920240" cy="457200"/>
+          </a:xfrm>
+          <a:prstGeom prst="rect">
+            <a:avLst/>
+          </a:prstGeom>
+          <a:noFill/>
+        </p:spPr>
+        <p:txBody>
+          <a:bodyPr wrap="square" anchor="t" lIns="0" rIns="0" tIns="0" bIns="0">
+            <a:spAutoFit/>
+          </a:bodyPr>
+          <a:lstStyle/>
+          <a:p>
+            <a:pPr algn="ctr">
+              <a:lnSpc>
+                <a:spcPct val="100000"/>
+              </a:lnSpc>
+              <a:spcBef>
+                <a:spcPts val="0"/>
+              </a:spcBef>
+              <a:spcAft>
+                <a:spcPts val="600"/>
+              </a:spcAft>
+            </a:pPr>
+            <a:r>
+              <a:rPr sz="1800" b="1" i="0">
+                <a:solidFill>
+                  <a:srgbClr val="FFFFFF"/>
+                </a:solidFill>
+                <a:latin typeface="Open Sans"/>
+              </a:rPr>
+              <a:t>Art. 46</a:t>
+            </a:r>
+          </a:p>
+        </p:txBody>
+      </p:sp>
+      <p:sp>
+        <p:nvSpPr>
+          <p:cNvPr id="28" name="TextBox 27"/>
+          <p:cNvSpPr txBox="1"/>
+          <p:nvPr/>
+        </p:nvSpPr>
+        <p:spPr>
+          <a:xfrm>
+            <a:off x="2697480" y="4928616"/>
+            <a:ext cx="3657600" cy="457200"/>
+          </a:xfrm>
+          <a:prstGeom prst="rect">
+            <a:avLst/>
+          </a:prstGeom>
+          <a:noFill/>
+        </p:spPr>
+        <p:txBody>
+          <a:bodyPr wrap="square" anchor="t" lIns="0" rIns="0" tIns="0" bIns="0">
+            <a:spAutoFit/>
+          </a:bodyPr>
+          <a:lstStyle/>
+          <a:p>
+            <a:pPr algn="l">
+              <a:lnSpc>
+                <a:spcPct val="100000"/>
+              </a:lnSpc>
+              <a:spcBef>
+                <a:spcPts val="0"/>
+              </a:spcBef>
+              <a:spcAft>
+                <a:spcPts val="600"/>
+              </a:spcAft>
+            </a:pPr>
+            <a:r>
+              <a:rPr sz="1500" b="1" i="0">
+                <a:solidFill>
+                  <a:srgbClr val="2D7A3D"/>
+                </a:solidFill>
+                <a:latin typeface="Open Sans"/>
+              </a:rPr>
+              <a:t>Segurança</a:t>
+            </a:r>
+          </a:p>
+        </p:txBody>
+      </p:sp>
+      <p:sp>
+        <p:nvSpPr>
+          <p:cNvPr id="29" name="TextBox 28"/>
+          <p:cNvSpPr txBox="1"/>
+          <p:nvPr/>
+        </p:nvSpPr>
+        <p:spPr>
+          <a:xfrm>
+            <a:off x="6492240" y="4946904"/>
+            <a:ext cx="5120640" cy="457200"/>
+          </a:xfrm>
+          <a:prstGeom prst="rect">
+            <a:avLst/>
+          </a:prstGeom>
+          <a:noFill/>
+        </p:spPr>
+        <p:txBody>
+          <a:bodyPr wrap="square" anchor="t" lIns="0" rIns="0" tIns="0" bIns="0">
+            <a:spAutoFit/>
+          </a:bodyPr>
+          <a:lstStyle/>
+          <a:p>
+            <a:pPr algn="l">
+              <a:lnSpc>
+                <a:spcPct val="100000"/>
+              </a:lnSpc>
+              <a:spcBef>
+                <a:spcPts val="0"/>
+              </a:spcBef>
+              <a:spcAft>
+                <a:spcPts val="600"/>
+              </a:spcAft>
+            </a:pPr>
+            <a:r>
+              <a:rPr sz="1300" b="0" i="0">
+                <a:solidFill>
+                  <a:srgbClr val="212121"/>
+                </a:solidFill>
+                <a:latin typeface="Open Sans"/>
+              </a:rPr>
+              <a:t>cripto, controle de acesso, auditoria</a:t>
+            </a:r>
+          </a:p>
+        </p:txBody>
+      </p:sp>
+      <p:sp>
+        <p:nvSpPr>
+          <p:cNvPr id="30" name="Rounded Rectangle 29"/>
+          <p:cNvSpPr/>
+          <p:nvPr/>
+        </p:nvSpPr>
+        <p:spPr>
+          <a:xfrm>
+            <a:off x="411480" y="5532119"/>
+            <a:ext cx="11384280" cy="749808"/>
+          </a:xfrm>
+          <a:prstGeom prst="roundRect">
+            <a:avLst/>
+          </a:prstGeom>
+          <a:solidFill>
+            <a:srgbClr val="E8F0DB"/>
+          </a:solidFill>
+          <a:ln w="12700">
+            <a:solidFill>
+              <a:srgbClr val="7CB342"/>
+            </a:solidFill>
+          </a:ln>
+          <a:effectLst/>
+        </p:spPr>
+        <p:style>
+          <a:lnRef idx="1">
+            <a:schemeClr val="accent1"/>
+          </a:lnRef>
+          <a:fillRef idx="3">
+            <a:schemeClr val="accent1"/>
+          </a:fillRef>
+          <a:effectRef idx="2">
+            <a:schemeClr val="accent1"/>
+          </a:effectRef>
+          <a:fontRef idx="minor">
+            <a:schemeClr val="lt1"/>
+          </a:fontRef>
+        </p:style>
+        <p:txBody>
+          <a:bodyPr rtlCol="0" anchor="ctr"/>
+          <a:lstStyle/>
+          <a:p>
+            <a:pPr algn="ctr"/>
+          </a:p>
+        </p:txBody>
+      </p:sp>
+      <p:sp>
+        <p:nvSpPr>
+          <p:cNvPr id="31" name="Rounded Rectangle 30"/>
+          <p:cNvSpPr/>
+          <p:nvPr/>
+        </p:nvSpPr>
+        <p:spPr>
+          <a:xfrm>
+            <a:off x="502920" y="5623559"/>
+            <a:ext cx="1920240" cy="566927"/>
+          </a:xfrm>
+          <a:prstGeom prst="roundRect">
+            <a:avLst/>
+          </a:prstGeom>
+          <a:solidFill>
+            <a:srgbClr val="2D7A3D"/>
+          </a:solidFill>
+          <a:ln>
+            <a:noFill/>
+          </a:ln>
+          <a:effectLst/>
+        </p:spPr>
+        <p:style>
+          <a:lnRef idx="1">
+            <a:schemeClr val="accent1"/>
+          </a:lnRef>
+          <a:fillRef idx="3">
+            <a:schemeClr val="accent1"/>
+          </a:fillRef>
+          <a:effectRef idx="2">
+            <a:schemeClr val="accent1"/>
+          </a:effectRef>
+          <a:fontRef idx="minor">
+            <a:schemeClr val="lt1"/>
+          </a:fontRef>
+        </p:style>
+        <p:txBody>
+          <a:bodyPr rtlCol="0" anchor="ctr"/>
+          <a:lstStyle/>
+          <a:p>
+            <a:pPr algn="ctr"/>
+          </a:p>
+        </p:txBody>
+      </p:sp>
+      <p:sp>
+        <p:nvSpPr>
+          <p:cNvPr id="32" name="TextBox 31"/>
+          <p:cNvSpPr txBox="1"/>
+          <p:nvPr/>
+        </p:nvSpPr>
+        <p:spPr>
+          <a:xfrm>
+            <a:off x="502920" y="5733287"/>
+            <a:ext cx="1920240" cy="457200"/>
+          </a:xfrm>
+          <a:prstGeom prst="rect">
+            <a:avLst/>
+          </a:prstGeom>
+          <a:noFill/>
+        </p:spPr>
+        <p:txBody>
+          <a:bodyPr wrap="square" anchor="t" lIns="0" rIns="0" tIns="0" bIns="0">
+            <a:spAutoFit/>
+          </a:bodyPr>
+          <a:lstStyle/>
+          <a:p>
+            <a:pPr algn="ctr">
+              <a:lnSpc>
+                <a:spcPct val="100000"/>
+              </a:lnSpc>
+              <a:spcBef>
+                <a:spcPts val="0"/>
+              </a:spcBef>
+              <a:spcAft>
+                <a:spcPts val="600"/>
+              </a:spcAft>
+            </a:pPr>
+            <a:r>
+              <a:rPr sz="1800" b="1" i="0">
+                <a:solidFill>
+                  <a:srgbClr val="FFFFFF"/>
+                </a:solidFill>
+                <a:latin typeface="Open Sans"/>
+              </a:rPr>
+              <a:t>Art. 38</a:t>
+            </a:r>
+          </a:p>
+        </p:txBody>
+      </p:sp>
+      <p:sp>
+        <p:nvSpPr>
+          <p:cNvPr id="33" name="TextBox 32"/>
+          <p:cNvSpPr txBox="1"/>
+          <p:nvPr/>
+        </p:nvSpPr>
+        <p:spPr>
+          <a:xfrm>
+            <a:off x="2697480" y="5733287"/>
+            <a:ext cx="3657600" cy="457200"/>
+          </a:xfrm>
+          <a:prstGeom prst="rect">
+            <a:avLst/>
+          </a:prstGeom>
+          <a:noFill/>
+        </p:spPr>
+        <p:txBody>
+          <a:bodyPr wrap="square" anchor="t" lIns="0" rIns="0" tIns="0" bIns="0">
+            <a:spAutoFit/>
+          </a:bodyPr>
+          <a:lstStyle/>
+          <a:p>
+            <a:pPr algn="l">
+              <a:lnSpc>
+                <a:spcPct val="100000"/>
+              </a:lnSpc>
+              <a:spcBef>
+                <a:spcPts val="0"/>
+              </a:spcBef>
+              <a:spcAft>
+                <a:spcPts val="600"/>
+              </a:spcAft>
+            </a:pPr>
+            <a:r>
+              <a:rPr sz="1500" b="1" i="0">
+                <a:solidFill>
+                  <a:srgbClr val="2D7A3D"/>
+                </a:solidFill>
+                <a:latin typeface="Open Sans"/>
+              </a:rPr>
+              <a:t>RIPD/DPIA</a:t>
+            </a:r>
+          </a:p>
+        </p:txBody>
+      </p:sp>
+      <p:sp>
+        <p:nvSpPr>
+          <p:cNvPr id="34" name="TextBox 33"/>
+          <p:cNvSpPr txBox="1"/>
+          <p:nvPr/>
+        </p:nvSpPr>
+        <p:spPr>
+          <a:xfrm>
+            <a:off x="6492240" y="5751575"/>
+            <a:ext cx="5120640" cy="457200"/>
+          </a:xfrm>
+          <a:prstGeom prst="rect">
+            <a:avLst/>
+          </a:prstGeom>
+          <a:noFill/>
+        </p:spPr>
+        <p:txBody>
+          <a:bodyPr wrap="square" anchor="t" lIns="0" rIns="0" tIns="0" bIns="0">
+            <a:spAutoFit/>
+          </a:bodyPr>
+          <a:lstStyle/>
+          <a:p>
+            <a:pPr algn="l">
+              <a:lnSpc>
+                <a:spcPct val="100000"/>
+              </a:lnSpc>
+              <a:spcBef>
+                <a:spcPts val="0"/>
+              </a:spcBef>
+              <a:spcAft>
+                <a:spcPts val="600"/>
+              </a:spcAft>
+            </a:pPr>
+            <a:r>
+              <a:rPr sz="1300" b="0" i="0">
+                <a:solidFill>
+                  <a:srgbClr val="212121"/>
+                </a:solidFill>
+                <a:latin typeface="Open Sans"/>
+              </a:rPr>
+              <a:t>relatório de impacto em tratamento de alto risco</a:t>
+            </a:r>
+          </a:p>
+        </p:txBody>
+      </p:sp>
+      <p:sp>
+        <p:nvSpPr>
+          <p:cNvPr id="35" name="TextBox 34"/>
           <p:cNvSpPr txBox="1"/>
           <p:nvPr/>
         </p:nvSpPr>
@@ -9212,13 +10037,13 @@
         <p:spPr>
           <a:xfrm>
             <a:off x="0" y="0"/>
-            <a:ext cx="12191695" cy="6858000"/>
+            <a:ext cx="12191695" cy="1234440"/>
           </a:xfrm>
           <a:prstGeom prst="rect">
             <a:avLst/>
           </a:prstGeom>
           <a:solidFill>
-            <a:srgbClr val="1F5232"/>
+            <a:srgbClr val="2D7A3D"/>
           </a:solidFill>
           <a:ln>
             <a:noFill/>
@@ -9255,8 +10080,8 @@
         </p:nvSpPr>
         <p:spPr>
           <a:xfrm>
-            <a:off x="457200" y="2194560"/>
-            <a:ext cx="11247120" cy="548640"/>
+            <a:off x="457200" y="164592"/>
+            <a:ext cx="11247120" cy="640080"/>
           </a:xfrm>
           <a:prstGeom prst="rect">
             <a:avLst/>
@@ -9269,7 +10094,7 @@
           </a:bodyPr>
           <a:lstStyle/>
           <a:p>
-            <a:pPr algn="ctr">
+            <a:pPr algn="l">
               <a:lnSpc>
                 <a:spcPct val="100000"/>
               </a:lnSpc>
@@ -9281,13 +10106,13 @@
               </a:spcAft>
             </a:pPr>
             <a:r>
-              <a:rPr sz="2000" b="1" i="0">
-                <a:solidFill>
-                  <a:srgbClr val="7CB342"/>
-                </a:solidFill>
-                <a:latin typeface="Open Sans"/>
-              </a:rPr>
-              <a:t>PARTE 3</a:t>
+              <a:rPr sz="3200" b="1" i="0">
+                <a:solidFill>
+                  <a:srgbClr val="FFFFFF"/>
+                </a:solidFill>
+                <a:latin typeface="Open Sans"/>
+              </a:rPr>
+              <a:t>Como escrever um bom requisito</a:t>
             </a:r>
           </a:p>
         </p:txBody>
@@ -9300,8 +10125,8 @@
         </p:nvSpPr>
         <p:spPr>
           <a:xfrm>
-            <a:off x="457200" y="2834640"/>
-            <a:ext cx="11247120" cy="1280160"/>
+            <a:off x="457200" y="777240"/>
+            <a:ext cx="11247120" cy="365760"/>
           </a:xfrm>
           <a:prstGeom prst="rect">
             <a:avLst/>
@@ -9314,7 +10139,7 @@
           </a:bodyPr>
           <a:lstStyle/>
           <a:p>
-            <a:pPr algn="ctr">
+            <a:pPr algn="l">
               <a:lnSpc>
                 <a:spcPct val="100000"/>
               </a:lnSpc>
@@ -9326,27 +10151,281 @@
               </a:spcAft>
             </a:pPr>
             <a:r>
-              <a:rPr sz="6000" b="1" i="0">
-                <a:solidFill>
-                  <a:srgbClr val="FFFFFF"/>
-                </a:solidFill>
-                <a:latin typeface="Open Sans"/>
-              </a:rPr>
-              <a:t>No VidaPlus</a:t>
-            </a:r>
-          </a:p>
-        </p:txBody>
-      </p:sp>
-      <p:sp>
-        <p:nvSpPr>
-          <p:cNvPr id="5" name="TextBox 4"/>
+              <a:rPr sz="1600" b="0" i="1">
+                <a:solidFill>
+                  <a:srgbClr val="E0E8DB"/>
+                </a:solidFill>
+                <a:latin typeface="Open Sans"/>
+              </a:rPr>
+              <a:t>Critérios de qualidade: SMART e testável</a:t>
+            </a:r>
+          </a:p>
+        </p:txBody>
+      </p:sp>
+      <p:sp>
+        <p:nvSpPr>
+          <p:cNvPr id="5" name="Rounded Rectangle 4"/>
+          <p:cNvSpPr/>
+          <p:nvPr/>
+        </p:nvSpPr>
+        <p:spPr>
+          <a:xfrm>
+            <a:off x="411480" y="1463040"/>
+            <a:ext cx="11384280" cy="5029200"/>
+          </a:xfrm>
+          <a:prstGeom prst="roundRect">
+            <a:avLst/>
+          </a:prstGeom>
+          <a:solidFill>
+            <a:srgbClr val="F5F5F5"/>
+          </a:solidFill>
+          <a:ln w="15875">
+            <a:solidFill>
+              <a:srgbClr val="7CB342"/>
+            </a:solidFill>
+          </a:ln>
+          <a:effectLst/>
+        </p:spPr>
+        <p:style>
+          <a:lnRef idx="1">
+            <a:schemeClr val="accent1"/>
+          </a:lnRef>
+          <a:fillRef idx="3">
+            <a:schemeClr val="accent1"/>
+          </a:fillRef>
+          <a:effectRef idx="2">
+            <a:schemeClr val="accent1"/>
+          </a:effectRef>
+          <a:fontRef idx="minor">
+            <a:schemeClr val="lt1"/>
+          </a:fontRef>
+        </p:style>
+        <p:txBody>
+          <a:bodyPr rtlCol="0" anchor="ctr"/>
+          <a:lstStyle/>
+          <a:p>
+            <a:pPr algn="ctr"/>
+          </a:p>
+        </p:txBody>
+      </p:sp>
+      <p:sp>
+        <p:nvSpPr>
+          <p:cNvPr id="6" name="TextBox 5"/>
           <p:cNvSpPr txBox="1"/>
           <p:nvPr/>
         </p:nvSpPr>
         <p:spPr>
           <a:xfrm>
-            <a:off x="457200" y="4297680"/>
-            <a:ext cx="11247120" cy="457200"/>
+            <a:off x="868680" y="1783080"/>
+            <a:ext cx="10515600" cy="4572000"/>
+          </a:xfrm>
+          <a:prstGeom prst="rect">
+            <a:avLst/>
+          </a:prstGeom>
+          <a:noFill/>
+        </p:spPr>
+        <p:txBody>
+          <a:bodyPr wrap="square">
+            <a:spAutoFit/>
+          </a:bodyPr>
+          <a:lstStyle/>
+          <a:p>
+            <a:pPr algn="l">
+              <a:lnSpc>
+                <a:spcPct val="110000"/>
+              </a:lnSpc>
+              <a:spcAft>
+                <a:spcPts val="1400"/>
+              </a:spcAft>
+            </a:pPr>
+            <a:r>
+              <a:rPr sz="2000" b="1">
+                <a:solidFill>
+                  <a:srgbClr val="7CB342"/>
+                </a:solidFill>
+                <a:latin typeface="Open Sans"/>
+              </a:rPr>
+              <a:t>▸ </a:t>
+            </a:r>
+            <a:r>
+              <a:rPr sz="1800" b="1">
+                <a:solidFill>
+                  <a:srgbClr val="2D7A3D"/>
+                </a:solidFill>
+                <a:latin typeface="Open Sans"/>
+              </a:rPr>
+              <a:t>Específico: </a:t>
+            </a:r>
+            <a:r>
+              <a:rPr sz="1800">
+                <a:solidFill>
+                  <a:srgbClr val="212121"/>
+                </a:solidFill>
+                <a:latin typeface="Open Sans"/>
+              </a:rPr>
+              <a:t>sem ambiguidade — evite 'ser seguro' ou 'proteger as senhas'.</a:t>
+            </a:r>
+          </a:p>
+          <a:p>
+            <a:pPr algn="l">
+              <a:lnSpc>
+                <a:spcPct val="110000"/>
+              </a:lnSpc>
+              <a:spcAft>
+                <a:spcPts val="1400"/>
+              </a:spcAft>
+            </a:pPr>
+            <a:r>
+              <a:rPr sz="2000" b="1">
+                <a:solidFill>
+                  <a:srgbClr val="7CB342"/>
+                </a:solidFill>
+                <a:latin typeface="Open Sans"/>
+              </a:rPr>
+              <a:t>▸ </a:t>
+            </a:r>
+            <a:r>
+              <a:rPr sz="1800" b="1">
+                <a:solidFill>
+                  <a:srgbClr val="2D7A3D"/>
+                </a:solidFill>
+                <a:latin typeface="Open Sans"/>
+              </a:rPr>
+              <a:t>Mensurável/testável: </a:t>
+            </a:r>
+            <a:r>
+              <a:rPr sz="1800">
+                <a:solidFill>
+                  <a:srgbClr val="212121"/>
+                </a:solidFill>
+                <a:latin typeface="Open Sans"/>
+              </a:rPr>
+              <a:t>dá para verificar com um teste.</a:t>
+            </a:r>
+          </a:p>
+          <a:p>
+            <a:pPr algn="l">
+              <a:lnSpc>
+                <a:spcPct val="110000"/>
+              </a:lnSpc>
+              <a:spcAft>
+                <a:spcPts val="1400"/>
+              </a:spcAft>
+            </a:pPr>
+            <a:r>
+              <a:rPr sz="2000" b="1">
+                <a:solidFill>
+                  <a:srgbClr val="7CB342"/>
+                </a:solidFill>
+                <a:latin typeface="Open Sans"/>
+              </a:rPr>
+              <a:t>▸ </a:t>
+            </a:r>
+            <a:r>
+              <a:rPr sz="1800" b="1">
+                <a:solidFill>
+                  <a:srgbClr val="2D7A3D"/>
+                </a:solidFill>
+                <a:latin typeface="Open Sans"/>
+              </a:rPr>
+              <a:t>Rastreável: </a:t>
+            </a:r>
+            <a:r>
+              <a:rPr sz="1800">
+                <a:solidFill>
+                  <a:srgbClr val="212121"/>
+                </a:solidFill>
+                <a:latin typeface="Open Sans"/>
+              </a:rPr>
+              <a:t>ligado a um ativo, a uma ameaça e a uma fonte.</a:t>
+            </a:r>
+          </a:p>
+          <a:p>
+            <a:pPr algn="l">
+              <a:lnSpc>
+                <a:spcPct val="110000"/>
+              </a:lnSpc>
+              <a:spcAft>
+                <a:spcPts val="1400"/>
+              </a:spcAft>
+            </a:pPr>
+            <a:r>
+              <a:rPr sz="2000" b="1">
+                <a:solidFill>
+                  <a:srgbClr val="7CB342"/>
+                </a:solidFill>
+                <a:latin typeface="Open Sans"/>
+              </a:rPr>
+              <a:t>▸ </a:t>
+            </a:r>
+            <a:r>
+              <a:rPr sz="1800" b="1">
+                <a:solidFill>
+                  <a:srgbClr val="2D7A3D"/>
+                </a:solidFill>
+                <a:latin typeface="Open Sans"/>
+              </a:rPr>
+              <a:t>Ruim: </a:t>
+            </a:r>
+            <a:r>
+              <a:rPr sz="1800">
+                <a:solidFill>
+                  <a:srgbClr val="212121"/>
+                </a:solidFill>
+                <a:latin typeface="Open Sans"/>
+              </a:rPr>
+              <a:t>'O sistema deve proteger as senhas.'</a:t>
+            </a:r>
+          </a:p>
+          <a:p>
+            <a:pPr algn="l">
+              <a:lnSpc>
+                <a:spcPct val="110000"/>
+              </a:lnSpc>
+              <a:spcAft>
+                <a:spcPts val="1400"/>
+              </a:spcAft>
+            </a:pPr>
+            <a:r>
+              <a:rPr sz="2000" b="1">
+                <a:solidFill>
+                  <a:srgbClr val="7CB342"/>
+                </a:solidFill>
+                <a:latin typeface="Open Sans"/>
+              </a:rPr>
+              <a:t>▸ </a:t>
+            </a:r>
+            <a:r>
+              <a:rPr sz="1800" b="1">
+                <a:solidFill>
+                  <a:srgbClr val="2D7A3D"/>
+                </a:solidFill>
+                <a:latin typeface="Open Sans"/>
+              </a:rPr>
+              <a:t>Bom: </a:t>
+            </a:r>
+            <a:r>
+              <a:rPr sz="1800">
+                <a:solidFill>
+                  <a:srgbClr val="212121"/>
+                </a:solidFill>
+                <a:latin typeface="Open Sans"/>
+              </a:rPr>
+              <a:t>'Senhas com Argon2id (m=19MiB), salt de 16 bytes; MD5/SHA-1 proibidos.'</a:t>
+            </a:r>
+          </a:p>
+        </p:txBody>
+      </p:sp>
+      <p:sp>
+        <p:nvSpPr>
+          <p:cNvPr id="7" name="TextBox 6"/>
+          <p:cNvSpPr txBox="1"/>
+          <p:nvPr/>
+        </p:nvSpPr>
+        <p:spPr>
+          <a:xfrm>
+            <a:off x="10972800" y="6446520"/>
+            <a:ext cx="914400" cy="320040"/>
           </a:xfrm>
           <a:prstGeom prst="rect">
             <a:avLst/>
@@ -9359,7 +10438,7 @@
           </a:bodyPr>
           <a:lstStyle/>
           <a:p>
-            <a:pPr algn="ctr">
+            <a:pPr algn="r">
               <a:lnSpc>
                 <a:spcPct val="100000"/>
               </a:lnSpc>
@@ -9371,58 +10450,14 @@
               </a:spcAft>
             </a:pPr>
             <a:r>
-              <a:rPr sz="2200" b="0" i="1">
-                <a:solidFill>
-                  <a:srgbClr val="CCD7C0"/>
-                </a:solidFill>
-                <a:latin typeface="Open Sans"/>
-              </a:rPr>
-              <a:t>A etapa desta semana (Fase 1)</a:t>
-            </a:r>
-          </a:p>
-        </p:txBody>
-      </p:sp>
-      <p:sp>
-        <p:nvSpPr>
-          <p:cNvPr id="6" name="Rectangle 5"/>
-          <p:cNvSpPr/>
-          <p:nvPr/>
-        </p:nvSpPr>
-        <p:spPr>
-          <a:xfrm>
-            <a:off x="5184648" y="4983480"/>
-            <a:ext cx="1828800" cy="25400"/>
-          </a:xfrm>
-          <a:prstGeom prst="rect">
-            <a:avLst/>
-          </a:prstGeom>
-          <a:solidFill>
-            <a:srgbClr val="7CB342"/>
-          </a:solidFill>
-          <a:ln>
-            <a:noFill/>
-          </a:ln>
-          <a:effectLst/>
-        </p:spPr>
-        <p:style>
-          <a:lnRef idx="1">
-            <a:schemeClr val="accent1"/>
-          </a:lnRef>
-          <a:fillRef idx="3">
-            <a:schemeClr val="accent1"/>
-          </a:fillRef>
-          <a:effectRef idx="2">
-            <a:schemeClr val="accent1"/>
-          </a:effectRef>
-          <a:fontRef idx="minor">
-            <a:schemeClr val="lt1"/>
-          </a:fontRef>
-        </p:style>
-        <p:txBody>
-          <a:bodyPr rtlCol="0" anchor="ctr"/>
-          <a:lstStyle/>
-          <a:p>
-            <a:pPr algn="ctr"/>
+              <a:rPr sz="1100" b="0" i="0">
+                <a:solidFill>
+                  <a:srgbClr val="616161"/>
+                </a:solidFill>
+                <a:latin typeface="Open Sans"/>
+              </a:rPr>
+              <a:t>9</a:t>
+            </a:r>
           </a:p>
         </p:txBody>
       </p:sp>
@@ -9752,4 +10787,324 @@
   </a:objectDefaults>
   <a:extraClrSchemeLst/>
 </a:theme>
+</file>
+
+<file path=ppt/theme/theme2.xml><?xml version="1.0" encoding="utf-8"?>
+<a:theme xmlns:a="http://schemas.openxmlformats.org/drawingml/2006/main" name="Office Theme">
+  <a:themeElements>
+    <a:clrScheme name="Office">
+      <a:dk1>
+        <a:sysClr val="windowText" lastClr="000000"/>
+      </a:dk1>
+      <a:lt1>
+        <a:sysClr val="window" lastClr="FFFFFF"/>
+      </a:lt1>
+      <a:dk2>
+        <a:srgbClr val="1F497D"/>
+      </a:dk2>
+      <a:lt2>
+        <a:srgbClr val="EEECE1"/>
+      </a:lt2>
+      <a:accent1>
+        <a:srgbClr val="4F81BD"/>
+      </a:accent1>
+      <a:accent2>
+        <a:srgbClr val="C0504D"/>
+      </a:accent2>
+      <a:accent3>
+        <a:srgbClr val="9BBB59"/>
+      </a:accent3>
+      <a:accent4>
+        <a:srgbClr val="8064A2"/>
+      </a:accent4>
+      <a:accent5>
+        <a:srgbClr val="4BACC6"/>
+      </a:accent5>
+      <a:accent6>
+        <a:srgbClr val="F79646"/>
+      </a:accent6>
+      <a:hlink>
+        <a:srgbClr val="0000FF"/>
+      </a:hlink>
+      <a:folHlink>
+        <a:srgbClr val="800080"/>
+      </a:folHlink>
+    </a:clrScheme>
+    <a:fontScheme name="Office">
+      <a:majorFont>
+        <a:latin typeface="Calibri"/>
+        <a:ea typeface=""/>
+        <a:cs typeface=""/>
+        <a:font script="Jpan" typeface="ＭＳ Ｐゴシック"/>
+        <a:font script="Hang" typeface="맑은 고딕"/>
+        <a:font script="Hans" typeface="宋体"/>
+        <a:font script="Hant" typeface="新細明體"/>
+        <a:font script="Arab" typeface="Times New Roman"/>
+        <a:font script="Hebr" typeface="Times New Roman"/>
+        <a:font script="Thai" typeface="Angsana New"/>
+        <a:font script="Ethi" typeface="Nyala"/>
+        <a:font script="Beng" typeface="Vrinda"/>
+        <a:font script="Gujr" typeface="Shruti"/>
+        <a:font script="Khmr" typeface="MoolBoran"/>
+        <a:font script="Knda" typeface="Tunga"/>
+        <a:font script="Guru" typeface="Raavi"/>
+        <a:font script="Cans" typeface="Euphemia"/>
+        <a:font script="Cher" typeface="Plantagenet Cherokee"/>
+        <a:font script="Yiii" typeface="Microsoft Yi Baiti"/>
+        <a:font script="Tibt" typeface="Microsoft Himalaya"/>
+        <a:font script="Thaa" typeface="MV Boli"/>
+        <a:font script="Deva" typeface="Mangal"/>
+        <a:font script="Telu" typeface="Gautami"/>
+        <a:font script="Taml" typeface="Latha"/>
+        <a:font script="Syrc" typeface="Estrangelo Edessa"/>
+        <a:font script="Orya" typeface="Kalinga"/>
+        <a:font script="Mlym" typeface="Kartika"/>
+        <a:font script="Laoo" typeface="DokChampa"/>
+        <a:font script="Sinh" typeface="Iskoola Pota"/>
+        <a:font script="Mong" typeface="Mongolian Baiti"/>
+        <a:font script="Viet" typeface="Times New Roman"/>
+        <a:font script="Uigh" typeface="Microsoft Uighur"/>
+        <a:font script="Geor" typeface="Sylfaen"/>
+      </a:majorFont>
+      <a:minorFont>
+        <a:latin typeface="Calibri"/>
+        <a:ea typeface=""/>
+        <a:cs typeface=""/>
+        <a:font script="Jpan" typeface="ＭＳ Ｐゴシック"/>
+        <a:font script="Hang" typeface="맑은 고딕"/>
+        <a:font script="Hans" typeface="宋体"/>
+        <a:font script="Hant" typeface="新細明體"/>
+        <a:font script="Arab" typeface="Arial"/>
+        <a:font script="Hebr" typeface="Arial"/>
+        <a:font script="Thai" typeface="Cordia New"/>
+        <a:font script="Ethi" typeface="Nyala"/>
+        <a:font script="Beng" typeface="Vrinda"/>
+        <a:font script="Gujr" typeface="Shruti"/>
+        <a:font script="Khmr" typeface="DaunPenh"/>
+        <a:font script="Knda" typeface="Tunga"/>
+        <a:font script="Guru" typeface="Raavi"/>
+        <a:font script="Cans" typeface="Euphemia"/>
+        <a:font script="Cher" typeface="Plantagenet Cherokee"/>
+        <a:font script="Yiii" typeface="Microsoft Yi Baiti"/>
+        <a:font script="Tibt" typeface="Microsoft Himalaya"/>
+        <a:font script="Thaa" typeface="MV Boli"/>
+        <a:font script="Deva" typeface="Mangal"/>
+        <a:font script="Telu" typeface="Gautami"/>
+        <a:font script="Taml" typeface="Latha"/>
+        <a:font script="Syrc" typeface="Estrangelo Edessa"/>
+        <a:font script="Orya" typeface="Kalinga"/>
+        <a:font script="Mlym" typeface="Kartika"/>
+        <a:font script="Laoo" typeface="DokChampa"/>
+        <a:font script="Sinh" typeface="Iskoola Pota"/>
+        <a:font script="Mong" typeface="Mongolian Baiti"/>
+        <a:font script="Viet" typeface="Arial"/>
+        <a:font script="Uigh" typeface="Microsoft Uighur"/>
+        <a:font script="Geor" typeface="Sylfaen"/>
+      </a:minorFont>
+    </a:fontScheme>
+    <a:fmtScheme name="Office">
+      <a:fillStyleLst>
+        <a:solidFill>
+          <a:schemeClr val="phClr"/>
+        </a:solidFill>
+        <a:gradFill rotWithShape="1">
+          <a:gsLst>
+            <a:gs pos="0">
+              <a:schemeClr val="phClr">
+                <a:tint val="50000"/>
+                <a:satMod val="300000"/>
+              </a:schemeClr>
+            </a:gs>
+            <a:gs pos="35000">
+              <a:schemeClr val="phClr">
+                <a:tint val="37000"/>
+                <a:satMod val="300000"/>
+              </a:schemeClr>
+            </a:gs>
+            <a:gs pos="100000">
+              <a:schemeClr val="phClr">
+                <a:tint val="15000"/>
+                <a:satMod val="350000"/>
+              </a:schemeClr>
+            </a:gs>
+          </a:gsLst>
+          <a:lin ang="16200000" scaled="1"/>
+        </a:gradFill>
+        <a:gradFill rotWithShape="1">
+          <a:gsLst>
+            <a:gs pos="0">
+              <a:schemeClr val="phClr">
+                <a:tint val="100000"/>
+                <a:shade val="100000"/>
+                <a:satMod val="130000"/>
+              </a:schemeClr>
+            </a:gs>
+            <a:gs pos="100000">
+              <a:schemeClr val="phClr">
+                <a:tint val="50000"/>
+                <a:shade val="100000"/>
+                <a:satMod val="350000"/>
+              </a:schemeClr>
+            </a:gs>
+          </a:gsLst>
+          <a:lin ang="16200000" scaled="0"/>
+        </a:gradFill>
+      </a:fillStyleLst>
+      <a:lnStyleLst>
+        <a:ln w="9525" cap="flat" cmpd="sng" algn="ctr">
+          <a:solidFill>
+            <a:schemeClr val="phClr">
+              <a:shade val="95000"/>
+              <a:satMod val="105000"/>
+            </a:schemeClr>
+          </a:solidFill>
+          <a:prstDash val="solid"/>
+        </a:ln>
+        <a:ln w="25400" cap="flat" cmpd="sng" algn="ctr">
+          <a:solidFill>
+            <a:schemeClr val="phClr"/>
+          </a:solidFill>
+          <a:prstDash val="solid"/>
+        </a:ln>
+        <a:ln w="38100" cap="flat" cmpd="sng" algn="ctr">
+          <a:solidFill>
+            <a:schemeClr val="phClr"/>
+          </a:solidFill>
+          <a:prstDash val="solid"/>
+        </a:ln>
+      </a:lnStyleLst>
+      <a:effectStyleLst>
+        <a:effectStyle>
+          <a:effectLst>
+            <a:outerShdw blurRad="40000" dist="20000" dir="5400000" rotWithShape="0">
+              <a:srgbClr val="000000">
+                <a:alpha val="38000"/>
+              </a:srgbClr>
+            </a:outerShdw>
+          </a:effectLst>
+        </a:effectStyle>
+        <a:effectStyle>
+          <a:effectLst>
+            <a:outerShdw blurRad="40000" dist="23000" dir="5400000" rotWithShape="0">
+              <a:srgbClr val="000000">
+                <a:alpha val="35000"/>
+              </a:srgbClr>
+            </a:outerShdw>
+          </a:effectLst>
+        </a:effectStyle>
+        <a:effectStyle>
+          <a:effectLst>
+            <a:outerShdw blurRad="40000" dist="23000" dir="5400000" rotWithShape="0">
+              <a:srgbClr val="000000">
+                <a:alpha val="35000"/>
+              </a:srgbClr>
+            </a:outerShdw>
+          </a:effectLst>
+          <a:scene3d>
+            <a:camera prst="orthographicFront">
+              <a:rot lat="0" lon="0" rev="0"/>
+            </a:camera>
+            <a:lightRig rig="threePt" dir="t">
+              <a:rot lat="0" lon="0" rev="1200000"/>
+            </a:lightRig>
+          </a:scene3d>
+          <a:sp3d>
+            <a:bevelT w="63500" h="25400"/>
+          </a:sp3d>
+        </a:effectStyle>
+      </a:effectStyleLst>
+      <a:bgFillStyleLst>
+        <a:solidFill>
+          <a:schemeClr val="phClr"/>
+        </a:solidFill>
+        <a:gradFill rotWithShape="1">
+          <a:gsLst>
+            <a:gs pos="0">
+              <a:schemeClr val="phClr">
+                <a:tint val="40000"/>
+                <a:satMod val="350000"/>
+              </a:schemeClr>
+            </a:gs>
+            <a:gs pos="40000">
+              <a:schemeClr val="phClr">
+                <a:tint val="45000"/>
+                <a:shade val="99000"/>
+                <a:satMod val="350000"/>
+              </a:schemeClr>
+            </a:gs>
+            <a:gs pos="100000">
+              <a:schemeClr val="phClr">
+                <a:shade val="20000"/>
+                <a:satMod val="255000"/>
+              </a:schemeClr>
+            </a:gs>
+          </a:gsLst>
+          <a:path path="circle">
+            <a:fillToRect l="50000" t="-80000" r="50000" b="180000"/>
+          </a:path>
+        </a:gradFill>
+        <a:gradFill rotWithShape="1">
+          <a:gsLst>
+            <a:gs pos="0">
+              <a:schemeClr val="phClr">
+                <a:tint val="80000"/>
+                <a:satMod val="300000"/>
+              </a:schemeClr>
+            </a:gs>
+            <a:gs pos="100000">
+              <a:schemeClr val="phClr">
+                <a:shade val="30000"/>
+                <a:satMod val="200000"/>
+              </a:schemeClr>
+            </a:gs>
+          </a:gsLst>
+          <a:path path="circle">
+            <a:fillToRect l="50000" t="50000" r="50000" b="50000"/>
+          </a:path>
+        </a:gradFill>
+      </a:bgFillStyleLst>
+    </a:fmtScheme>
+  </a:themeElements>
+  <a:objectDefaults>
+    <a:spDef>
+      <a:spPr/>
+      <a:bodyPr/>
+      <a:lstStyle/>
+      <a:style>
+        <a:lnRef idx="1">
+          <a:schemeClr val="accent1"/>
+        </a:lnRef>
+        <a:fillRef idx="3">
+          <a:schemeClr val="accent1"/>
+        </a:fillRef>
+        <a:effectRef idx="2">
+          <a:schemeClr val="accent1"/>
+        </a:effectRef>
+        <a:fontRef idx="minor">
+          <a:schemeClr val="lt1"/>
+        </a:fontRef>
+      </a:style>
+    </a:spDef>
+    <a:lnDef>
+      <a:spPr/>
+      <a:bodyPr/>
+      <a:lstStyle/>
+      <a:style>
+        <a:lnRef idx="2">
+          <a:schemeClr val="accent1"/>
+        </a:lnRef>
+        <a:fillRef idx="0">
+          <a:schemeClr val="accent1"/>
+        </a:fillRef>
+        <a:effectRef idx="1">
+          <a:schemeClr val="accent1"/>
+        </a:effectRef>
+        <a:fontRef idx="minor">
+          <a:schemeClr val="tx1"/>
+        </a:fontRef>
+      </a:style>
+    </a:lnDef>
+  </a:objectDefaults>
+  <a:extraClrSchemeLst/>
+</a:theme>
 </file>
--- a/aulas/aula-02-requisitos-e-lgpd.pptx
+++ b/aulas/aula-02-requisitos-e-lgpd.pptx
@@ -12862,7 +12862,7 @@
                 </a:solidFill>
                 <a:latin typeface="Open Sans"/>
               </a:rPr>
-              <a:t>Catálogo inicial de requisitos</a:t>
+              <a:t>Catálogo de requisitos por funcionalidade (dossiê §2)</a:t>
             </a:r>
           </a:p>
         </p:txBody>
@@ -12959,7 +12959,7 @@
                 </a:solidFill>
                 <a:latin typeface="Open Sans"/>
               </a:rPr>
-              <a:t>Por funcionalidade: </a:t>
+              <a:t>Entregar: </a:t>
             </a:r>
             <a:r>
               <a:rPr sz="1800">
@@ -12968,7 +12968,7 @@
                 </a:solidFill>
                 <a:latin typeface="Open Sans"/>
               </a:rPr>
-              <a:t>derive o RFS (mecanismo) + o RGS (garantia).</a:t>
+              <a:t>por funcionalidade do pacote, um RFS (mecanismo) + um RGS (garantia) testáveis.</a:t>
             </a:r>
           </a:p>
           <a:p>
@@ -13042,7 +13042,7 @@
                 </a:solidFill>
                 <a:latin typeface="Open Sans"/>
               </a:rPr>
-              <a:t>defina o alvo (L2) e justifique pela classificação de dados.</a:t>
+              <a:t>defina o alvo (L2) e justifique pela classificação da Fase 0.</a:t>
             </a:r>
           </a:p>
           <a:p>
@@ -13070,7 +13070,7 @@
                 </a:solidFill>
                 <a:latin typeface="Open Sans"/>
               </a:rPr>
-              <a:t>Quatro fontes: </a:t>
+              <a:t>Formato de cada requisito: </a:t>
             </a:r>
             <a:r>
               <a:rPr sz="1800">
@@ -13079,7 +13079,7 @@
                 </a:solidFill>
                 <a:latin typeface="Open Sans"/>
               </a:rPr>
-              <a:t>cruze negócio, lei, padrões e ameaças.</a:t>
+              <a:t>ativo + ameaça + atributo + critério verificável + rastreabilidade.</a:t>
             </a:r>
           </a:p>
           <a:p>
@@ -13107,7 +13107,7 @@
                 </a:solidFill>
                 <a:latin typeface="Open Sans"/>
               </a:rPr>
-              <a:t>Regra de ouro: </a:t>
+              <a:t>Pronto quando: </a:t>
             </a:r>
             <a:r>
               <a:rPr sz="1800">
@@ -13116,7 +13116,7 @@
                 </a:solidFill>
                 <a:latin typeface="Open Sans"/>
               </a:rPr>
-              <a:t>ativo + ameaça + atributo + critério verificável + rastreabilidade.</a:t>
+              <a:t>toda funcionalidade do pacote tem RFS + RGS e base legal.</a:t>
             </a:r>
           </a:p>
         </p:txBody>

--- a/aulas/aula-02-requisitos-e-lgpd.pptx
+++ b/aulas/aula-02-requisitos-e-lgpd.pptx
@@ -5006,7 +5006,7 @@
                 </a:solidFill>
                 <a:latin typeface="Open Sans"/>
               </a:rPr>
-              <a:t>TADS · Segurança em Sistemas Computacionais</a:t>
+              <a:t>TADS · Segurança de Sistemas Computacionais</a:t>
             </a:r>
           </a:p>
         </p:txBody>
